--- a/docs/Software-Agent-Interview-Deck.pptx
+++ b/docs/Software-Agent-Interview-Deck.pptx
@@ -2,17 +2,17 @@
 <file path=ppt/presentation.xml><?xml version="1.0" encoding="utf-8"?>
 <p:presentation xmlns:p="http://schemas.openxmlformats.org/presentationml/2006/main">
   <p:sldMasterIdLst>
-    <p:sldMasterId xmlns:r="http://schemas.openxmlformats.org/officeDocument/2006/relationships" id="2147483648" r:id="Rbabae787551b4589"/>
+    <p:sldMasterId xmlns:r="http://schemas.openxmlformats.org/officeDocument/2006/relationships" id="2147483648" r:id="R742753db2a2a46c6"/>
   </p:sldMasterIdLst>
   <p:notesMasterIdLst>
-    <p:notesMasterId xmlns:r="http://schemas.openxmlformats.org/officeDocument/2006/relationships" r:id="Rdc2cf8b19b0d4794"/>
+    <p:notesMasterId xmlns:r="http://schemas.openxmlformats.org/officeDocument/2006/relationships" r:id="R85d8d02a150c4324"/>
   </p:notesMasterIdLst>
   <p:sldIdLst>
-    <p:sldId xmlns:r="http://schemas.openxmlformats.org/officeDocument/2006/relationships" id="256" r:id="Rbe352be3e2954a6d"/>
-    <p:sldId xmlns:r="http://schemas.openxmlformats.org/officeDocument/2006/relationships" id="257" r:id="R7d82d47b9f7a4118"/>
-    <p:sldId xmlns:r="http://schemas.openxmlformats.org/officeDocument/2006/relationships" id="258" r:id="Rf1fcd361f1564568"/>
-    <p:sldId xmlns:r="http://schemas.openxmlformats.org/officeDocument/2006/relationships" id="259" r:id="Rc0250546cc444782"/>
-    <p:sldId xmlns:r="http://schemas.openxmlformats.org/officeDocument/2006/relationships" id="260" r:id="R21471e95cf9b4bc1"/>
+    <p:sldId xmlns:r="http://schemas.openxmlformats.org/officeDocument/2006/relationships" id="256" r:id="Rf2011f01855440c5"/>
+    <p:sldId xmlns:r="http://schemas.openxmlformats.org/officeDocument/2006/relationships" id="257" r:id="R92e4ecb1d2da4eb7"/>
+    <p:sldId xmlns:r="http://schemas.openxmlformats.org/officeDocument/2006/relationships" id="258" r:id="R21ab8b79ae1840c7"/>
+    <p:sldId xmlns:r="http://schemas.openxmlformats.org/officeDocument/2006/relationships" id="259" r:id="R557b049d1b60400b"/>
+    <p:sldId xmlns:r="http://schemas.openxmlformats.org/officeDocument/2006/relationships" id="260" r:id="Ra5db6e99d04a4284"/>
   </p:sldIdLst>
   <p:sldSz cx="12192000" cy="6858000"/>
   <p:notesSz cx="6858000" cy="9144000"/>
@@ -471,7 +471,7 @@
           </a:p>
           <a:p xmlns:a="http://schemas.openxmlformats.org/drawingml/2006/main">
             <a:r>
-              <a:t>- Current CI evidence: https://github.com/Isoldelu/software-engineering-agent/actions/runs/33309988987</a:t>
+              <a:t>- Current CI evidence: https://github.com/Isoldelu/software-engineering-agent/actions/runs/33311037079</a:t>
             </a:r>
           </a:p>
         </p:txBody>
@@ -846,7 +846,7 @@
           </a:p>
           <a:p xmlns:a="http://schemas.openxmlformats.org/drawingml/2006/main">
             <a:r>
-              <a:t>- GitHub Actions Run: https://github.com/Isoldelu/software-engineering-agent/actions/runs/33309988987</a:t>
+              <a:t>- GitHub Actions Run: https://github.com/Isoldelu/software-engineering-agent/actions/runs/33311037079</a:t>
             </a:r>
           </a:p>
           <a:p xmlns:a="http://schemas.openxmlformats.org/drawingml/2006/main">
@@ -929,7 +929,7 @@
   </p:cSld>
   <p:clrMap bg1="lt1" tx1="dk1" bg2="lt2" tx2="dk2" accent1="accent1" accent2="accent2" accent3="accent3" accent4="accent4" accent5="accent5" accent6="accent6" hlink="hlink" folHlink="folHlink"/>
   <p:sldLayoutIdLst>
-    <p:sldLayoutId xmlns:r="http://schemas.openxmlformats.org/officeDocument/2006/relationships" id="2147483649" r:id="Re030b388e7494487"/>
+    <p:sldLayoutId xmlns:r="http://schemas.openxmlformats.org/officeDocument/2006/relationships" id="2147483649" r:id="R7bf8e9fce0f94399"/>
   </p:sldLayoutIdLst>
   <p:txStyles>
     <p:titleStyle>
@@ -1480,7 +1480,7 @@
           <p:cNvPr id="17" name="">
             <a:extLst xmlns:a="http://schemas.openxmlformats.org/drawingml/2006/main">
               <a:ext uri="{FF2B5EF4-FFF2-40B4-BE49-F238E27FC236}">
-                <a16:creationId xmlns:a16="http://schemas.microsoft.com/office/drawing/2014/main" id="{6FA3193D-D846-4D01-A781-C9B6600E6C0C}"/>
+                <a16:creationId xmlns:a16="http://schemas.microsoft.com/office/drawing/2014/main" id="{DA7D8289-20A0-41F5-A9EC-75836B860241}"/>
               </a:ext>
             </a:extLst>
           </p:cNvPr>
@@ -1513,7 +1513,7 @@
           <p:cNvPr id="2" name="">
             <a:extLst xmlns:a="http://schemas.openxmlformats.org/drawingml/2006/main">
               <a:ext uri="{FF2B5EF4-FFF2-40B4-BE49-F238E27FC236}">
-                <a16:creationId xmlns:a16="http://schemas.microsoft.com/office/drawing/2014/main" id="{0356CFAF-7C6F-48AB-9FE9-36B3F48D71BA}"/>
+                <a16:creationId xmlns:a16="http://schemas.microsoft.com/office/drawing/2014/main" id="{0C1319BC-45CA-42A8-91DA-2C67A818D6C9}"/>
               </a:ext>
             </a:extLst>
           </p:cNvPr>
@@ -1571,7 +1571,7 @@
           <p:cNvPr id="3" name="">
             <a:extLst xmlns:a="http://schemas.openxmlformats.org/drawingml/2006/main">
               <a:ext uri="{FF2B5EF4-FFF2-40B4-BE49-F238E27FC236}">
-                <a16:creationId xmlns:a16="http://schemas.microsoft.com/office/drawing/2014/main" id="{3ABC67F4-587B-4849-B08E-CED0AB73470D}"/>
+                <a16:creationId xmlns:a16="http://schemas.microsoft.com/office/drawing/2014/main" id="{DE19C4FA-2E8B-4553-9D47-D047D2E3137A}"/>
               </a:ext>
             </a:extLst>
           </p:cNvPr>
@@ -1652,7 +1652,7 @@
           <p:cNvPr id="4" name="">
             <a:extLst xmlns:a="http://schemas.openxmlformats.org/drawingml/2006/main">
               <a:ext uri="{FF2B5EF4-FFF2-40B4-BE49-F238E27FC236}">
-                <a16:creationId xmlns:a16="http://schemas.microsoft.com/office/drawing/2014/main" id="{ADB8DBD0-DEB4-4166-AC25-9795444EA294}"/>
+                <a16:creationId xmlns:a16="http://schemas.microsoft.com/office/drawing/2014/main" id="{DB674EDD-C01B-4DF5-9434-46A9A5A2F4DF}"/>
               </a:ext>
             </a:extLst>
           </p:cNvPr>
@@ -1710,7 +1710,7 @@
           <p:cNvPr id="5" name="">
             <a:extLst xmlns:a="http://schemas.openxmlformats.org/drawingml/2006/main">
               <a:ext uri="{FF2B5EF4-FFF2-40B4-BE49-F238E27FC236}">
-                <a16:creationId xmlns:a16="http://schemas.microsoft.com/office/drawing/2014/main" id="{78A04E98-CD99-4F33-9151-2FD59AF37547}"/>
+                <a16:creationId xmlns:a16="http://schemas.microsoft.com/office/drawing/2014/main" id="{7005F3C0-6BEB-4BB4-8041-7BB03A545231}"/>
               </a:ext>
             </a:extLst>
           </p:cNvPr>
@@ -1743,7 +1743,7 @@
           <p:cNvPr id="6" name="">
             <a:extLst xmlns:a="http://schemas.openxmlformats.org/drawingml/2006/main">
               <a:ext uri="{FF2B5EF4-FFF2-40B4-BE49-F238E27FC236}">
-                <a16:creationId xmlns:a16="http://schemas.microsoft.com/office/drawing/2014/main" id="{A17672AB-205B-4D19-8CDC-AE5AEE732B21}"/>
+                <a16:creationId xmlns:a16="http://schemas.microsoft.com/office/drawing/2014/main" id="{7F567EE5-A39C-418A-980A-41E01355AA9B}"/>
               </a:ext>
             </a:extLst>
           </p:cNvPr>
@@ -1801,7 +1801,7 @@
           <p:cNvPr id="7" name="">
             <a:extLst xmlns:a="http://schemas.openxmlformats.org/drawingml/2006/main">
               <a:ext uri="{FF2B5EF4-FFF2-40B4-BE49-F238E27FC236}">
-                <a16:creationId xmlns:a16="http://schemas.microsoft.com/office/drawing/2014/main" id="{50556291-2960-4F79-AE12-C83B6CBBA106}"/>
+                <a16:creationId xmlns:a16="http://schemas.microsoft.com/office/drawing/2014/main" id="{1BA95B3D-84BC-45E6-908D-CE239549F517}"/>
               </a:ext>
             </a:extLst>
           </p:cNvPr>
@@ -1951,7 +1951,7 @@
           <p:cNvPr id="8" name="">
             <a:extLst xmlns:a="http://schemas.openxmlformats.org/drawingml/2006/main">
               <a:ext uri="{FF2B5EF4-FFF2-40B4-BE49-F238E27FC236}">
-                <a16:creationId xmlns:a16="http://schemas.microsoft.com/office/drawing/2014/main" id="{5FBA6921-F3AD-4B84-8E32-029FF561CC83}"/>
+                <a16:creationId xmlns:a16="http://schemas.microsoft.com/office/drawing/2014/main" id="{7413E023-CBAA-489C-9B38-2E4DB9168181}"/>
               </a:ext>
             </a:extLst>
           </p:cNvPr>
@@ -1984,7 +1984,7 @@
           <p:cNvPr id="9" name="">
             <a:extLst xmlns:a="http://schemas.openxmlformats.org/drawingml/2006/main">
               <a:ext uri="{FF2B5EF4-FFF2-40B4-BE49-F238E27FC236}">
-                <a16:creationId xmlns:a16="http://schemas.microsoft.com/office/drawing/2014/main" id="{DDF0C37D-4918-47B8-9BA5-5D709AC0D0D2}"/>
+                <a16:creationId xmlns:a16="http://schemas.microsoft.com/office/drawing/2014/main" id="{D878BAA1-6EC0-4DF4-8BD9-6B598937D4BA}"/>
               </a:ext>
             </a:extLst>
           </p:cNvPr>
@@ -2032,7 +2032,7 @@
                 <a:ea typeface="Microsoft YaHei"/>
                 <a:cs typeface="Microsoft YaHei"/>
               </a:rPr>
-              <a:t>131</a:t>
+              <a:t>134</a:t>
             </a:r>
           </a:p>
         </p:txBody>
@@ -2042,7 +2042,7 @@
           <p:cNvPr id="10" name="">
             <a:extLst xmlns:a="http://schemas.openxmlformats.org/drawingml/2006/main">
               <a:ext uri="{FF2B5EF4-FFF2-40B4-BE49-F238E27FC236}">
-                <a16:creationId xmlns:a16="http://schemas.microsoft.com/office/drawing/2014/main" id="{FCBFE822-13DB-4B4B-B9E8-DB1CFF3854F5}"/>
+                <a16:creationId xmlns:a16="http://schemas.microsoft.com/office/drawing/2014/main" id="{1203CE5A-6088-4940-B6F7-53385DE19B99}"/>
               </a:ext>
             </a:extLst>
           </p:cNvPr>
@@ -2100,7 +2100,7 @@
           <p:cNvPr id="11" name="">
             <a:extLst xmlns:a="http://schemas.openxmlformats.org/drawingml/2006/main">
               <a:ext uri="{FF2B5EF4-FFF2-40B4-BE49-F238E27FC236}">
-                <a16:creationId xmlns:a16="http://schemas.microsoft.com/office/drawing/2014/main" id="{07DF60E0-9476-4796-8283-548EEA6A3D04}"/>
+                <a16:creationId xmlns:a16="http://schemas.microsoft.com/office/drawing/2014/main" id="{238080D8-6639-4EB3-85C2-27EC5746D1C9}"/>
               </a:ext>
             </a:extLst>
           </p:cNvPr>
@@ -2158,7 +2158,7 @@
           <p:cNvPr id="12" name="">
             <a:extLst xmlns:a="http://schemas.openxmlformats.org/drawingml/2006/main">
               <a:ext uri="{FF2B5EF4-FFF2-40B4-BE49-F238E27FC236}">
-                <a16:creationId xmlns:a16="http://schemas.microsoft.com/office/drawing/2014/main" id="{BA9E0BC5-5BAD-4F86-B0A2-F9DA8C5F7A4A}"/>
+                <a16:creationId xmlns:a16="http://schemas.microsoft.com/office/drawing/2014/main" id="{1E63ED9D-0DCF-4AE0-A177-73BCC83684D0}"/>
               </a:ext>
             </a:extLst>
           </p:cNvPr>
@@ -2216,7 +2216,7 @@
           <p:cNvPr id="13" name="">
             <a:extLst xmlns:a="http://schemas.openxmlformats.org/drawingml/2006/main">
               <a:ext uri="{FF2B5EF4-FFF2-40B4-BE49-F238E27FC236}">
-                <a16:creationId xmlns:a16="http://schemas.microsoft.com/office/drawing/2014/main" id="{984563C8-396D-4B35-AFF7-60796D1D9307}"/>
+                <a16:creationId xmlns:a16="http://schemas.microsoft.com/office/drawing/2014/main" id="{DB7BBAF4-97D6-4571-9E97-A35164EA9568}"/>
               </a:ext>
             </a:extLst>
           </p:cNvPr>
@@ -2274,7 +2274,7 @@
           <p:cNvPr id="14" name="">
             <a:extLst xmlns:a="http://schemas.openxmlformats.org/drawingml/2006/main">
               <a:ext uri="{FF2B5EF4-FFF2-40B4-BE49-F238E27FC236}">
-                <a16:creationId xmlns:a16="http://schemas.microsoft.com/office/drawing/2014/main" id="{215ECDBB-7E54-4AF5-992C-03F34743421A}"/>
+                <a16:creationId xmlns:a16="http://schemas.microsoft.com/office/drawing/2014/main" id="{478B1915-7858-40CB-A90D-CFF3A876F13C}"/>
               </a:ext>
             </a:extLst>
           </p:cNvPr>
@@ -2332,7 +2332,7 @@
           <p:cNvPr id="15" name="">
             <a:extLst xmlns:a="http://schemas.openxmlformats.org/drawingml/2006/main">
               <a:ext uri="{FF2B5EF4-FFF2-40B4-BE49-F238E27FC236}">
-                <a16:creationId xmlns:a16="http://schemas.microsoft.com/office/drawing/2014/main" id="{CC85ADD5-9435-4E57-BB86-12E7D3634C5E}"/>
+                <a16:creationId xmlns:a16="http://schemas.microsoft.com/office/drawing/2014/main" id="{DDC9633B-71CE-4B6F-86CA-AA2F449FFF3F}"/>
               </a:ext>
             </a:extLst>
           </p:cNvPr>
@@ -2390,7 +2390,7 @@
           <p:cNvPr id="16" name="">
             <a:extLst xmlns:a="http://schemas.openxmlformats.org/drawingml/2006/main">
               <a:ext uri="{FF2B5EF4-FFF2-40B4-BE49-F238E27FC236}">
-                <a16:creationId xmlns:a16="http://schemas.microsoft.com/office/drawing/2014/main" id="{2B162C44-B70A-456C-9EC0-7B5AD2FDB07E}"/>
+                <a16:creationId xmlns:a16="http://schemas.microsoft.com/office/drawing/2014/main" id="{6BFD04FA-1E65-402A-B7B2-CB242B937BFA}"/>
               </a:ext>
             </a:extLst>
           </p:cNvPr>
@@ -2446,7 +2446,7 @@
     </p:spTree>
     <p:extLst>
       <p:ext uri="{BB962C8B-B14F-4D97-AF65-F5344CB8AC3E}">
-        <p14:creationId xmlns:p14="http://schemas.microsoft.com/office/powerpoint/2010/main" val="1697965344"/>
+        <p14:creationId xmlns:p14="http://schemas.microsoft.com/office/powerpoint/2010/main" val="101381335"/>
       </p:ext>
     </p:extLst>
   </p:cSld>
@@ -2477,7 +2477,7 @@
           <p:cNvPr id="35" name="">
             <a:extLst xmlns:a="http://schemas.openxmlformats.org/drawingml/2006/main">
               <a:ext uri="{FF2B5EF4-FFF2-40B4-BE49-F238E27FC236}">
-                <a16:creationId xmlns:a16="http://schemas.microsoft.com/office/drawing/2014/main" id="{0A2CD96F-CB90-49CF-B595-096D0059DD17}"/>
+                <a16:creationId xmlns:a16="http://schemas.microsoft.com/office/drawing/2014/main" id="{8655F2C6-53C1-4F54-9388-182F442AF24B}"/>
               </a:ext>
             </a:extLst>
           </p:cNvPr>
@@ -2535,7 +2535,7 @@
           <p:cNvPr id="2" name="">
             <a:extLst xmlns:a="http://schemas.openxmlformats.org/drawingml/2006/main">
               <a:ext uri="{FF2B5EF4-FFF2-40B4-BE49-F238E27FC236}">
-                <a16:creationId xmlns:a16="http://schemas.microsoft.com/office/drawing/2014/main" id="{DAA005D4-B996-429A-A411-1C94880F6350}"/>
+                <a16:creationId xmlns:a16="http://schemas.microsoft.com/office/drawing/2014/main" id="{2EA1CD29-D056-4D84-819E-4B829D99240A}"/>
               </a:ext>
             </a:extLst>
           </p:cNvPr>
@@ -2568,7 +2568,7 @@
           <p:cNvPr id="3" name="">
             <a:extLst xmlns:a="http://schemas.openxmlformats.org/drawingml/2006/main">
               <a:ext uri="{FF2B5EF4-FFF2-40B4-BE49-F238E27FC236}">
-                <a16:creationId xmlns:a16="http://schemas.microsoft.com/office/drawing/2014/main" id="{443910B5-CCC0-474D-BBE7-044768DD306C}"/>
+                <a16:creationId xmlns:a16="http://schemas.microsoft.com/office/drawing/2014/main" id="{CC6CC13C-8E15-41BB-A802-6EDED9039E09}"/>
               </a:ext>
             </a:extLst>
           </p:cNvPr>
@@ -2626,7 +2626,7 @@
           <p:cNvPr id="4" name="">
             <a:extLst xmlns:a="http://schemas.openxmlformats.org/drawingml/2006/main">
               <a:ext uri="{FF2B5EF4-FFF2-40B4-BE49-F238E27FC236}">
-                <a16:creationId xmlns:a16="http://schemas.microsoft.com/office/drawing/2014/main" id="{87CFF223-BBBB-43B0-8F18-061BC4C9916A}"/>
+                <a16:creationId xmlns:a16="http://schemas.microsoft.com/office/drawing/2014/main" id="{94F7F5A6-1E8C-4593-954D-9E14616C1C38}"/>
               </a:ext>
             </a:extLst>
           </p:cNvPr>
@@ -2684,7 +2684,7 @@
           <p:cNvPr id="5" name="">
             <a:extLst xmlns:a="http://schemas.openxmlformats.org/drawingml/2006/main">
               <a:ext uri="{FF2B5EF4-FFF2-40B4-BE49-F238E27FC236}">
-                <a16:creationId xmlns:a16="http://schemas.microsoft.com/office/drawing/2014/main" id="{99E3ABFB-ECA3-4CB3-A23B-6ACEA54A6B38}"/>
+                <a16:creationId xmlns:a16="http://schemas.microsoft.com/office/drawing/2014/main" id="{CFE9FE5F-28B8-41E0-AC17-2D0EB8166654}"/>
               </a:ext>
             </a:extLst>
           </p:cNvPr>
@@ -2742,7 +2742,7 @@
           <p:cNvPr id="6" name="">
             <a:extLst xmlns:a="http://schemas.openxmlformats.org/drawingml/2006/main">
               <a:ext uri="{FF2B5EF4-FFF2-40B4-BE49-F238E27FC236}">
-                <a16:creationId xmlns:a16="http://schemas.microsoft.com/office/drawing/2014/main" id="{9EEE25E3-F26D-4EFD-A70F-CBFB65EAF6E8}"/>
+                <a16:creationId xmlns:a16="http://schemas.microsoft.com/office/drawing/2014/main" id="{DEAA70EE-6128-4BE9-9C24-925D14BCCCBD}"/>
               </a:ext>
             </a:extLst>
           </p:cNvPr>
@@ -2800,7 +2800,7 @@
           <p:cNvPr id="7" name="">
             <a:extLst xmlns:a="http://schemas.openxmlformats.org/drawingml/2006/main">
               <a:ext uri="{FF2B5EF4-FFF2-40B4-BE49-F238E27FC236}">
-                <a16:creationId xmlns:a16="http://schemas.microsoft.com/office/drawing/2014/main" id="{58E65073-E6AA-4585-8D8E-8DD58FD01431}"/>
+                <a16:creationId xmlns:a16="http://schemas.microsoft.com/office/drawing/2014/main" id="{52669DDD-6392-453D-9C93-8A85D6B7353D}"/>
               </a:ext>
             </a:extLst>
           </p:cNvPr>
@@ -2858,7 +2858,7 @@
           <p:cNvPr id="8" name="">
             <a:extLst xmlns:a="http://schemas.openxmlformats.org/drawingml/2006/main">
               <a:ext uri="{FF2B5EF4-FFF2-40B4-BE49-F238E27FC236}">
-                <a16:creationId xmlns:a16="http://schemas.microsoft.com/office/drawing/2014/main" id="{4BFFD934-57F6-41DC-A6BE-961FB8B8F26D}"/>
+                <a16:creationId xmlns:a16="http://schemas.microsoft.com/office/drawing/2014/main" id="{B258CBBF-6C6D-40F5-AFF7-CE3B4A5931CA}"/>
               </a:ext>
             </a:extLst>
           </p:cNvPr>
@@ -2891,7 +2891,7 @@
           <p:cNvPr id="9" name="">
             <a:extLst xmlns:a="http://schemas.openxmlformats.org/drawingml/2006/main">
               <a:ext uri="{FF2B5EF4-FFF2-40B4-BE49-F238E27FC236}">
-                <a16:creationId xmlns:a16="http://schemas.microsoft.com/office/drawing/2014/main" id="{6C9A2ABD-9748-44B3-8327-212C91EE0207}"/>
+                <a16:creationId xmlns:a16="http://schemas.microsoft.com/office/drawing/2014/main" id="{0ED559E1-69F8-44D2-B0F7-C246F7787422}"/>
               </a:ext>
             </a:extLst>
           </p:cNvPr>
@@ -2949,7 +2949,7 @@
           <p:cNvPr id="10" name="">
             <a:extLst xmlns:a="http://schemas.openxmlformats.org/drawingml/2006/main">
               <a:ext uri="{FF2B5EF4-FFF2-40B4-BE49-F238E27FC236}">
-                <a16:creationId xmlns:a16="http://schemas.microsoft.com/office/drawing/2014/main" id="{D31E8945-1D38-4349-98CA-65B43DF77BEB}"/>
+                <a16:creationId xmlns:a16="http://schemas.microsoft.com/office/drawing/2014/main" id="{E0E456E4-B7AC-4C7E-A6C1-93CC959D7018}"/>
               </a:ext>
             </a:extLst>
           </p:cNvPr>
@@ -3007,7 +3007,7 @@
           <p:cNvPr id="11" name="">
             <a:extLst xmlns:a="http://schemas.openxmlformats.org/drawingml/2006/main">
               <a:ext uri="{FF2B5EF4-FFF2-40B4-BE49-F238E27FC236}">
-                <a16:creationId xmlns:a16="http://schemas.microsoft.com/office/drawing/2014/main" id="{25E1B259-83A6-482D-BCDC-D921B92F28F8}"/>
+                <a16:creationId xmlns:a16="http://schemas.microsoft.com/office/drawing/2014/main" id="{6A3BE6A0-22CA-4F2B-A4C1-A5D23665BFCD}"/>
               </a:ext>
             </a:extLst>
           </p:cNvPr>
@@ -3040,7 +3040,7 @@
           <p:cNvPr id="12" name="">
             <a:extLst xmlns:a="http://schemas.openxmlformats.org/drawingml/2006/main">
               <a:ext uri="{FF2B5EF4-FFF2-40B4-BE49-F238E27FC236}">
-                <a16:creationId xmlns:a16="http://schemas.microsoft.com/office/drawing/2014/main" id="{BAADAC9C-36A7-4BFE-8859-CC0F21BABDB2}"/>
+                <a16:creationId xmlns:a16="http://schemas.microsoft.com/office/drawing/2014/main" id="{4C8A59CC-47A9-4E9A-BB09-202719F83A15}"/>
               </a:ext>
             </a:extLst>
           </p:cNvPr>
@@ -3098,7 +3098,7 @@
           <p:cNvPr id="13" name="">
             <a:extLst xmlns:a="http://schemas.openxmlformats.org/drawingml/2006/main">
               <a:ext uri="{FF2B5EF4-FFF2-40B4-BE49-F238E27FC236}">
-                <a16:creationId xmlns:a16="http://schemas.microsoft.com/office/drawing/2014/main" id="{478801CA-023F-45B4-B64E-5C37C9837867}"/>
+                <a16:creationId xmlns:a16="http://schemas.microsoft.com/office/drawing/2014/main" id="{1A3E3951-2F59-4BB7-931E-B8C13AD69B36}"/>
               </a:ext>
             </a:extLst>
           </p:cNvPr>
@@ -3156,7 +3156,7 @@
           <p:cNvPr id="14" name="">
             <a:extLst xmlns:a="http://schemas.openxmlformats.org/drawingml/2006/main">
               <a:ext uri="{FF2B5EF4-FFF2-40B4-BE49-F238E27FC236}">
-                <a16:creationId xmlns:a16="http://schemas.microsoft.com/office/drawing/2014/main" id="{AB3D126E-92B2-45C9-A55B-A48857E23CAF}"/>
+                <a16:creationId xmlns:a16="http://schemas.microsoft.com/office/drawing/2014/main" id="{80BBCDFD-0035-4948-909E-72841305CE07}"/>
               </a:ext>
             </a:extLst>
           </p:cNvPr>
@@ -3189,7 +3189,7 @@
           <p:cNvPr id="15" name="">
             <a:extLst xmlns:a="http://schemas.openxmlformats.org/drawingml/2006/main">
               <a:ext uri="{FF2B5EF4-FFF2-40B4-BE49-F238E27FC236}">
-                <a16:creationId xmlns:a16="http://schemas.microsoft.com/office/drawing/2014/main" id="{FE3BD1D9-47B8-4B77-816B-59BEC75D5D72}"/>
+                <a16:creationId xmlns:a16="http://schemas.microsoft.com/office/drawing/2014/main" id="{AD5E51BF-548C-46EE-9F56-F24D0AE26402}"/>
               </a:ext>
             </a:extLst>
           </p:cNvPr>
@@ -3247,7 +3247,7 @@
           <p:cNvPr id="16" name="">
             <a:extLst xmlns:a="http://schemas.openxmlformats.org/drawingml/2006/main">
               <a:ext uri="{FF2B5EF4-FFF2-40B4-BE49-F238E27FC236}">
-                <a16:creationId xmlns:a16="http://schemas.microsoft.com/office/drawing/2014/main" id="{FC1D4687-448C-461E-AE4D-21805C45FE29}"/>
+                <a16:creationId xmlns:a16="http://schemas.microsoft.com/office/drawing/2014/main" id="{0E8AAC72-287F-4610-A599-6E3E8EEC025C}"/>
               </a:ext>
             </a:extLst>
           </p:cNvPr>
@@ -3305,7 +3305,7 @@
           <p:cNvPr id="17" name="">
             <a:extLst xmlns:a="http://schemas.openxmlformats.org/drawingml/2006/main">
               <a:ext uri="{FF2B5EF4-FFF2-40B4-BE49-F238E27FC236}">
-                <a16:creationId xmlns:a16="http://schemas.microsoft.com/office/drawing/2014/main" id="{DA08DCB7-B2BA-474E-BEF9-BF8BA150A686}"/>
+                <a16:creationId xmlns:a16="http://schemas.microsoft.com/office/drawing/2014/main" id="{62501F02-7EA2-4F27-8CDC-6258A08AFE3B}"/>
               </a:ext>
             </a:extLst>
           </p:cNvPr>
@@ -3338,7 +3338,7 @@
           <p:cNvPr id="18" name="">
             <a:extLst xmlns:a="http://schemas.openxmlformats.org/drawingml/2006/main">
               <a:ext uri="{FF2B5EF4-FFF2-40B4-BE49-F238E27FC236}">
-                <a16:creationId xmlns:a16="http://schemas.microsoft.com/office/drawing/2014/main" id="{F8BEBD06-BEDA-4326-8FAF-C245047B0F19}"/>
+                <a16:creationId xmlns:a16="http://schemas.microsoft.com/office/drawing/2014/main" id="{29E48D92-9A14-403F-8AC8-321AC0FC807A}"/>
               </a:ext>
             </a:extLst>
           </p:cNvPr>
@@ -3396,7 +3396,7 @@
           <p:cNvPr id="19" name="">
             <a:extLst xmlns:a="http://schemas.openxmlformats.org/drawingml/2006/main">
               <a:ext uri="{FF2B5EF4-FFF2-40B4-BE49-F238E27FC236}">
-                <a16:creationId xmlns:a16="http://schemas.microsoft.com/office/drawing/2014/main" id="{B5DBBFE9-C9F0-4A5E-B96A-228EFAE2D952}"/>
+                <a16:creationId xmlns:a16="http://schemas.microsoft.com/office/drawing/2014/main" id="{B1670322-EAAE-446C-9A33-E93164FE8DA6}"/>
               </a:ext>
             </a:extLst>
           </p:cNvPr>
@@ -3454,7 +3454,7 @@
           <p:cNvPr id="20" name="">
             <a:extLst xmlns:a="http://schemas.openxmlformats.org/drawingml/2006/main">
               <a:ext uri="{FF2B5EF4-FFF2-40B4-BE49-F238E27FC236}">
-                <a16:creationId xmlns:a16="http://schemas.microsoft.com/office/drawing/2014/main" id="{1DCCA22A-FE2A-46CE-81AA-782A96178E10}"/>
+                <a16:creationId xmlns:a16="http://schemas.microsoft.com/office/drawing/2014/main" id="{EADB79D5-FB2C-42DB-98A5-58B33470BEA2}"/>
               </a:ext>
             </a:extLst>
           </p:cNvPr>
@@ -3487,7 +3487,7 @@
           <p:cNvPr id="21" name="">
             <a:extLst xmlns:a="http://schemas.openxmlformats.org/drawingml/2006/main">
               <a:ext uri="{FF2B5EF4-FFF2-40B4-BE49-F238E27FC236}">
-                <a16:creationId xmlns:a16="http://schemas.microsoft.com/office/drawing/2014/main" id="{6F6A4D0F-66BA-40C9-BA7F-162B4B1EDF8F}"/>
+                <a16:creationId xmlns:a16="http://schemas.microsoft.com/office/drawing/2014/main" id="{C395FD26-BCBD-4DD3-B915-D55DADE42F93}"/>
               </a:ext>
             </a:extLst>
           </p:cNvPr>
@@ -3545,7 +3545,7 @@
           <p:cNvPr id="22" name="">
             <a:extLst xmlns:a="http://schemas.openxmlformats.org/drawingml/2006/main">
               <a:ext uri="{FF2B5EF4-FFF2-40B4-BE49-F238E27FC236}">
-                <a16:creationId xmlns:a16="http://schemas.microsoft.com/office/drawing/2014/main" id="{E438FFFE-AB72-4029-BC73-AE9A7C387982}"/>
+                <a16:creationId xmlns:a16="http://schemas.microsoft.com/office/drawing/2014/main" id="{10215627-A012-44C4-A10C-AF9DECF79DE6}"/>
               </a:ext>
             </a:extLst>
           </p:cNvPr>
@@ -3603,7 +3603,7 @@
           <p:cNvPr id="23" name="">
             <a:extLst xmlns:a="http://schemas.openxmlformats.org/drawingml/2006/main">
               <a:ext uri="{FF2B5EF4-FFF2-40B4-BE49-F238E27FC236}">
-                <a16:creationId xmlns:a16="http://schemas.microsoft.com/office/drawing/2014/main" id="{4F07F76D-B726-4734-A145-D8C115EC9231}"/>
+                <a16:creationId xmlns:a16="http://schemas.microsoft.com/office/drawing/2014/main" id="{4E6BAA16-3CB9-4002-8C6E-B97204E63211}"/>
               </a:ext>
             </a:extLst>
           </p:cNvPr>
@@ -3661,7 +3661,7 @@
           <p:cNvPr id="24" name="">
             <a:extLst xmlns:a="http://schemas.openxmlformats.org/drawingml/2006/main">
               <a:ext uri="{FF2B5EF4-FFF2-40B4-BE49-F238E27FC236}">
-                <a16:creationId xmlns:a16="http://schemas.microsoft.com/office/drawing/2014/main" id="{E9B7C25D-E678-4573-9A72-1A6128CC9855}"/>
+                <a16:creationId xmlns:a16="http://schemas.microsoft.com/office/drawing/2014/main" id="{8BCAE2E6-A523-4B86-99AF-6C3F198CC151}"/>
               </a:ext>
             </a:extLst>
           </p:cNvPr>
@@ -3694,7 +3694,7 @@
           <p:cNvPr id="25" name="">
             <a:extLst xmlns:a="http://schemas.openxmlformats.org/drawingml/2006/main">
               <a:ext uri="{FF2B5EF4-FFF2-40B4-BE49-F238E27FC236}">
-                <a16:creationId xmlns:a16="http://schemas.microsoft.com/office/drawing/2014/main" id="{976C1116-A76F-45EB-B79C-0A8AA5CE7A23}"/>
+                <a16:creationId xmlns:a16="http://schemas.microsoft.com/office/drawing/2014/main" id="{C2C9C7C3-94E5-49F5-90BC-817274839C35}"/>
               </a:ext>
             </a:extLst>
           </p:cNvPr>
@@ -3727,7 +3727,7 @@
           <p:cNvPr id="26" name="">
             <a:extLst xmlns:a="http://schemas.openxmlformats.org/drawingml/2006/main">
               <a:ext uri="{FF2B5EF4-FFF2-40B4-BE49-F238E27FC236}">
-                <a16:creationId xmlns:a16="http://schemas.microsoft.com/office/drawing/2014/main" id="{096669D9-CA80-4B72-B3FB-6C1DF71A6A50}"/>
+                <a16:creationId xmlns:a16="http://schemas.microsoft.com/office/drawing/2014/main" id="{51908F0E-07AB-4C19-B0E8-7864A539A4FE}"/>
               </a:ext>
             </a:extLst>
           </p:cNvPr>
@@ -3785,7 +3785,7 @@
           <p:cNvPr id="27" name="">
             <a:extLst xmlns:a="http://schemas.openxmlformats.org/drawingml/2006/main">
               <a:ext uri="{FF2B5EF4-FFF2-40B4-BE49-F238E27FC236}">
-                <a16:creationId xmlns:a16="http://schemas.microsoft.com/office/drawing/2014/main" id="{C760818E-69FD-49D6-981E-5AB08B013E1E}"/>
+                <a16:creationId xmlns:a16="http://schemas.microsoft.com/office/drawing/2014/main" id="{86CB8553-B405-46E9-AEE0-64C900A567DE}"/>
               </a:ext>
             </a:extLst>
           </p:cNvPr>
@@ -3866,7 +3866,7 @@
           <p:cNvPr id="28" name="">
             <a:extLst xmlns:a="http://schemas.openxmlformats.org/drawingml/2006/main">
               <a:ext uri="{FF2B5EF4-FFF2-40B4-BE49-F238E27FC236}">
-                <a16:creationId xmlns:a16="http://schemas.microsoft.com/office/drawing/2014/main" id="{23E3BCDD-F3B2-4B07-80F3-FEA6E49103B4}"/>
+                <a16:creationId xmlns:a16="http://schemas.microsoft.com/office/drawing/2014/main" id="{E3EEE20F-FB4D-42E6-B820-ABC4651F60DC}"/>
               </a:ext>
             </a:extLst>
           </p:cNvPr>
@@ -3899,7 +3899,7 @@
           <p:cNvPr id="29" name="">
             <a:extLst xmlns:a="http://schemas.openxmlformats.org/drawingml/2006/main">
               <a:ext uri="{FF2B5EF4-FFF2-40B4-BE49-F238E27FC236}">
-                <a16:creationId xmlns:a16="http://schemas.microsoft.com/office/drawing/2014/main" id="{5ABF4829-C54C-49B0-AC85-592DEFAA48B5}"/>
+                <a16:creationId xmlns:a16="http://schemas.microsoft.com/office/drawing/2014/main" id="{2BB2C1D4-A512-4272-968B-47D6BACD0CF1}"/>
               </a:ext>
             </a:extLst>
           </p:cNvPr>
@@ -3957,7 +3957,7 @@
           <p:cNvPr id="30" name="">
             <a:extLst xmlns:a="http://schemas.openxmlformats.org/drawingml/2006/main">
               <a:ext uri="{FF2B5EF4-FFF2-40B4-BE49-F238E27FC236}">
-                <a16:creationId xmlns:a16="http://schemas.microsoft.com/office/drawing/2014/main" id="{DF3822FF-1596-47C9-AA69-E3C02349ACFD}"/>
+                <a16:creationId xmlns:a16="http://schemas.microsoft.com/office/drawing/2014/main" id="{8D83A81A-E4D7-4892-9FF6-EA4CFEE57C9F}"/>
               </a:ext>
             </a:extLst>
           </p:cNvPr>
@@ -4038,7 +4038,7 @@
           <p:cNvPr id="31" name="">
             <a:extLst xmlns:a="http://schemas.openxmlformats.org/drawingml/2006/main">
               <a:ext uri="{FF2B5EF4-FFF2-40B4-BE49-F238E27FC236}">
-                <a16:creationId xmlns:a16="http://schemas.microsoft.com/office/drawing/2014/main" id="{DD262ABC-708F-47B7-BAD7-2D180790EAB5}"/>
+                <a16:creationId xmlns:a16="http://schemas.microsoft.com/office/drawing/2014/main" id="{CF5349B3-3D13-43EE-B58E-8DACC5FF0396}"/>
               </a:ext>
             </a:extLst>
           </p:cNvPr>
@@ -4071,7 +4071,7 @@
           <p:cNvPr id="32" name="">
             <a:extLst xmlns:a="http://schemas.openxmlformats.org/drawingml/2006/main">
               <a:ext uri="{FF2B5EF4-FFF2-40B4-BE49-F238E27FC236}">
-                <a16:creationId xmlns:a16="http://schemas.microsoft.com/office/drawing/2014/main" id="{87452C5F-A7B1-48DE-B70F-8DBD3C907631}"/>
+                <a16:creationId xmlns:a16="http://schemas.microsoft.com/office/drawing/2014/main" id="{BE2F2CCA-2D70-4647-9391-1EAA4A48B4FB}"/>
               </a:ext>
             </a:extLst>
           </p:cNvPr>
@@ -4129,7 +4129,7 @@
           <p:cNvPr id="33" name="">
             <a:extLst xmlns:a="http://schemas.openxmlformats.org/drawingml/2006/main">
               <a:ext uri="{FF2B5EF4-FFF2-40B4-BE49-F238E27FC236}">
-                <a16:creationId xmlns:a16="http://schemas.microsoft.com/office/drawing/2014/main" id="{846CEFBD-797A-4478-BC3D-F2CA0BD6DE84}"/>
+                <a16:creationId xmlns:a16="http://schemas.microsoft.com/office/drawing/2014/main" id="{41CBCCCB-D43F-4D4C-9043-BD9BE3DE071A}"/>
               </a:ext>
             </a:extLst>
           </p:cNvPr>
@@ -4210,7 +4210,7 @@
           <p:cNvPr id="34" name="">
             <a:extLst xmlns:a="http://schemas.openxmlformats.org/drawingml/2006/main">
               <a:ext uri="{FF2B5EF4-FFF2-40B4-BE49-F238E27FC236}">
-                <a16:creationId xmlns:a16="http://schemas.microsoft.com/office/drawing/2014/main" id="{9AC0D1AF-3FAE-4A70-846E-F811B10F62DD}"/>
+                <a16:creationId xmlns:a16="http://schemas.microsoft.com/office/drawing/2014/main" id="{469BE812-DEFA-4D95-BDC7-EAEA42F2D128}"/>
               </a:ext>
             </a:extLst>
           </p:cNvPr>
@@ -4266,7 +4266,7 @@
     </p:spTree>
     <p:extLst>
       <p:ext uri="{BB962C8B-B14F-4D97-AF65-F5344CB8AC3E}">
-        <p14:creationId xmlns:p14="http://schemas.microsoft.com/office/powerpoint/2010/main" val="1012062467"/>
+        <p14:creationId xmlns:p14="http://schemas.microsoft.com/office/powerpoint/2010/main" val="1290007252"/>
       </p:ext>
     </p:extLst>
   </p:cSld>
@@ -4297,7 +4297,7 @@
           <p:cNvPr id="16" name="">
             <a:extLst xmlns:a="http://schemas.openxmlformats.org/drawingml/2006/main">
               <a:ext uri="{FF2B5EF4-FFF2-40B4-BE49-F238E27FC236}">
-                <a16:creationId xmlns:a16="http://schemas.microsoft.com/office/drawing/2014/main" id="{B8C586A0-369E-4FA4-A565-ACCA1365A483}"/>
+                <a16:creationId xmlns:a16="http://schemas.microsoft.com/office/drawing/2014/main" id="{6207A5C5-71AE-46D5-BAF9-C24FC6602775}"/>
               </a:ext>
             </a:extLst>
           </p:cNvPr>
@@ -4355,7 +4355,7 @@
           <p:cNvPr id="2" name="">
             <a:extLst xmlns:a="http://schemas.openxmlformats.org/drawingml/2006/main">
               <a:ext uri="{FF2B5EF4-FFF2-40B4-BE49-F238E27FC236}">
-                <a16:creationId xmlns:a16="http://schemas.microsoft.com/office/drawing/2014/main" id="{7793A830-1EAE-4B55-A0E5-DA39A31DC596}"/>
+                <a16:creationId xmlns:a16="http://schemas.microsoft.com/office/drawing/2014/main" id="{6F6B4190-93AF-4ABC-8A19-D7418449CC6A}"/>
               </a:ext>
             </a:extLst>
           </p:cNvPr>
@@ -4388,7 +4388,7 @@
           <p:cNvPr id="3" name="">
             <a:extLst xmlns:a="http://schemas.openxmlformats.org/drawingml/2006/main">
               <a:ext uri="{FF2B5EF4-FFF2-40B4-BE49-F238E27FC236}">
-                <a16:creationId xmlns:a16="http://schemas.microsoft.com/office/drawing/2014/main" id="{4F87B642-BB51-418A-B8FB-493ADAE4897C}"/>
+                <a16:creationId xmlns:a16="http://schemas.microsoft.com/office/drawing/2014/main" id="{C2DF5428-53DA-4AFF-99F8-52335C38102C}"/>
               </a:ext>
             </a:extLst>
           </p:cNvPr>
@@ -4446,7 +4446,7 @@
           <p:cNvPr id="4" name="">
             <a:extLst xmlns:a="http://schemas.openxmlformats.org/drawingml/2006/main">
               <a:ext uri="{FF2B5EF4-FFF2-40B4-BE49-F238E27FC236}">
-                <a16:creationId xmlns:a16="http://schemas.microsoft.com/office/drawing/2014/main" id="{E84956DB-4B8B-40AD-AAC7-EA9294C3590E}"/>
+                <a16:creationId xmlns:a16="http://schemas.microsoft.com/office/drawing/2014/main" id="{91F01406-B6F9-4C32-B49F-EF660FAAAB81}"/>
               </a:ext>
             </a:extLst>
           </p:cNvPr>
@@ -4504,7 +4504,7 @@
           <p:cNvPr id="5" name="">
             <a:extLst xmlns:a="http://schemas.openxmlformats.org/drawingml/2006/main">
               <a:ext uri="{FF2B5EF4-FFF2-40B4-BE49-F238E27FC236}">
-                <a16:creationId xmlns:a16="http://schemas.microsoft.com/office/drawing/2014/main" id="{DA89B4F3-543E-4EDA-81C6-8D4EC2948B84}"/>
+                <a16:creationId xmlns:a16="http://schemas.microsoft.com/office/drawing/2014/main" id="{BE2246F9-B3F0-436C-A32D-3FEE3A7204BE}"/>
               </a:ext>
             </a:extLst>
           </p:cNvPr>
@@ -4541,7 +4541,7 @@
           <p:nvPr/>
         </p:nvPicPr>
         <p:blipFill>
-          <a:blip xmlns:r="http://schemas.openxmlformats.org/officeDocument/2006/relationships" xmlns:a="http://schemas.openxmlformats.org/drawingml/2006/main" r:embed="R47209350ce044ad2"/>
+          <a:blip xmlns:r="http://schemas.openxmlformats.org/officeDocument/2006/relationships" xmlns:a="http://schemas.openxmlformats.org/drawingml/2006/main" r:embed="R6f31c9fe5353491b"/>
           <a:stretch xmlns:a="http://schemas.openxmlformats.org/drawingml/2006/main"/>
         </p:blipFill>
         <p:spPr>
@@ -4559,7 +4559,7 @@
           <p:cNvPr id="7" name="">
             <a:extLst xmlns:a="http://schemas.openxmlformats.org/drawingml/2006/main">
               <a:ext uri="{FF2B5EF4-FFF2-40B4-BE49-F238E27FC236}">
-                <a16:creationId xmlns:a16="http://schemas.microsoft.com/office/drawing/2014/main" id="{F166B764-D1E1-43FC-857E-0BB1DFCCE71E}"/>
+                <a16:creationId xmlns:a16="http://schemas.microsoft.com/office/drawing/2014/main" id="{E749F796-49E3-44DF-B98C-C178B2C38610}"/>
               </a:ext>
             </a:extLst>
           </p:cNvPr>
@@ -4617,7 +4617,7 @@
           <p:cNvPr id="8" name="">
             <a:extLst xmlns:a="http://schemas.openxmlformats.org/drawingml/2006/main">
               <a:ext uri="{FF2B5EF4-FFF2-40B4-BE49-F238E27FC236}">
-                <a16:creationId xmlns:a16="http://schemas.microsoft.com/office/drawing/2014/main" id="{FF6107E7-BBB1-4191-AA00-B6162BD1894F}"/>
+                <a16:creationId xmlns:a16="http://schemas.microsoft.com/office/drawing/2014/main" id="{CE63CDAD-05A0-4BE4-AC13-DBE6593E7791}"/>
               </a:ext>
             </a:extLst>
           </p:cNvPr>
@@ -4721,7 +4721,7 @@
           <p:cNvPr id="9" name="">
             <a:extLst xmlns:a="http://schemas.openxmlformats.org/drawingml/2006/main">
               <a:ext uri="{FF2B5EF4-FFF2-40B4-BE49-F238E27FC236}">
-                <a16:creationId xmlns:a16="http://schemas.microsoft.com/office/drawing/2014/main" id="{69E92C86-ABF5-40FF-9B10-BAA8F66E42D5}"/>
+                <a16:creationId xmlns:a16="http://schemas.microsoft.com/office/drawing/2014/main" id="{E82E7E39-C4D6-4820-937A-75A9A32F0CE3}"/>
               </a:ext>
             </a:extLst>
           </p:cNvPr>
@@ -4754,7 +4754,7 @@
           <p:cNvPr id="10" name="">
             <a:extLst xmlns:a="http://schemas.openxmlformats.org/drawingml/2006/main">
               <a:ext uri="{FF2B5EF4-FFF2-40B4-BE49-F238E27FC236}">
-                <a16:creationId xmlns:a16="http://schemas.microsoft.com/office/drawing/2014/main" id="{CF982DA5-D311-49CB-B22B-357D2BDB69DB}"/>
+                <a16:creationId xmlns:a16="http://schemas.microsoft.com/office/drawing/2014/main" id="{9008471C-3554-418E-8E91-76E88A85AC5F}"/>
               </a:ext>
             </a:extLst>
           </p:cNvPr>
@@ -4812,7 +4812,7 @@
           <p:cNvPr id="11" name="">
             <a:extLst xmlns:a="http://schemas.openxmlformats.org/drawingml/2006/main">
               <a:ext uri="{FF2B5EF4-FFF2-40B4-BE49-F238E27FC236}">
-                <a16:creationId xmlns:a16="http://schemas.microsoft.com/office/drawing/2014/main" id="{90E6244A-9107-40F7-A9A9-F7CE59D63BE7}"/>
+                <a16:creationId xmlns:a16="http://schemas.microsoft.com/office/drawing/2014/main" id="{4A1177FE-FA5C-45C5-A8FA-C63482931B4E}"/>
               </a:ext>
             </a:extLst>
           </p:cNvPr>
@@ -4870,7 +4870,7 @@
           <p:cNvPr id="12" name="">
             <a:extLst xmlns:a="http://schemas.openxmlformats.org/drawingml/2006/main">
               <a:ext uri="{FF2B5EF4-FFF2-40B4-BE49-F238E27FC236}">
-                <a16:creationId xmlns:a16="http://schemas.microsoft.com/office/drawing/2014/main" id="{929C3286-A39A-4EC0-9FEE-C704154A1BFE}"/>
+                <a16:creationId xmlns:a16="http://schemas.microsoft.com/office/drawing/2014/main" id="{4BA57588-86FA-4AA9-A44D-42E0ABC0A1A7}"/>
               </a:ext>
             </a:extLst>
           </p:cNvPr>
@@ -4928,7 +4928,7 @@
           <p:cNvPr id="13" name="">
             <a:extLst xmlns:a="http://schemas.openxmlformats.org/drawingml/2006/main">
               <a:ext uri="{FF2B5EF4-FFF2-40B4-BE49-F238E27FC236}">
-                <a16:creationId xmlns:a16="http://schemas.microsoft.com/office/drawing/2014/main" id="{7B851008-DED4-43B7-BC8F-247DF901A0E5}"/>
+                <a16:creationId xmlns:a16="http://schemas.microsoft.com/office/drawing/2014/main" id="{FA47A710-B5F7-4F33-80A5-33C3A3557F5F}"/>
               </a:ext>
             </a:extLst>
           </p:cNvPr>
@@ -4986,7 +4986,7 @@
           <p:cNvPr id="14" name="">
             <a:extLst xmlns:a="http://schemas.openxmlformats.org/drawingml/2006/main">
               <a:ext uri="{FF2B5EF4-FFF2-40B4-BE49-F238E27FC236}">
-                <a16:creationId xmlns:a16="http://schemas.microsoft.com/office/drawing/2014/main" id="{8CBE7B39-A5E7-4FCC-9147-D776BFB9F80A}"/>
+                <a16:creationId xmlns:a16="http://schemas.microsoft.com/office/drawing/2014/main" id="{AD8125AD-5642-4A2D-ABCF-531F62880912}"/>
               </a:ext>
             </a:extLst>
           </p:cNvPr>
@@ -5044,7 +5044,7 @@
           <p:cNvPr id="15" name="">
             <a:extLst xmlns:a="http://schemas.openxmlformats.org/drawingml/2006/main">
               <a:ext uri="{FF2B5EF4-FFF2-40B4-BE49-F238E27FC236}">
-                <a16:creationId xmlns:a16="http://schemas.microsoft.com/office/drawing/2014/main" id="{3BAD096E-97EA-4690-957D-332CC0E30309}"/>
+                <a16:creationId xmlns:a16="http://schemas.microsoft.com/office/drawing/2014/main" id="{C792A09E-221F-4C6A-9BFA-9CDE0F1D60C5}"/>
               </a:ext>
             </a:extLst>
           </p:cNvPr>
@@ -5100,7 +5100,7 @@
     </p:spTree>
     <p:extLst>
       <p:ext uri="{BB962C8B-B14F-4D97-AF65-F5344CB8AC3E}">
-        <p14:creationId xmlns:p14="http://schemas.microsoft.com/office/powerpoint/2010/main" val="504697998"/>
+        <p14:creationId xmlns:p14="http://schemas.microsoft.com/office/powerpoint/2010/main" val="2017024100"/>
       </p:ext>
     </p:extLst>
   </p:cSld>
@@ -5131,7 +5131,7 @@
           <p:cNvPr id="19" name="">
             <a:extLst xmlns:a="http://schemas.openxmlformats.org/drawingml/2006/main">
               <a:ext uri="{FF2B5EF4-FFF2-40B4-BE49-F238E27FC236}">
-                <a16:creationId xmlns:a16="http://schemas.microsoft.com/office/drawing/2014/main" id="{359E0F7B-4268-49F8-97FB-7F6E32AA8281}"/>
+                <a16:creationId xmlns:a16="http://schemas.microsoft.com/office/drawing/2014/main" id="{52929E6F-29A8-41D1-B7DF-7FE0295DEB51}"/>
               </a:ext>
             </a:extLst>
           </p:cNvPr>
@@ -5189,7 +5189,7 @@
           <p:cNvPr id="2" name="">
             <a:extLst xmlns:a="http://schemas.openxmlformats.org/drawingml/2006/main">
               <a:ext uri="{FF2B5EF4-FFF2-40B4-BE49-F238E27FC236}">
-                <a16:creationId xmlns:a16="http://schemas.microsoft.com/office/drawing/2014/main" id="{F1832B4D-4FD6-4D76-A519-352D3E83B943}"/>
+                <a16:creationId xmlns:a16="http://schemas.microsoft.com/office/drawing/2014/main" id="{A88DCC55-F757-4BB5-87AA-4F8BDBAD0F55}"/>
               </a:ext>
             </a:extLst>
           </p:cNvPr>
@@ -5222,7 +5222,7 @@
           <p:cNvPr id="3" name="">
             <a:extLst xmlns:a="http://schemas.openxmlformats.org/drawingml/2006/main">
               <a:ext uri="{FF2B5EF4-FFF2-40B4-BE49-F238E27FC236}">
-                <a16:creationId xmlns:a16="http://schemas.microsoft.com/office/drawing/2014/main" id="{4C30B95D-FF3A-43A7-B486-60742CE8EF92}"/>
+                <a16:creationId xmlns:a16="http://schemas.microsoft.com/office/drawing/2014/main" id="{9AF2ABA1-6EE4-46DC-B6AB-0314BF3E4A7F}"/>
               </a:ext>
             </a:extLst>
           </p:cNvPr>
@@ -5280,7 +5280,7 @@
           <p:cNvPr id="4" name="">
             <a:extLst xmlns:a="http://schemas.openxmlformats.org/drawingml/2006/main">
               <a:ext uri="{FF2B5EF4-FFF2-40B4-BE49-F238E27FC236}">
-                <a16:creationId xmlns:a16="http://schemas.microsoft.com/office/drawing/2014/main" id="{8E89906D-60E1-4410-B535-97FED364945D}"/>
+                <a16:creationId xmlns:a16="http://schemas.microsoft.com/office/drawing/2014/main" id="{0BE235CE-E3F6-4317-B45C-CE9CA2DBCCEF}"/>
               </a:ext>
             </a:extLst>
           </p:cNvPr>
@@ -5338,7 +5338,7 @@
           <p:cNvPr id="5" name="">
             <a:extLst xmlns:a="http://schemas.openxmlformats.org/drawingml/2006/main">
               <a:ext uri="{FF2B5EF4-FFF2-40B4-BE49-F238E27FC236}">
-                <a16:creationId xmlns:a16="http://schemas.microsoft.com/office/drawing/2014/main" id="{6B595859-CE87-4E02-A1EC-6FEA48EEE0D2}"/>
+                <a16:creationId xmlns:a16="http://schemas.microsoft.com/office/drawing/2014/main" id="{33A50B8B-A7E7-4359-AB1C-B6EEF85DB1A2}"/>
               </a:ext>
             </a:extLst>
           </p:cNvPr>
@@ -5396,7 +5396,7 @@
           <p:cNvPr id="6" name="">
             <a:extLst xmlns:a="http://schemas.openxmlformats.org/drawingml/2006/main">
               <a:ext uri="{FF2B5EF4-FFF2-40B4-BE49-F238E27FC236}">
-                <a16:creationId xmlns:a16="http://schemas.microsoft.com/office/drawing/2014/main" id="{90960DDA-DFED-49C1-8600-F572573DA9C0}"/>
+                <a16:creationId xmlns:a16="http://schemas.microsoft.com/office/drawing/2014/main" id="{84AAC412-A10F-4401-AD80-D559D25CA38F}"/>
               </a:ext>
             </a:extLst>
           </p:cNvPr>
@@ -5454,7 +5454,7 @@
           <p:cNvPr id="7" name="">
             <a:extLst xmlns:a="http://schemas.openxmlformats.org/drawingml/2006/main">
               <a:ext uri="{FF2B5EF4-FFF2-40B4-BE49-F238E27FC236}">
-                <a16:creationId xmlns:a16="http://schemas.microsoft.com/office/drawing/2014/main" id="{C2556778-C7B1-40C2-B565-341D6C9D1B7B}"/>
+                <a16:creationId xmlns:a16="http://schemas.microsoft.com/office/drawing/2014/main" id="{3B367595-541E-4482-847E-431DE52BF983}"/>
               </a:ext>
             </a:extLst>
           </p:cNvPr>
@@ -5512,7 +5512,7 @@
           <p:cNvPr id="8" name="">
             <a:extLst xmlns:a="http://schemas.openxmlformats.org/drawingml/2006/main">
               <a:ext uri="{FF2B5EF4-FFF2-40B4-BE49-F238E27FC236}">
-                <a16:creationId xmlns:a16="http://schemas.microsoft.com/office/drawing/2014/main" id="{AC61447A-6972-4816-B0E4-2735C9E4D7AB}"/>
+                <a16:creationId xmlns:a16="http://schemas.microsoft.com/office/drawing/2014/main" id="{95678AA4-8E74-4529-B3FF-EF65BA424BFC}"/>
               </a:ext>
             </a:extLst>
           </p:cNvPr>
@@ -5570,7 +5570,7 @@
           <p:cNvPr id="9" name="">
             <a:extLst xmlns:a="http://schemas.openxmlformats.org/drawingml/2006/main">
               <a:ext uri="{FF2B5EF4-FFF2-40B4-BE49-F238E27FC236}">
-                <a16:creationId xmlns:a16="http://schemas.microsoft.com/office/drawing/2014/main" id="{3793C0D9-5688-4766-ABCE-767CAC297029}"/>
+                <a16:creationId xmlns:a16="http://schemas.microsoft.com/office/drawing/2014/main" id="{347A3C88-DA87-474B-902F-8A63ADB9F07C}"/>
               </a:ext>
             </a:extLst>
           </p:cNvPr>
@@ -5628,7 +5628,7 @@
           <p:cNvPr id="10" name="">
             <a:extLst xmlns:a="http://schemas.openxmlformats.org/drawingml/2006/main">
               <a:ext uri="{FF2B5EF4-FFF2-40B4-BE49-F238E27FC236}">
-                <a16:creationId xmlns:a16="http://schemas.microsoft.com/office/drawing/2014/main" id="{31569479-0DC6-4896-BD20-67A89D667E2C}"/>
+                <a16:creationId xmlns:a16="http://schemas.microsoft.com/office/drawing/2014/main" id="{6A716C4C-9F40-4D7E-BAD0-20F7E0355B71}"/>
               </a:ext>
             </a:extLst>
           </p:cNvPr>
@@ -5665,7 +5665,7 @@
           <p:nvPr/>
         </p:nvPicPr>
         <p:blipFill>
-          <a:blip xmlns:r="http://schemas.openxmlformats.org/officeDocument/2006/relationships" xmlns:a="http://schemas.openxmlformats.org/drawingml/2006/main" r:embed="R2a22a3093ea3427a"/>
+          <a:blip xmlns:r="http://schemas.openxmlformats.org/officeDocument/2006/relationships" xmlns:a="http://schemas.openxmlformats.org/drawingml/2006/main" r:embed="R0958f2c0e6cb4431"/>
           <a:stretch xmlns:a="http://schemas.openxmlformats.org/drawingml/2006/main"/>
         </p:blipFill>
         <p:spPr>
@@ -5683,7 +5683,7 @@
           <p:cNvPr id="12" name="">
             <a:extLst xmlns:a="http://schemas.openxmlformats.org/drawingml/2006/main">
               <a:ext uri="{FF2B5EF4-FFF2-40B4-BE49-F238E27FC236}">
-                <a16:creationId xmlns:a16="http://schemas.microsoft.com/office/drawing/2014/main" id="{AA276C85-32ED-4852-AADB-2CB8B7C283D4}"/>
+                <a16:creationId xmlns:a16="http://schemas.microsoft.com/office/drawing/2014/main" id="{B9419BC2-8055-430A-9CF0-EDB0F69C9D4B}"/>
               </a:ext>
             </a:extLst>
           </p:cNvPr>
@@ -5741,7 +5741,7 @@
           <p:cNvPr id="13" name="">
             <a:extLst xmlns:a="http://schemas.openxmlformats.org/drawingml/2006/main">
               <a:ext uri="{FF2B5EF4-FFF2-40B4-BE49-F238E27FC236}">
-                <a16:creationId xmlns:a16="http://schemas.microsoft.com/office/drawing/2014/main" id="{7DC10359-FFAF-4F33-920D-B04A62F55971}"/>
+                <a16:creationId xmlns:a16="http://schemas.microsoft.com/office/drawing/2014/main" id="{8EFC9BCA-67F1-404A-A0DD-371025830B2C}"/>
               </a:ext>
             </a:extLst>
           </p:cNvPr>
@@ -5799,7 +5799,7 @@
           <p:cNvPr id="14" name="">
             <a:extLst xmlns:a="http://schemas.openxmlformats.org/drawingml/2006/main">
               <a:ext uri="{FF2B5EF4-FFF2-40B4-BE49-F238E27FC236}">
-                <a16:creationId xmlns:a16="http://schemas.microsoft.com/office/drawing/2014/main" id="{14A1D0D8-D4E3-48E9-BC98-E1892E833E68}"/>
+                <a16:creationId xmlns:a16="http://schemas.microsoft.com/office/drawing/2014/main" id="{770FA1FD-6E3F-48E1-A2D5-E4518BAFF145}"/>
               </a:ext>
             </a:extLst>
           </p:cNvPr>
@@ -5926,7 +5926,7 @@
           <p:cNvPr id="15" name="">
             <a:extLst xmlns:a="http://schemas.openxmlformats.org/drawingml/2006/main">
               <a:ext uri="{FF2B5EF4-FFF2-40B4-BE49-F238E27FC236}">
-                <a16:creationId xmlns:a16="http://schemas.microsoft.com/office/drawing/2014/main" id="{0A1F1EDC-9D7F-4B49-81F7-49140D8038CD}"/>
+                <a16:creationId xmlns:a16="http://schemas.microsoft.com/office/drawing/2014/main" id="{85BB5944-D70F-44C0-B324-612AAFE941ED}"/>
               </a:ext>
             </a:extLst>
           </p:cNvPr>
@@ -5959,7 +5959,7 @@
           <p:cNvPr id="16" name="">
             <a:extLst xmlns:a="http://schemas.openxmlformats.org/drawingml/2006/main">
               <a:ext uri="{FF2B5EF4-FFF2-40B4-BE49-F238E27FC236}">
-                <a16:creationId xmlns:a16="http://schemas.microsoft.com/office/drawing/2014/main" id="{C23CF6FF-D34C-47AD-A834-F14FB7B5A7CB}"/>
+                <a16:creationId xmlns:a16="http://schemas.microsoft.com/office/drawing/2014/main" id="{08B0BC70-610C-49EB-B3B7-BB7A9EC1BFFB}"/>
               </a:ext>
             </a:extLst>
           </p:cNvPr>
@@ -6017,7 +6017,7 @@
           <p:cNvPr id="17" name="">
             <a:extLst xmlns:a="http://schemas.openxmlformats.org/drawingml/2006/main">
               <a:ext uri="{FF2B5EF4-FFF2-40B4-BE49-F238E27FC236}">
-                <a16:creationId xmlns:a16="http://schemas.microsoft.com/office/drawing/2014/main" id="{F8704713-14C3-4BB9-A85B-91C6B4F47554}"/>
+                <a16:creationId xmlns:a16="http://schemas.microsoft.com/office/drawing/2014/main" id="{138309D3-71E6-48F9-9807-200AF3E7892C}"/>
               </a:ext>
             </a:extLst>
           </p:cNvPr>
@@ -6075,7 +6075,7 @@
           <p:cNvPr id="18" name="">
             <a:extLst xmlns:a="http://schemas.openxmlformats.org/drawingml/2006/main">
               <a:ext uri="{FF2B5EF4-FFF2-40B4-BE49-F238E27FC236}">
-                <a16:creationId xmlns:a16="http://schemas.microsoft.com/office/drawing/2014/main" id="{5F9BAAD0-763C-4C76-B7CF-12ACDAA4CE3C}"/>
+                <a16:creationId xmlns:a16="http://schemas.microsoft.com/office/drawing/2014/main" id="{24CA22F8-8DFC-44FB-9180-37B77D3F49F0}"/>
               </a:ext>
             </a:extLst>
           </p:cNvPr>
@@ -6131,7 +6131,7 @@
     </p:spTree>
     <p:extLst>
       <p:ext uri="{BB962C8B-B14F-4D97-AF65-F5344CB8AC3E}">
-        <p14:creationId xmlns:p14="http://schemas.microsoft.com/office/powerpoint/2010/main" val="2066134449"/>
+        <p14:creationId xmlns:p14="http://schemas.microsoft.com/office/powerpoint/2010/main" val="1357592775"/>
       </p:ext>
     </p:extLst>
   </p:cSld>
@@ -6162,7 +6162,7 @@
           <p:cNvPr id="24" name="">
             <a:extLst xmlns:a="http://schemas.openxmlformats.org/drawingml/2006/main">
               <a:ext uri="{FF2B5EF4-FFF2-40B4-BE49-F238E27FC236}">
-                <a16:creationId xmlns:a16="http://schemas.microsoft.com/office/drawing/2014/main" id="{DA63D87F-6B8B-454C-A837-51AB2F9DDE9B}"/>
+                <a16:creationId xmlns:a16="http://schemas.microsoft.com/office/drawing/2014/main" id="{CE18EFF2-36B0-452B-ACFB-2FAE00313063}"/>
               </a:ext>
             </a:extLst>
           </p:cNvPr>
@@ -6220,7 +6220,7 @@
           <p:cNvPr id="2" name="">
             <a:extLst xmlns:a="http://schemas.openxmlformats.org/drawingml/2006/main">
               <a:ext uri="{FF2B5EF4-FFF2-40B4-BE49-F238E27FC236}">
-                <a16:creationId xmlns:a16="http://schemas.microsoft.com/office/drawing/2014/main" id="{45D92C3D-B14C-43E7-A9E9-FBA750296929}"/>
+                <a16:creationId xmlns:a16="http://schemas.microsoft.com/office/drawing/2014/main" id="{70A7E915-0052-45C5-A330-AC50397EFBC4}"/>
               </a:ext>
             </a:extLst>
           </p:cNvPr>
@@ -6253,7 +6253,7 @@
           <p:cNvPr id="3" name="">
             <a:extLst xmlns:a="http://schemas.openxmlformats.org/drawingml/2006/main">
               <a:ext uri="{FF2B5EF4-FFF2-40B4-BE49-F238E27FC236}">
-                <a16:creationId xmlns:a16="http://schemas.microsoft.com/office/drawing/2014/main" id="{76820ABC-A127-4A31-8985-E1E4FAE012FC}"/>
+                <a16:creationId xmlns:a16="http://schemas.microsoft.com/office/drawing/2014/main" id="{F5D980EA-3452-42D7-B017-670097EFBCA8}"/>
               </a:ext>
             </a:extLst>
           </p:cNvPr>
@@ -6311,7 +6311,7 @@
           <p:cNvPr id="4" name="">
             <a:extLst xmlns:a="http://schemas.openxmlformats.org/drawingml/2006/main">
               <a:ext uri="{FF2B5EF4-FFF2-40B4-BE49-F238E27FC236}">
-                <a16:creationId xmlns:a16="http://schemas.microsoft.com/office/drawing/2014/main" id="{2BA1E56E-2A7B-4B2D-A475-E4D96C1DA39D}"/>
+                <a16:creationId xmlns:a16="http://schemas.microsoft.com/office/drawing/2014/main" id="{06C8D15C-E8BB-4646-AE50-9C59E73F89DD}"/>
               </a:ext>
             </a:extLst>
           </p:cNvPr>
@@ -6369,7 +6369,7 @@
           <p:cNvPr id="5" name="">
             <a:extLst xmlns:a="http://schemas.openxmlformats.org/drawingml/2006/main">
               <a:ext uri="{FF2B5EF4-FFF2-40B4-BE49-F238E27FC236}">
-                <a16:creationId xmlns:a16="http://schemas.microsoft.com/office/drawing/2014/main" id="{55D7C82A-585D-400D-836B-F9868423FB98}"/>
+                <a16:creationId xmlns:a16="http://schemas.microsoft.com/office/drawing/2014/main" id="{3D9BC08D-D597-4824-868B-657A7E7529EE}"/>
               </a:ext>
             </a:extLst>
           </p:cNvPr>
@@ -6417,7 +6417,7 @@
                 <a:ea typeface="Microsoft YaHei"/>
                 <a:cs typeface="Microsoft YaHei"/>
               </a:rPr>
-              <a:t>131</a:t>
+              <a:t>134</a:t>
             </a:r>
           </a:p>
         </p:txBody>
@@ -6427,7 +6427,7 @@
           <p:cNvPr id="6" name="">
             <a:extLst xmlns:a="http://schemas.openxmlformats.org/drawingml/2006/main">
               <a:ext uri="{FF2B5EF4-FFF2-40B4-BE49-F238E27FC236}">
-                <a16:creationId xmlns:a16="http://schemas.microsoft.com/office/drawing/2014/main" id="{21E2590E-B184-4D33-BD9C-1D88C72E1112}"/>
+                <a16:creationId xmlns:a16="http://schemas.microsoft.com/office/drawing/2014/main" id="{024CB8A4-2F27-42CE-B58B-19E9995CFBE7}"/>
               </a:ext>
             </a:extLst>
           </p:cNvPr>
@@ -6485,7 +6485,7 @@
           <p:cNvPr id="7" name="">
             <a:extLst xmlns:a="http://schemas.openxmlformats.org/drawingml/2006/main">
               <a:ext uri="{FF2B5EF4-FFF2-40B4-BE49-F238E27FC236}">
-                <a16:creationId xmlns:a16="http://schemas.microsoft.com/office/drawing/2014/main" id="{DE48E3AF-C56B-474C-98CC-677EB04063C9}"/>
+                <a16:creationId xmlns:a16="http://schemas.microsoft.com/office/drawing/2014/main" id="{6A5F440E-C4AA-4678-8BEC-B023F1820F29}"/>
               </a:ext>
             </a:extLst>
           </p:cNvPr>
@@ -6543,7 +6543,7 @@
           <p:cNvPr id="8" name="">
             <a:extLst xmlns:a="http://schemas.openxmlformats.org/drawingml/2006/main">
               <a:ext uri="{FF2B5EF4-FFF2-40B4-BE49-F238E27FC236}">
-                <a16:creationId xmlns:a16="http://schemas.microsoft.com/office/drawing/2014/main" id="{2E838436-BEC1-46F4-B94E-3E718D873D0E}"/>
+                <a16:creationId xmlns:a16="http://schemas.microsoft.com/office/drawing/2014/main" id="{8AABBF13-CD9C-4253-81D7-94F74F5AAA0B}"/>
               </a:ext>
             </a:extLst>
           </p:cNvPr>
@@ -6601,7 +6601,7 @@
           <p:cNvPr id="9" name="">
             <a:extLst xmlns:a="http://schemas.openxmlformats.org/drawingml/2006/main">
               <a:ext uri="{FF2B5EF4-FFF2-40B4-BE49-F238E27FC236}">
-                <a16:creationId xmlns:a16="http://schemas.microsoft.com/office/drawing/2014/main" id="{C5D54822-1D01-4FB1-8A41-BE2F9AA72329}"/>
+                <a16:creationId xmlns:a16="http://schemas.microsoft.com/office/drawing/2014/main" id="{D70DEF51-3C3C-4194-A18A-D39D43728568}"/>
               </a:ext>
             </a:extLst>
           </p:cNvPr>
@@ -6659,7 +6659,7 @@
           <p:cNvPr id="10" name="">
             <a:extLst xmlns:a="http://schemas.openxmlformats.org/drawingml/2006/main">
               <a:ext uri="{FF2B5EF4-FFF2-40B4-BE49-F238E27FC236}">
-                <a16:creationId xmlns:a16="http://schemas.microsoft.com/office/drawing/2014/main" id="{461E8B1F-3074-48CE-AFE4-9039F6053BA2}"/>
+                <a16:creationId xmlns:a16="http://schemas.microsoft.com/office/drawing/2014/main" id="{595284BC-97C8-428F-8AB8-CAAD10FF0D7C}"/>
               </a:ext>
             </a:extLst>
           </p:cNvPr>
@@ -6717,7 +6717,7 @@
           <p:cNvPr id="11" name="">
             <a:extLst xmlns:a="http://schemas.openxmlformats.org/drawingml/2006/main">
               <a:ext uri="{FF2B5EF4-FFF2-40B4-BE49-F238E27FC236}">
-                <a16:creationId xmlns:a16="http://schemas.microsoft.com/office/drawing/2014/main" id="{D93DA992-EE5C-494C-933E-7E7D7ABB72D5}"/>
+                <a16:creationId xmlns:a16="http://schemas.microsoft.com/office/drawing/2014/main" id="{D53BADB9-1B80-4AAF-BF1C-77A7389BD293}"/>
               </a:ext>
             </a:extLst>
           </p:cNvPr>
@@ -6744,7 +6744,7 @@
           <p:cNvPr id="12" name="">
             <a:extLst xmlns:a="http://schemas.openxmlformats.org/drawingml/2006/main">
               <a:ext uri="{FF2B5EF4-FFF2-40B4-BE49-F238E27FC236}">
-                <a16:creationId xmlns:a16="http://schemas.microsoft.com/office/drawing/2014/main" id="{83FE365A-1F4A-43EB-8E0C-0B8C37E3C77C}"/>
+                <a16:creationId xmlns:a16="http://schemas.microsoft.com/office/drawing/2014/main" id="{FCA1D144-2133-44EF-8611-EE47E707B89D}"/>
               </a:ext>
             </a:extLst>
           </p:cNvPr>
@@ -6802,7 +6802,7 @@
           <p:cNvPr id="13" name="">
             <a:extLst xmlns:a="http://schemas.openxmlformats.org/drawingml/2006/main">
               <a:ext uri="{FF2B5EF4-FFF2-40B4-BE49-F238E27FC236}">
-                <a16:creationId xmlns:a16="http://schemas.microsoft.com/office/drawing/2014/main" id="{6E765DE9-597C-401D-AFE3-4BF073397160}"/>
+                <a16:creationId xmlns:a16="http://schemas.microsoft.com/office/drawing/2014/main" id="{4B500776-8F71-473D-BE72-C62DC1E4919F}"/>
               </a:ext>
             </a:extLst>
           </p:cNvPr>
@@ -6952,7 +6952,7 @@
           <p:cNvPr id="14" name="">
             <a:extLst xmlns:a="http://schemas.openxmlformats.org/drawingml/2006/main">
               <a:ext uri="{FF2B5EF4-FFF2-40B4-BE49-F238E27FC236}">
-                <a16:creationId xmlns:a16="http://schemas.microsoft.com/office/drawing/2014/main" id="{98FE16E8-6B5A-4B5E-AD88-DC7CA658B137}"/>
+                <a16:creationId xmlns:a16="http://schemas.microsoft.com/office/drawing/2014/main" id="{CCCD96D6-C278-47F3-AB16-D5132FE1041A}"/>
               </a:ext>
             </a:extLst>
           </p:cNvPr>
@@ -6985,7 +6985,7 @@
           <p:cNvPr id="15" name="">
             <a:extLst xmlns:a="http://schemas.openxmlformats.org/drawingml/2006/main">
               <a:ext uri="{FF2B5EF4-FFF2-40B4-BE49-F238E27FC236}">
-                <a16:creationId xmlns:a16="http://schemas.microsoft.com/office/drawing/2014/main" id="{44943150-75CF-4B86-B03A-768E3820748E}"/>
+                <a16:creationId xmlns:a16="http://schemas.microsoft.com/office/drawing/2014/main" id="{3F84E7D5-8492-467F-9AAA-2C3208ADB592}"/>
               </a:ext>
             </a:extLst>
           </p:cNvPr>
@@ -7066,7 +7066,7 @@
           <p:cNvPr id="16" name="">
             <a:extLst xmlns:a="http://schemas.openxmlformats.org/drawingml/2006/main">
               <a:ext uri="{FF2B5EF4-FFF2-40B4-BE49-F238E27FC236}">
-                <a16:creationId xmlns:a16="http://schemas.microsoft.com/office/drawing/2014/main" id="{49D8A637-A740-41AC-B092-553D1BEE74F9}"/>
+                <a16:creationId xmlns:a16="http://schemas.microsoft.com/office/drawing/2014/main" id="{6DA4F18B-3375-4038-9B6E-61A62DFC61D7}"/>
               </a:ext>
             </a:extLst>
           </p:cNvPr>
@@ -7093,7 +7093,7 @@
           <p:cNvPr id="17" name="">
             <a:extLst xmlns:a="http://schemas.openxmlformats.org/drawingml/2006/main">
               <a:ext uri="{FF2B5EF4-FFF2-40B4-BE49-F238E27FC236}">
-                <a16:creationId xmlns:a16="http://schemas.microsoft.com/office/drawing/2014/main" id="{791A5912-B7FF-4E10-B3E9-F0341FEDA9B5}"/>
+                <a16:creationId xmlns:a16="http://schemas.microsoft.com/office/drawing/2014/main" id="{3A16AD24-4D57-4800-876D-1A843CD58F21}"/>
               </a:ext>
             </a:extLst>
           </p:cNvPr>
@@ -7151,7 +7151,7 @@
           <p:cNvPr id="18" name="">
             <a:extLst xmlns:a="http://schemas.openxmlformats.org/drawingml/2006/main">
               <a:ext uri="{FF2B5EF4-FFF2-40B4-BE49-F238E27FC236}">
-                <a16:creationId xmlns:a16="http://schemas.microsoft.com/office/drawing/2014/main" id="{DA99ADBA-2BD0-4D4C-B8EF-D58F2FD7AE67}"/>
+                <a16:creationId xmlns:a16="http://schemas.microsoft.com/office/drawing/2014/main" id="{F1475058-777E-4DDE-B7B6-0E5A20F29DDF}"/>
               </a:ext>
             </a:extLst>
           </p:cNvPr>
@@ -7209,7 +7209,7 @@
           <p:cNvPr id="19" name="">
             <a:extLst xmlns:a="http://schemas.openxmlformats.org/drawingml/2006/main">
               <a:ext uri="{FF2B5EF4-FFF2-40B4-BE49-F238E27FC236}">
-                <a16:creationId xmlns:a16="http://schemas.microsoft.com/office/drawing/2014/main" id="{1D740B14-02C6-4180-AE78-913C298B329D}"/>
+                <a16:creationId xmlns:a16="http://schemas.microsoft.com/office/drawing/2014/main" id="{7E43DF9C-AB51-4726-BD2D-080CA0DD67C5}"/>
               </a:ext>
             </a:extLst>
           </p:cNvPr>
@@ -7267,7 +7267,7 @@
           <p:cNvPr id="20" name="">
             <a:extLst xmlns:a="http://schemas.openxmlformats.org/drawingml/2006/main">
               <a:ext uri="{FF2B5EF4-FFF2-40B4-BE49-F238E27FC236}">
-                <a16:creationId xmlns:a16="http://schemas.microsoft.com/office/drawing/2014/main" id="{FC68F4D0-8DC2-46C4-89EA-C5E68F15EB7F}"/>
+                <a16:creationId xmlns:a16="http://schemas.microsoft.com/office/drawing/2014/main" id="{851B334E-8598-495A-932E-E5619856665E}"/>
               </a:ext>
             </a:extLst>
           </p:cNvPr>
@@ -7315,7 +7315,7 @@
                 <a:ea typeface="Consolas"/>
                 <a:cs typeface="Consolas"/>
               </a:rPr>
-              <a:t>Run 33309988987</a:t>
+              <a:t>Run 33311037079</a:t>
             </a:r>
           </a:p>
         </p:txBody>
@@ -7325,7 +7325,7 @@
           <p:cNvPr id="21" name="">
             <a:extLst xmlns:a="http://schemas.openxmlformats.org/drawingml/2006/main">
               <a:ext uri="{FF2B5EF4-FFF2-40B4-BE49-F238E27FC236}">
-                <a16:creationId xmlns:a16="http://schemas.microsoft.com/office/drawing/2014/main" id="{4885EE14-9810-4DA0-9938-9F78B932DD77}"/>
+                <a16:creationId xmlns:a16="http://schemas.microsoft.com/office/drawing/2014/main" id="{B884E119-97C1-4A67-9770-D86C44279A2C}"/>
               </a:ext>
             </a:extLst>
           </p:cNvPr>
@@ -7406,7 +7406,7 @@
           <p:cNvPr id="22" name="">
             <a:extLst xmlns:a="http://schemas.openxmlformats.org/drawingml/2006/main">
               <a:ext uri="{FF2B5EF4-FFF2-40B4-BE49-F238E27FC236}">
-                <a16:creationId xmlns:a16="http://schemas.microsoft.com/office/drawing/2014/main" id="{3707C981-8018-41FD-97FE-900EF917AE36}"/>
+                <a16:creationId xmlns:a16="http://schemas.microsoft.com/office/drawing/2014/main" id="{1FB54F01-7274-4386-A2C1-D5FECDA4FFEA}"/>
               </a:ext>
             </a:extLst>
           </p:cNvPr>
@@ -7487,7 +7487,7 @@
           <p:cNvPr id="23" name="">
             <a:extLst xmlns:a="http://schemas.openxmlformats.org/drawingml/2006/main">
               <a:ext uri="{FF2B5EF4-FFF2-40B4-BE49-F238E27FC236}">
-                <a16:creationId xmlns:a16="http://schemas.microsoft.com/office/drawing/2014/main" id="{C40D1CB6-DB30-4B44-A445-8417DF4C38D3}"/>
+                <a16:creationId xmlns:a16="http://schemas.microsoft.com/office/drawing/2014/main" id="{E409A9B4-BE73-4388-B4F9-ACEB25DE36A2}"/>
               </a:ext>
             </a:extLst>
           </p:cNvPr>
@@ -7543,7 +7543,7 @@
     </p:spTree>
     <p:extLst>
       <p:ext uri="{BB962C8B-B14F-4D97-AF65-F5344CB8AC3E}">
-        <p14:creationId xmlns:p14="http://schemas.microsoft.com/office/powerpoint/2010/main" val="49088207"/>
+        <p14:creationId xmlns:p14="http://schemas.microsoft.com/office/powerpoint/2010/main" val="1369003249"/>
       </p:ext>
     </p:extLst>
   </p:cSld>

--- a/docs/Software-Agent-Interview-Deck.pptx
+++ b/docs/Software-Agent-Interview-Deck.pptx
@@ -2,17 +2,17 @@
 <file path=ppt/presentation.xml><?xml version="1.0" encoding="utf-8"?>
 <p:presentation xmlns:p="http://schemas.openxmlformats.org/presentationml/2006/main">
   <p:sldMasterIdLst>
-    <p:sldMasterId xmlns:r="http://schemas.openxmlformats.org/officeDocument/2006/relationships" id="2147483648" r:id="R742753db2a2a46c6"/>
+    <p:sldMasterId xmlns:r="http://schemas.openxmlformats.org/officeDocument/2006/relationships" id="2147483648" r:id="R3430c4c1217b4713"/>
   </p:sldMasterIdLst>
   <p:notesMasterIdLst>
-    <p:notesMasterId xmlns:r="http://schemas.openxmlformats.org/officeDocument/2006/relationships" r:id="R85d8d02a150c4324"/>
+    <p:notesMasterId xmlns:r="http://schemas.openxmlformats.org/officeDocument/2006/relationships" r:id="R353c2d8643384d0d"/>
   </p:notesMasterIdLst>
   <p:sldIdLst>
-    <p:sldId xmlns:r="http://schemas.openxmlformats.org/officeDocument/2006/relationships" id="256" r:id="Rf2011f01855440c5"/>
-    <p:sldId xmlns:r="http://schemas.openxmlformats.org/officeDocument/2006/relationships" id="257" r:id="R92e4ecb1d2da4eb7"/>
-    <p:sldId xmlns:r="http://schemas.openxmlformats.org/officeDocument/2006/relationships" id="258" r:id="R21ab8b79ae1840c7"/>
-    <p:sldId xmlns:r="http://schemas.openxmlformats.org/officeDocument/2006/relationships" id="259" r:id="R557b049d1b60400b"/>
-    <p:sldId xmlns:r="http://schemas.openxmlformats.org/officeDocument/2006/relationships" id="260" r:id="Ra5db6e99d04a4284"/>
+    <p:sldId xmlns:r="http://schemas.openxmlformats.org/officeDocument/2006/relationships" id="256" r:id="R3f92d30697c84a01"/>
+    <p:sldId xmlns:r="http://schemas.openxmlformats.org/officeDocument/2006/relationships" id="257" r:id="R402fddb2281c4d61"/>
+    <p:sldId xmlns:r="http://schemas.openxmlformats.org/officeDocument/2006/relationships" id="258" r:id="Rae141cd615c6443e"/>
+    <p:sldId xmlns:r="http://schemas.openxmlformats.org/officeDocument/2006/relationships" id="259" r:id="R6bb192fee711433c"/>
+    <p:sldId xmlns:r="http://schemas.openxmlformats.org/officeDocument/2006/relationships" id="260" r:id="R3ee2142ac4d14110"/>
   </p:sldIdLst>
   <p:sldSz cx="12192000" cy="6858000"/>
   <p:notesSz cx="6858000" cy="9144000"/>
@@ -471,7 +471,7 @@
           </a:p>
           <a:p xmlns:a="http://schemas.openxmlformats.org/drawingml/2006/main">
             <a:r>
-              <a:t>- Current CI evidence: https://github.com/Isoldelu/software-engineering-agent/actions/runs/33311037079</a:t>
+              <a:t>- Current CI evidence: https://github.com/Isoldelu/software-engineering-agent/actions/runs/33314875879</a:t>
             </a:r>
           </a:p>
         </p:txBody>
@@ -846,7 +846,7 @@
           </a:p>
           <a:p xmlns:a="http://schemas.openxmlformats.org/drawingml/2006/main">
             <a:r>
-              <a:t>- GitHub Actions Run: https://github.com/Isoldelu/software-engineering-agent/actions/runs/33311037079</a:t>
+              <a:t>- GitHub Actions Run: https://github.com/Isoldelu/software-engineering-agent/actions/runs/33314875879</a:t>
             </a:r>
           </a:p>
           <a:p xmlns:a="http://schemas.openxmlformats.org/drawingml/2006/main">
@@ -929,7 +929,7 @@
   </p:cSld>
   <p:clrMap bg1="lt1" tx1="dk1" bg2="lt2" tx2="dk2" accent1="accent1" accent2="accent2" accent3="accent3" accent4="accent4" accent5="accent5" accent6="accent6" hlink="hlink" folHlink="folHlink"/>
   <p:sldLayoutIdLst>
-    <p:sldLayoutId xmlns:r="http://schemas.openxmlformats.org/officeDocument/2006/relationships" id="2147483649" r:id="R7bf8e9fce0f94399"/>
+    <p:sldLayoutId xmlns:r="http://schemas.openxmlformats.org/officeDocument/2006/relationships" id="2147483649" r:id="R71e29550d58f410b"/>
   </p:sldLayoutIdLst>
   <p:txStyles>
     <p:titleStyle>
@@ -1480,7 +1480,7 @@
           <p:cNvPr id="17" name="">
             <a:extLst xmlns:a="http://schemas.openxmlformats.org/drawingml/2006/main">
               <a:ext uri="{FF2B5EF4-FFF2-40B4-BE49-F238E27FC236}">
-                <a16:creationId xmlns:a16="http://schemas.microsoft.com/office/drawing/2014/main" id="{DA7D8289-20A0-41F5-A9EC-75836B860241}"/>
+                <a16:creationId xmlns:a16="http://schemas.microsoft.com/office/drawing/2014/main" id="{C9C5A807-45E2-4128-87C7-970F790C071B}"/>
               </a:ext>
             </a:extLst>
           </p:cNvPr>
@@ -1513,7 +1513,7 @@
           <p:cNvPr id="2" name="">
             <a:extLst xmlns:a="http://schemas.openxmlformats.org/drawingml/2006/main">
               <a:ext uri="{FF2B5EF4-FFF2-40B4-BE49-F238E27FC236}">
-                <a16:creationId xmlns:a16="http://schemas.microsoft.com/office/drawing/2014/main" id="{0C1319BC-45CA-42A8-91DA-2C67A818D6C9}"/>
+                <a16:creationId xmlns:a16="http://schemas.microsoft.com/office/drawing/2014/main" id="{D81DADDD-DA53-41EA-968A-5FCF3A7DCCB5}"/>
               </a:ext>
             </a:extLst>
           </p:cNvPr>
@@ -1571,7 +1571,7 @@
           <p:cNvPr id="3" name="">
             <a:extLst xmlns:a="http://schemas.openxmlformats.org/drawingml/2006/main">
               <a:ext uri="{FF2B5EF4-FFF2-40B4-BE49-F238E27FC236}">
-                <a16:creationId xmlns:a16="http://schemas.microsoft.com/office/drawing/2014/main" id="{DE19C4FA-2E8B-4553-9D47-D047D2E3137A}"/>
+                <a16:creationId xmlns:a16="http://schemas.microsoft.com/office/drawing/2014/main" id="{ADFF012D-8136-459D-A7A2-A3ABBC07FB03}"/>
               </a:ext>
             </a:extLst>
           </p:cNvPr>
@@ -1652,7 +1652,7 @@
           <p:cNvPr id="4" name="">
             <a:extLst xmlns:a="http://schemas.openxmlformats.org/drawingml/2006/main">
               <a:ext uri="{FF2B5EF4-FFF2-40B4-BE49-F238E27FC236}">
-                <a16:creationId xmlns:a16="http://schemas.microsoft.com/office/drawing/2014/main" id="{DB674EDD-C01B-4DF5-9434-46A9A5A2F4DF}"/>
+                <a16:creationId xmlns:a16="http://schemas.microsoft.com/office/drawing/2014/main" id="{698A9896-3D1E-4484-B823-62CAE05444BE}"/>
               </a:ext>
             </a:extLst>
           </p:cNvPr>
@@ -1710,7 +1710,7 @@
           <p:cNvPr id="5" name="">
             <a:extLst xmlns:a="http://schemas.openxmlformats.org/drawingml/2006/main">
               <a:ext uri="{FF2B5EF4-FFF2-40B4-BE49-F238E27FC236}">
-                <a16:creationId xmlns:a16="http://schemas.microsoft.com/office/drawing/2014/main" id="{7005F3C0-6BEB-4BB4-8041-7BB03A545231}"/>
+                <a16:creationId xmlns:a16="http://schemas.microsoft.com/office/drawing/2014/main" id="{DBEEF0B8-86CE-496B-A392-968F2AE37272}"/>
               </a:ext>
             </a:extLst>
           </p:cNvPr>
@@ -1743,7 +1743,7 @@
           <p:cNvPr id="6" name="">
             <a:extLst xmlns:a="http://schemas.openxmlformats.org/drawingml/2006/main">
               <a:ext uri="{FF2B5EF4-FFF2-40B4-BE49-F238E27FC236}">
-                <a16:creationId xmlns:a16="http://schemas.microsoft.com/office/drawing/2014/main" id="{7F567EE5-A39C-418A-980A-41E01355AA9B}"/>
+                <a16:creationId xmlns:a16="http://schemas.microsoft.com/office/drawing/2014/main" id="{D8F6552B-C6F7-4154-BAB6-80489846275F}"/>
               </a:ext>
             </a:extLst>
           </p:cNvPr>
@@ -1801,7 +1801,7 @@
           <p:cNvPr id="7" name="">
             <a:extLst xmlns:a="http://schemas.openxmlformats.org/drawingml/2006/main">
               <a:ext uri="{FF2B5EF4-FFF2-40B4-BE49-F238E27FC236}">
-                <a16:creationId xmlns:a16="http://schemas.microsoft.com/office/drawing/2014/main" id="{1BA95B3D-84BC-45E6-908D-CE239549F517}"/>
+                <a16:creationId xmlns:a16="http://schemas.microsoft.com/office/drawing/2014/main" id="{ED1D7796-BC60-4FAB-BEDF-7FBCEA34B38E}"/>
               </a:ext>
             </a:extLst>
           </p:cNvPr>
@@ -1951,7 +1951,7 @@
           <p:cNvPr id="8" name="">
             <a:extLst xmlns:a="http://schemas.openxmlformats.org/drawingml/2006/main">
               <a:ext uri="{FF2B5EF4-FFF2-40B4-BE49-F238E27FC236}">
-                <a16:creationId xmlns:a16="http://schemas.microsoft.com/office/drawing/2014/main" id="{7413E023-CBAA-489C-9B38-2E4DB9168181}"/>
+                <a16:creationId xmlns:a16="http://schemas.microsoft.com/office/drawing/2014/main" id="{C238FA0F-A3F4-4136-8C13-A28AAA2E54BF}"/>
               </a:ext>
             </a:extLst>
           </p:cNvPr>
@@ -1984,7 +1984,7 @@
           <p:cNvPr id="9" name="">
             <a:extLst xmlns:a="http://schemas.openxmlformats.org/drawingml/2006/main">
               <a:ext uri="{FF2B5EF4-FFF2-40B4-BE49-F238E27FC236}">
-                <a16:creationId xmlns:a16="http://schemas.microsoft.com/office/drawing/2014/main" id="{D878BAA1-6EC0-4DF4-8BD9-6B598937D4BA}"/>
+                <a16:creationId xmlns:a16="http://schemas.microsoft.com/office/drawing/2014/main" id="{28BE40BC-9238-4113-A39F-3F4A1D34B218}"/>
               </a:ext>
             </a:extLst>
           </p:cNvPr>
@@ -2032,7 +2032,7 @@
                 <a:ea typeface="Microsoft YaHei"/>
                 <a:cs typeface="Microsoft YaHei"/>
               </a:rPr>
-              <a:t>134</a:t>
+              <a:t>138</a:t>
             </a:r>
           </a:p>
         </p:txBody>
@@ -2042,7 +2042,7 @@
           <p:cNvPr id="10" name="">
             <a:extLst xmlns:a="http://schemas.openxmlformats.org/drawingml/2006/main">
               <a:ext uri="{FF2B5EF4-FFF2-40B4-BE49-F238E27FC236}">
-                <a16:creationId xmlns:a16="http://schemas.microsoft.com/office/drawing/2014/main" id="{1203CE5A-6088-4940-B6F7-53385DE19B99}"/>
+                <a16:creationId xmlns:a16="http://schemas.microsoft.com/office/drawing/2014/main" id="{24CD8346-42C1-47C9-A48E-A864D7A007A0}"/>
               </a:ext>
             </a:extLst>
           </p:cNvPr>
@@ -2100,7 +2100,7 @@
           <p:cNvPr id="11" name="">
             <a:extLst xmlns:a="http://schemas.openxmlformats.org/drawingml/2006/main">
               <a:ext uri="{FF2B5EF4-FFF2-40B4-BE49-F238E27FC236}">
-                <a16:creationId xmlns:a16="http://schemas.microsoft.com/office/drawing/2014/main" id="{238080D8-6639-4EB3-85C2-27EC5746D1C9}"/>
+                <a16:creationId xmlns:a16="http://schemas.microsoft.com/office/drawing/2014/main" id="{13F8D317-82C6-4DA9-BB46-A0A8C05450D1}"/>
               </a:ext>
             </a:extLst>
           </p:cNvPr>
@@ -2158,7 +2158,7 @@
           <p:cNvPr id="12" name="">
             <a:extLst xmlns:a="http://schemas.openxmlformats.org/drawingml/2006/main">
               <a:ext uri="{FF2B5EF4-FFF2-40B4-BE49-F238E27FC236}">
-                <a16:creationId xmlns:a16="http://schemas.microsoft.com/office/drawing/2014/main" id="{1E63ED9D-0DCF-4AE0-A177-73BCC83684D0}"/>
+                <a16:creationId xmlns:a16="http://schemas.microsoft.com/office/drawing/2014/main" id="{3C229F30-2A7D-4262-814F-BABB5238FBCD}"/>
               </a:ext>
             </a:extLst>
           </p:cNvPr>
@@ -2216,7 +2216,7 @@
           <p:cNvPr id="13" name="">
             <a:extLst xmlns:a="http://schemas.openxmlformats.org/drawingml/2006/main">
               <a:ext uri="{FF2B5EF4-FFF2-40B4-BE49-F238E27FC236}">
-                <a16:creationId xmlns:a16="http://schemas.microsoft.com/office/drawing/2014/main" id="{DB7BBAF4-97D6-4571-9E97-A35164EA9568}"/>
+                <a16:creationId xmlns:a16="http://schemas.microsoft.com/office/drawing/2014/main" id="{EF25EB89-E5B9-4E16-8D78-889CE0AE641D}"/>
               </a:ext>
             </a:extLst>
           </p:cNvPr>
@@ -2274,7 +2274,7 @@
           <p:cNvPr id="14" name="">
             <a:extLst xmlns:a="http://schemas.openxmlformats.org/drawingml/2006/main">
               <a:ext uri="{FF2B5EF4-FFF2-40B4-BE49-F238E27FC236}">
-                <a16:creationId xmlns:a16="http://schemas.microsoft.com/office/drawing/2014/main" id="{478B1915-7858-40CB-A90D-CFF3A876F13C}"/>
+                <a16:creationId xmlns:a16="http://schemas.microsoft.com/office/drawing/2014/main" id="{5E35DC94-6891-4BC0-AD3D-C415FC487D43}"/>
               </a:ext>
             </a:extLst>
           </p:cNvPr>
@@ -2332,7 +2332,7 @@
           <p:cNvPr id="15" name="">
             <a:extLst xmlns:a="http://schemas.openxmlformats.org/drawingml/2006/main">
               <a:ext uri="{FF2B5EF4-FFF2-40B4-BE49-F238E27FC236}">
-                <a16:creationId xmlns:a16="http://schemas.microsoft.com/office/drawing/2014/main" id="{DDC9633B-71CE-4B6F-86CA-AA2F449FFF3F}"/>
+                <a16:creationId xmlns:a16="http://schemas.microsoft.com/office/drawing/2014/main" id="{51B73CE4-408B-4570-90CB-BB66D2BA8431}"/>
               </a:ext>
             </a:extLst>
           </p:cNvPr>
@@ -2390,7 +2390,7 @@
           <p:cNvPr id="16" name="">
             <a:extLst xmlns:a="http://schemas.openxmlformats.org/drawingml/2006/main">
               <a:ext uri="{FF2B5EF4-FFF2-40B4-BE49-F238E27FC236}">
-                <a16:creationId xmlns:a16="http://schemas.microsoft.com/office/drawing/2014/main" id="{6BFD04FA-1E65-402A-B7B2-CB242B937BFA}"/>
+                <a16:creationId xmlns:a16="http://schemas.microsoft.com/office/drawing/2014/main" id="{4313E844-F464-4016-9B85-D3F4042F7D1D}"/>
               </a:ext>
             </a:extLst>
           </p:cNvPr>
@@ -2446,7 +2446,7 @@
     </p:spTree>
     <p:extLst>
       <p:ext uri="{BB962C8B-B14F-4D97-AF65-F5344CB8AC3E}">
-        <p14:creationId xmlns:p14="http://schemas.microsoft.com/office/powerpoint/2010/main" val="101381335"/>
+        <p14:creationId xmlns:p14="http://schemas.microsoft.com/office/powerpoint/2010/main" val="1140183188"/>
       </p:ext>
     </p:extLst>
   </p:cSld>
@@ -2477,7 +2477,7 @@
           <p:cNvPr id="35" name="">
             <a:extLst xmlns:a="http://schemas.openxmlformats.org/drawingml/2006/main">
               <a:ext uri="{FF2B5EF4-FFF2-40B4-BE49-F238E27FC236}">
-                <a16:creationId xmlns:a16="http://schemas.microsoft.com/office/drawing/2014/main" id="{8655F2C6-53C1-4F54-9388-182F442AF24B}"/>
+                <a16:creationId xmlns:a16="http://schemas.microsoft.com/office/drawing/2014/main" id="{FE31A972-7EBB-48BA-B889-0901A9D1F518}"/>
               </a:ext>
             </a:extLst>
           </p:cNvPr>
@@ -2535,7 +2535,7 @@
           <p:cNvPr id="2" name="">
             <a:extLst xmlns:a="http://schemas.openxmlformats.org/drawingml/2006/main">
               <a:ext uri="{FF2B5EF4-FFF2-40B4-BE49-F238E27FC236}">
-                <a16:creationId xmlns:a16="http://schemas.microsoft.com/office/drawing/2014/main" id="{2EA1CD29-D056-4D84-819E-4B829D99240A}"/>
+                <a16:creationId xmlns:a16="http://schemas.microsoft.com/office/drawing/2014/main" id="{533F8FD6-D82E-4A24-AF97-A261B81ACB06}"/>
               </a:ext>
             </a:extLst>
           </p:cNvPr>
@@ -2568,7 +2568,7 @@
           <p:cNvPr id="3" name="">
             <a:extLst xmlns:a="http://schemas.openxmlformats.org/drawingml/2006/main">
               <a:ext uri="{FF2B5EF4-FFF2-40B4-BE49-F238E27FC236}">
-                <a16:creationId xmlns:a16="http://schemas.microsoft.com/office/drawing/2014/main" id="{CC6CC13C-8E15-41BB-A802-6EDED9039E09}"/>
+                <a16:creationId xmlns:a16="http://schemas.microsoft.com/office/drawing/2014/main" id="{FDD48B7C-46B4-4289-8521-899F5271E6D5}"/>
               </a:ext>
             </a:extLst>
           </p:cNvPr>
@@ -2626,7 +2626,7 @@
           <p:cNvPr id="4" name="">
             <a:extLst xmlns:a="http://schemas.openxmlformats.org/drawingml/2006/main">
               <a:ext uri="{FF2B5EF4-FFF2-40B4-BE49-F238E27FC236}">
-                <a16:creationId xmlns:a16="http://schemas.microsoft.com/office/drawing/2014/main" id="{94F7F5A6-1E8C-4593-954D-9E14616C1C38}"/>
+                <a16:creationId xmlns:a16="http://schemas.microsoft.com/office/drawing/2014/main" id="{4273B345-ED92-404D-B5CC-8F3785FFA8F2}"/>
               </a:ext>
             </a:extLst>
           </p:cNvPr>
@@ -2684,7 +2684,7 @@
           <p:cNvPr id="5" name="">
             <a:extLst xmlns:a="http://schemas.openxmlformats.org/drawingml/2006/main">
               <a:ext uri="{FF2B5EF4-FFF2-40B4-BE49-F238E27FC236}">
-                <a16:creationId xmlns:a16="http://schemas.microsoft.com/office/drawing/2014/main" id="{CFE9FE5F-28B8-41E0-AC17-2D0EB8166654}"/>
+                <a16:creationId xmlns:a16="http://schemas.microsoft.com/office/drawing/2014/main" id="{8AB0EDE2-EC95-4D47-8894-071BA28A11A5}"/>
               </a:ext>
             </a:extLst>
           </p:cNvPr>
@@ -2742,7 +2742,7 @@
           <p:cNvPr id="6" name="">
             <a:extLst xmlns:a="http://schemas.openxmlformats.org/drawingml/2006/main">
               <a:ext uri="{FF2B5EF4-FFF2-40B4-BE49-F238E27FC236}">
-                <a16:creationId xmlns:a16="http://schemas.microsoft.com/office/drawing/2014/main" id="{DEAA70EE-6128-4BE9-9C24-925D14BCCCBD}"/>
+                <a16:creationId xmlns:a16="http://schemas.microsoft.com/office/drawing/2014/main" id="{1D7B4033-34F1-42B7-B994-CEA75807896F}"/>
               </a:ext>
             </a:extLst>
           </p:cNvPr>
@@ -2800,7 +2800,7 @@
           <p:cNvPr id="7" name="">
             <a:extLst xmlns:a="http://schemas.openxmlformats.org/drawingml/2006/main">
               <a:ext uri="{FF2B5EF4-FFF2-40B4-BE49-F238E27FC236}">
-                <a16:creationId xmlns:a16="http://schemas.microsoft.com/office/drawing/2014/main" id="{52669DDD-6392-453D-9C93-8A85D6B7353D}"/>
+                <a16:creationId xmlns:a16="http://schemas.microsoft.com/office/drawing/2014/main" id="{604A0073-96EF-45B7-9837-9098328BEA47}"/>
               </a:ext>
             </a:extLst>
           </p:cNvPr>
@@ -2858,7 +2858,7 @@
           <p:cNvPr id="8" name="">
             <a:extLst xmlns:a="http://schemas.openxmlformats.org/drawingml/2006/main">
               <a:ext uri="{FF2B5EF4-FFF2-40B4-BE49-F238E27FC236}">
-                <a16:creationId xmlns:a16="http://schemas.microsoft.com/office/drawing/2014/main" id="{B258CBBF-6C6D-40F5-AFF7-CE3B4A5931CA}"/>
+                <a16:creationId xmlns:a16="http://schemas.microsoft.com/office/drawing/2014/main" id="{30D9DD18-5DC8-48D5-BA87-D8CBBC9BE4DE}"/>
               </a:ext>
             </a:extLst>
           </p:cNvPr>
@@ -2891,7 +2891,7 @@
           <p:cNvPr id="9" name="">
             <a:extLst xmlns:a="http://schemas.openxmlformats.org/drawingml/2006/main">
               <a:ext uri="{FF2B5EF4-FFF2-40B4-BE49-F238E27FC236}">
-                <a16:creationId xmlns:a16="http://schemas.microsoft.com/office/drawing/2014/main" id="{0ED559E1-69F8-44D2-B0F7-C246F7787422}"/>
+                <a16:creationId xmlns:a16="http://schemas.microsoft.com/office/drawing/2014/main" id="{1FA68C97-6CB2-458E-819F-CE286043CFE4}"/>
               </a:ext>
             </a:extLst>
           </p:cNvPr>
@@ -2949,7 +2949,7 @@
           <p:cNvPr id="10" name="">
             <a:extLst xmlns:a="http://schemas.openxmlformats.org/drawingml/2006/main">
               <a:ext uri="{FF2B5EF4-FFF2-40B4-BE49-F238E27FC236}">
-                <a16:creationId xmlns:a16="http://schemas.microsoft.com/office/drawing/2014/main" id="{E0E456E4-B7AC-4C7E-A6C1-93CC959D7018}"/>
+                <a16:creationId xmlns:a16="http://schemas.microsoft.com/office/drawing/2014/main" id="{9B5E6051-A485-41C7-8C95-4965D763BB51}"/>
               </a:ext>
             </a:extLst>
           </p:cNvPr>
@@ -3007,7 +3007,7 @@
           <p:cNvPr id="11" name="">
             <a:extLst xmlns:a="http://schemas.openxmlformats.org/drawingml/2006/main">
               <a:ext uri="{FF2B5EF4-FFF2-40B4-BE49-F238E27FC236}">
-                <a16:creationId xmlns:a16="http://schemas.microsoft.com/office/drawing/2014/main" id="{6A3BE6A0-22CA-4F2B-A4C1-A5D23665BFCD}"/>
+                <a16:creationId xmlns:a16="http://schemas.microsoft.com/office/drawing/2014/main" id="{4DFCA482-6718-4B40-9713-977ACC75D4DB}"/>
               </a:ext>
             </a:extLst>
           </p:cNvPr>
@@ -3040,7 +3040,7 @@
           <p:cNvPr id="12" name="">
             <a:extLst xmlns:a="http://schemas.openxmlformats.org/drawingml/2006/main">
               <a:ext uri="{FF2B5EF4-FFF2-40B4-BE49-F238E27FC236}">
-                <a16:creationId xmlns:a16="http://schemas.microsoft.com/office/drawing/2014/main" id="{4C8A59CC-47A9-4E9A-BB09-202719F83A15}"/>
+                <a16:creationId xmlns:a16="http://schemas.microsoft.com/office/drawing/2014/main" id="{A9A1F909-5AEF-4EA9-B63A-E89997022E2A}"/>
               </a:ext>
             </a:extLst>
           </p:cNvPr>
@@ -3098,7 +3098,7 @@
           <p:cNvPr id="13" name="">
             <a:extLst xmlns:a="http://schemas.openxmlformats.org/drawingml/2006/main">
               <a:ext uri="{FF2B5EF4-FFF2-40B4-BE49-F238E27FC236}">
-                <a16:creationId xmlns:a16="http://schemas.microsoft.com/office/drawing/2014/main" id="{1A3E3951-2F59-4BB7-931E-B8C13AD69B36}"/>
+                <a16:creationId xmlns:a16="http://schemas.microsoft.com/office/drawing/2014/main" id="{C4F481A5-3E10-41AB-90DF-1772FA4B4481}"/>
               </a:ext>
             </a:extLst>
           </p:cNvPr>
@@ -3156,7 +3156,7 @@
           <p:cNvPr id="14" name="">
             <a:extLst xmlns:a="http://schemas.openxmlformats.org/drawingml/2006/main">
               <a:ext uri="{FF2B5EF4-FFF2-40B4-BE49-F238E27FC236}">
-                <a16:creationId xmlns:a16="http://schemas.microsoft.com/office/drawing/2014/main" id="{80BBCDFD-0035-4948-909E-72841305CE07}"/>
+                <a16:creationId xmlns:a16="http://schemas.microsoft.com/office/drawing/2014/main" id="{B7982D99-7699-4ACD-94FE-83BBF01D4781}"/>
               </a:ext>
             </a:extLst>
           </p:cNvPr>
@@ -3189,7 +3189,7 @@
           <p:cNvPr id="15" name="">
             <a:extLst xmlns:a="http://schemas.openxmlformats.org/drawingml/2006/main">
               <a:ext uri="{FF2B5EF4-FFF2-40B4-BE49-F238E27FC236}">
-                <a16:creationId xmlns:a16="http://schemas.microsoft.com/office/drawing/2014/main" id="{AD5E51BF-548C-46EE-9F56-F24D0AE26402}"/>
+                <a16:creationId xmlns:a16="http://schemas.microsoft.com/office/drawing/2014/main" id="{A38991BF-8A36-4FCE-9E01-F4338D4FFF70}"/>
               </a:ext>
             </a:extLst>
           </p:cNvPr>
@@ -3247,7 +3247,7 @@
           <p:cNvPr id="16" name="">
             <a:extLst xmlns:a="http://schemas.openxmlformats.org/drawingml/2006/main">
               <a:ext uri="{FF2B5EF4-FFF2-40B4-BE49-F238E27FC236}">
-                <a16:creationId xmlns:a16="http://schemas.microsoft.com/office/drawing/2014/main" id="{0E8AAC72-287F-4610-A599-6E3E8EEC025C}"/>
+                <a16:creationId xmlns:a16="http://schemas.microsoft.com/office/drawing/2014/main" id="{D02C6A47-A5EC-4E03-B2AA-B85280F8B95A}"/>
               </a:ext>
             </a:extLst>
           </p:cNvPr>
@@ -3305,7 +3305,7 @@
           <p:cNvPr id="17" name="">
             <a:extLst xmlns:a="http://schemas.openxmlformats.org/drawingml/2006/main">
               <a:ext uri="{FF2B5EF4-FFF2-40B4-BE49-F238E27FC236}">
-                <a16:creationId xmlns:a16="http://schemas.microsoft.com/office/drawing/2014/main" id="{62501F02-7EA2-4F27-8CDC-6258A08AFE3B}"/>
+                <a16:creationId xmlns:a16="http://schemas.microsoft.com/office/drawing/2014/main" id="{1D9D4A6C-527E-4021-84A1-D526734B11E2}"/>
               </a:ext>
             </a:extLst>
           </p:cNvPr>
@@ -3338,7 +3338,7 @@
           <p:cNvPr id="18" name="">
             <a:extLst xmlns:a="http://schemas.openxmlformats.org/drawingml/2006/main">
               <a:ext uri="{FF2B5EF4-FFF2-40B4-BE49-F238E27FC236}">
-                <a16:creationId xmlns:a16="http://schemas.microsoft.com/office/drawing/2014/main" id="{29E48D92-9A14-403F-8AC8-321AC0FC807A}"/>
+                <a16:creationId xmlns:a16="http://schemas.microsoft.com/office/drawing/2014/main" id="{106A52AB-C001-4B4E-A219-B4661C55D094}"/>
               </a:ext>
             </a:extLst>
           </p:cNvPr>
@@ -3396,7 +3396,7 @@
           <p:cNvPr id="19" name="">
             <a:extLst xmlns:a="http://schemas.openxmlformats.org/drawingml/2006/main">
               <a:ext uri="{FF2B5EF4-FFF2-40B4-BE49-F238E27FC236}">
-                <a16:creationId xmlns:a16="http://schemas.microsoft.com/office/drawing/2014/main" id="{B1670322-EAAE-446C-9A33-E93164FE8DA6}"/>
+                <a16:creationId xmlns:a16="http://schemas.microsoft.com/office/drawing/2014/main" id="{1D9A2901-5103-4FE9-A805-9033070BED13}"/>
               </a:ext>
             </a:extLst>
           </p:cNvPr>
@@ -3454,7 +3454,7 @@
           <p:cNvPr id="20" name="">
             <a:extLst xmlns:a="http://schemas.openxmlformats.org/drawingml/2006/main">
               <a:ext uri="{FF2B5EF4-FFF2-40B4-BE49-F238E27FC236}">
-                <a16:creationId xmlns:a16="http://schemas.microsoft.com/office/drawing/2014/main" id="{EADB79D5-FB2C-42DB-98A5-58B33470BEA2}"/>
+                <a16:creationId xmlns:a16="http://schemas.microsoft.com/office/drawing/2014/main" id="{AE9741AD-AE56-4882-8929-1D01948F1120}"/>
               </a:ext>
             </a:extLst>
           </p:cNvPr>
@@ -3487,7 +3487,7 @@
           <p:cNvPr id="21" name="">
             <a:extLst xmlns:a="http://schemas.openxmlformats.org/drawingml/2006/main">
               <a:ext uri="{FF2B5EF4-FFF2-40B4-BE49-F238E27FC236}">
-                <a16:creationId xmlns:a16="http://schemas.microsoft.com/office/drawing/2014/main" id="{C395FD26-BCBD-4DD3-B915-D55DADE42F93}"/>
+                <a16:creationId xmlns:a16="http://schemas.microsoft.com/office/drawing/2014/main" id="{8D3A7F12-5C9D-4C38-9422-55EB5C216DD8}"/>
               </a:ext>
             </a:extLst>
           </p:cNvPr>
@@ -3545,7 +3545,7 @@
           <p:cNvPr id="22" name="">
             <a:extLst xmlns:a="http://schemas.openxmlformats.org/drawingml/2006/main">
               <a:ext uri="{FF2B5EF4-FFF2-40B4-BE49-F238E27FC236}">
-                <a16:creationId xmlns:a16="http://schemas.microsoft.com/office/drawing/2014/main" id="{10215627-A012-44C4-A10C-AF9DECF79DE6}"/>
+                <a16:creationId xmlns:a16="http://schemas.microsoft.com/office/drawing/2014/main" id="{8F325C0D-9B0F-432A-9C49-EA40D2BADF3F}"/>
               </a:ext>
             </a:extLst>
           </p:cNvPr>
@@ -3603,7 +3603,7 @@
           <p:cNvPr id="23" name="">
             <a:extLst xmlns:a="http://schemas.openxmlformats.org/drawingml/2006/main">
               <a:ext uri="{FF2B5EF4-FFF2-40B4-BE49-F238E27FC236}">
-                <a16:creationId xmlns:a16="http://schemas.microsoft.com/office/drawing/2014/main" id="{4E6BAA16-3CB9-4002-8C6E-B97204E63211}"/>
+                <a16:creationId xmlns:a16="http://schemas.microsoft.com/office/drawing/2014/main" id="{05CD4EFE-4255-4494-8F62-C9EB04414939}"/>
               </a:ext>
             </a:extLst>
           </p:cNvPr>
@@ -3661,7 +3661,7 @@
           <p:cNvPr id="24" name="">
             <a:extLst xmlns:a="http://schemas.openxmlformats.org/drawingml/2006/main">
               <a:ext uri="{FF2B5EF4-FFF2-40B4-BE49-F238E27FC236}">
-                <a16:creationId xmlns:a16="http://schemas.microsoft.com/office/drawing/2014/main" id="{8BCAE2E6-A523-4B86-99AF-6C3F198CC151}"/>
+                <a16:creationId xmlns:a16="http://schemas.microsoft.com/office/drawing/2014/main" id="{FF272A3C-1EA6-4F40-96BE-5AD10D2A6F55}"/>
               </a:ext>
             </a:extLst>
           </p:cNvPr>
@@ -3694,7 +3694,7 @@
           <p:cNvPr id="25" name="">
             <a:extLst xmlns:a="http://schemas.openxmlformats.org/drawingml/2006/main">
               <a:ext uri="{FF2B5EF4-FFF2-40B4-BE49-F238E27FC236}">
-                <a16:creationId xmlns:a16="http://schemas.microsoft.com/office/drawing/2014/main" id="{C2C9C7C3-94E5-49F5-90BC-817274839C35}"/>
+                <a16:creationId xmlns:a16="http://schemas.microsoft.com/office/drawing/2014/main" id="{5833223A-8A6A-489B-8AED-B6F35BCC1824}"/>
               </a:ext>
             </a:extLst>
           </p:cNvPr>
@@ -3727,7 +3727,7 @@
           <p:cNvPr id="26" name="">
             <a:extLst xmlns:a="http://schemas.openxmlformats.org/drawingml/2006/main">
               <a:ext uri="{FF2B5EF4-FFF2-40B4-BE49-F238E27FC236}">
-                <a16:creationId xmlns:a16="http://schemas.microsoft.com/office/drawing/2014/main" id="{51908F0E-07AB-4C19-B0E8-7864A539A4FE}"/>
+                <a16:creationId xmlns:a16="http://schemas.microsoft.com/office/drawing/2014/main" id="{E473146B-2816-4D93-AFA6-2B795FCB75C9}"/>
               </a:ext>
             </a:extLst>
           </p:cNvPr>
@@ -3785,7 +3785,7 @@
           <p:cNvPr id="27" name="">
             <a:extLst xmlns:a="http://schemas.openxmlformats.org/drawingml/2006/main">
               <a:ext uri="{FF2B5EF4-FFF2-40B4-BE49-F238E27FC236}">
-                <a16:creationId xmlns:a16="http://schemas.microsoft.com/office/drawing/2014/main" id="{86CB8553-B405-46E9-AEE0-64C900A567DE}"/>
+                <a16:creationId xmlns:a16="http://schemas.microsoft.com/office/drawing/2014/main" id="{AF1EECB6-5268-4244-9747-A16C2B4188E6}"/>
               </a:ext>
             </a:extLst>
           </p:cNvPr>
@@ -3866,7 +3866,7 @@
           <p:cNvPr id="28" name="">
             <a:extLst xmlns:a="http://schemas.openxmlformats.org/drawingml/2006/main">
               <a:ext uri="{FF2B5EF4-FFF2-40B4-BE49-F238E27FC236}">
-                <a16:creationId xmlns:a16="http://schemas.microsoft.com/office/drawing/2014/main" id="{E3EEE20F-FB4D-42E6-B820-ABC4651F60DC}"/>
+                <a16:creationId xmlns:a16="http://schemas.microsoft.com/office/drawing/2014/main" id="{1C630BEF-4428-4555-BD6F-95A763007015}"/>
               </a:ext>
             </a:extLst>
           </p:cNvPr>
@@ -3899,7 +3899,7 @@
           <p:cNvPr id="29" name="">
             <a:extLst xmlns:a="http://schemas.openxmlformats.org/drawingml/2006/main">
               <a:ext uri="{FF2B5EF4-FFF2-40B4-BE49-F238E27FC236}">
-                <a16:creationId xmlns:a16="http://schemas.microsoft.com/office/drawing/2014/main" id="{2BB2C1D4-A512-4272-968B-47D6BACD0CF1}"/>
+                <a16:creationId xmlns:a16="http://schemas.microsoft.com/office/drawing/2014/main" id="{A3386415-B47D-4098-8EDA-3954AEB19D34}"/>
               </a:ext>
             </a:extLst>
           </p:cNvPr>
@@ -3957,7 +3957,7 @@
           <p:cNvPr id="30" name="">
             <a:extLst xmlns:a="http://schemas.openxmlformats.org/drawingml/2006/main">
               <a:ext uri="{FF2B5EF4-FFF2-40B4-BE49-F238E27FC236}">
-                <a16:creationId xmlns:a16="http://schemas.microsoft.com/office/drawing/2014/main" id="{8D83A81A-E4D7-4892-9FF6-EA4CFEE57C9F}"/>
+                <a16:creationId xmlns:a16="http://schemas.microsoft.com/office/drawing/2014/main" id="{C7A1A70E-C062-44AE-BC28-2C15DA8AB69F}"/>
               </a:ext>
             </a:extLst>
           </p:cNvPr>
@@ -4038,7 +4038,7 @@
           <p:cNvPr id="31" name="">
             <a:extLst xmlns:a="http://schemas.openxmlformats.org/drawingml/2006/main">
               <a:ext uri="{FF2B5EF4-FFF2-40B4-BE49-F238E27FC236}">
-                <a16:creationId xmlns:a16="http://schemas.microsoft.com/office/drawing/2014/main" id="{CF5349B3-3D13-43EE-B58E-8DACC5FF0396}"/>
+                <a16:creationId xmlns:a16="http://schemas.microsoft.com/office/drawing/2014/main" id="{CE8BB824-7751-4FCE-9FB7-125B47CB654D}"/>
               </a:ext>
             </a:extLst>
           </p:cNvPr>
@@ -4071,7 +4071,7 @@
           <p:cNvPr id="32" name="">
             <a:extLst xmlns:a="http://schemas.openxmlformats.org/drawingml/2006/main">
               <a:ext uri="{FF2B5EF4-FFF2-40B4-BE49-F238E27FC236}">
-                <a16:creationId xmlns:a16="http://schemas.microsoft.com/office/drawing/2014/main" id="{BE2F2CCA-2D70-4647-9391-1EAA4A48B4FB}"/>
+                <a16:creationId xmlns:a16="http://schemas.microsoft.com/office/drawing/2014/main" id="{381A72E3-7883-4DC3-859B-835B23C73177}"/>
               </a:ext>
             </a:extLst>
           </p:cNvPr>
@@ -4129,7 +4129,7 @@
           <p:cNvPr id="33" name="">
             <a:extLst xmlns:a="http://schemas.openxmlformats.org/drawingml/2006/main">
               <a:ext uri="{FF2B5EF4-FFF2-40B4-BE49-F238E27FC236}">
-                <a16:creationId xmlns:a16="http://schemas.microsoft.com/office/drawing/2014/main" id="{41CBCCCB-D43F-4D4C-9043-BD9BE3DE071A}"/>
+                <a16:creationId xmlns:a16="http://schemas.microsoft.com/office/drawing/2014/main" id="{EA210F45-0035-4313-A308-29FF18B0A487}"/>
               </a:ext>
             </a:extLst>
           </p:cNvPr>
@@ -4210,7 +4210,7 @@
           <p:cNvPr id="34" name="">
             <a:extLst xmlns:a="http://schemas.openxmlformats.org/drawingml/2006/main">
               <a:ext uri="{FF2B5EF4-FFF2-40B4-BE49-F238E27FC236}">
-                <a16:creationId xmlns:a16="http://schemas.microsoft.com/office/drawing/2014/main" id="{469BE812-DEFA-4D95-BDC7-EAEA42F2D128}"/>
+                <a16:creationId xmlns:a16="http://schemas.microsoft.com/office/drawing/2014/main" id="{948143FA-4226-4601-B198-75D95B0EB38E}"/>
               </a:ext>
             </a:extLst>
           </p:cNvPr>
@@ -4266,7 +4266,7 @@
     </p:spTree>
     <p:extLst>
       <p:ext uri="{BB962C8B-B14F-4D97-AF65-F5344CB8AC3E}">
-        <p14:creationId xmlns:p14="http://schemas.microsoft.com/office/powerpoint/2010/main" val="1290007252"/>
+        <p14:creationId xmlns:p14="http://schemas.microsoft.com/office/powerpoint/2010/main" val="789454669"/>
       </p:ext>
     </p:extLst>
   </p:cSld>
@@ -4297,7 +4297,7 @@
           <p:cNvPr id="16" name="">
             <a:extLst xmlns:a="http://schemas.openxmlformats.org/drawingml/2006/main">
               <a:ext uri="{FF2B5EF4-FFF2-40B4-BE49-F238E27FC236}">
-                <a16:creationId xmlns:a16="http://schemas.microsoft.com/office/drawing/2014/main" id="{6207A5C5-71AE-46D5-BAF9-C24FC6602775}"/>
+                <a16:creationId xmlns:a16="http://schemas.microsoft.com/office/drawing/2014/main" id="{55547BA3-97B8-4865-9B56-E51B852F4F01}"/>
               </a:ext>
             </a:extLst>
           </p:cNvPr>
@@ -4355,7 +4355,7 @@
           <p:cNvPr id="2" name="">
             <a:extLst xmlns:a="http://schemas.openxmlformats.org/drawingml/2006/main">
               <a:ext uri="{FF2B5EF4-FFF2-40B4-BE49-F238E27FC236}">
-                <a16:creationId xmlns:a16="http://schemas.microsoft.com/office/drawing/2014/main" id="{6F6B4190-93AF-4ABC-8A19-D7418449CC6A}"/>
+                <a16:creationId xmlns:a16="http://schemas.microsoft.com/office/drawing/2014/main" id="{3BD7274B-BFF8-416B-AC23-77C4E45BF17F}"/>
               </a:ext>
             </a:extLst>
           </p:cNvPr>
@@ -4388,7 +4388,7 @@
           <p:cNvPr id="3" name="">
             <a:extLst xmlns:a="http://schemas.openxmlformats.org/drawingml/2006/main">
               <a:ext uri="{FF2B5EF4-FFF2-40B4-BE49-F238E27FC236}">
-                <a16:creationId xmlns:a16="http://schemas.microsoft.com/office/drawing/2014/main" id="{C2DF5428-53DA-4AFF-99F8-52335C38102C}"/>
+                <a16:creationId xmlns:a16="http://schemas.microsoft.com/office/drawing/2014/main" id="{731B81EF-6F53-480B-816E-CF00A9A911F9}"/>
               </a:ext>
             </a:extLst>
           </p:cNvPr>
@@ -4446,7 +4446,7 @@
           <p:cNvPr id="4" name="">
             <a:extLst xmlns:a="http://schemas.openxmlformats.org/drawingml/2006/main">
               <a:ext uri="{FF2B5EF4-FFF2-40B4-BE49-F238E27FC236}">
-                <a16:creationId xmlns:a16="http://schemas.microsoft.com/office/drawing/2014/main" id="{91F01406-B6F9-4C32-B49F-EF660FAAAB81}"/>
+                <a16:creationId xmlns:a16="http://schemas.microsoft.com/office/drawing/2014/main" id="{B0653C3B-1C61-490D-8ABC-A0AC6EA3FB1D}"/>
               </a:ext>
             </a:extLst>
           </p:cNvPr>
@@ -4504,7 +4504,7 @@
           <p:cNvPr id="5" name="">
             <a:extLst xmlns:a="http://schemas.openxmlformats.org/drawingml/2006/main">
               <a:ext uri="{FF2B5EF4-FFF2-40B4-BE49-F238E27FC236}">
-                <a16:creationId xmlns:a16="http://schemas.microsoft.com/office/drawing/2014/main" id="{BE2246F9-B3F0-436C-A32D-3FEE3A7204BE}"/>
+                <a16:creationId xmlns:a16="http://schemas.microsoft.com/office/drawing/2014/main" id="{4E6CD20F-6469-46F1-9C77-AC408783FF46}"/>
               </a:ext>
             </a:extLst>
           </p:cNvPr>
@@ -4541,7 +4541,7 @@
           <p:nvPr/>
         </p:nvPicPr>
         <p:blipFill>
-          <a:blip xmlns:r="http://schemas.openxmlformats.org/officeDocument/2006/relationships" xmlns:a="http://schemas.openxmlformats.org/drawingml/2006/main" r:embed="R6f31c9fe5353491b"/>
+          <a:blip xmlns:r="http://schemas.openxmlformats.org/officeDocument/2006/relationships" xmlns:a="http://schemas.openxmlformats.org/drawingml/2006/main" r:embed="R75e845c236584214"/>
           <a:stretch xmlns:a="http://schemas.openxmlformats.org/drawingml/2006/main"/>
         </p:blipFill>
         <p:spPr>
@@ -4559,7 +4559,7 @@
           <p:cNvPr id="7" name="">
             <a:extLst xmlns:a="http://schemas.openxmlformats.org/drawingml/2006/main">
               <a:ext uri="{FF2B5EF4-FFF2-40B4-BE49-F238E27FC236}">
-                <a16:creationId xmlns:a16="http://schemas.microsoft.com/office/drawing/2014/main" id="{E749F796-49E3-44DF-B98C-C178B2C38610}"/>
+                <a16:creationId xmlns:a16="http://schemas.microsoft.com/office/drawing/2014/main" id="{36D359B4-D961-4835-B3BD-E5CEB4ACBFF7}"/>
               </a:ext>
             </a:extLst>
           </p:cNvPr>
@@ -4617,7 +4617,7 @@
           <p:cNvPr id="8" name="">
             <a:extLst xmlns:a="http://schemas.openxmlformats.org/drawingml/2006/main">
               <a:ext uri="{FF2B5EF4-FFF2-40B4-BE49-F238E27FC236}">
-                <a16:creationId xmlns:a16="http://schemas.microsoft.com/office/drawing/2014/main" id="{CE63CDAD-05A0-4BE4-AC13-DBE6593E7791}"/>
+                <a16:creationId xmlns:a16="http://schemas.microsoft.com/office/drawing/2014/main" id="{5AA203C5-CC51-4A6F-A76A-ED5230BD11CB}"/>
               </a:ext>
             </a:extLst>
           </p:cNvPr>
@@ -4721,7 +4721,7 @@
           <p:cNvPr id="9" name="">
             <a:extLst xmlns:a="http://schemas.openxmlformats.org/drawingml/2006/main">
               <a:ext uri="{FF2B5EF4-FFF2-40B4-BE49-F238E27FC236}">
-                <a16:creationId xmlns:a16="http://schemas.microsoft.com/office/drawing/2014/main" id="{E82E7E39-C4D6-4820-937A-75A9A32F0CE3}"/>
+                <a16:creationId xmlns:a16="http://schemas.microsoft.com/office/drawing/2014/main" id="{0D597DF9-588A-4363-9D60-696D850CCDC6}"/>
               </a:ext>
             </a:extLst>
           </p:cNvPr>
@@ -4754,7 +4754,7 @@
           <p:cNvPr id="10" name="">
             <a:extLst xmlns:a="http://schemas.openxmlformats.org/drawingml/2006/main">
               <a:ext uri="{FF2B5EF4-FFF2-40B4-BE49-F238E27FC236}">
-                <a16:creationId xmlns:a16="http://schemas.microsoft.com/office/drawing/2014/main" id="{9008471C-3554-418E-8E91-76E88A85AC5F}"/>
+                <a16:creationId xmlns:a16="http://schemas.microsoft.com/office/drawing/2014/main" id="{02055FFC-973C-4DB0-80F9-39078C07A251}"/>
               </a:ext>
             </a:extLst>
           </p:cNvPr>
@@ -4812,7 +4812,7 @@
           <p:cNvPr id="11" name="">
             <a:extLst xmlns:a="http://schemas.openxmlformats.org/drawingml/2006/main">
               <a:ext uri="{FF2B5EF4-FFF2-40B4-BE49-F238E27FC236}">
-                <a16:creationId xmlns:a16="http://schemas.microsoft.com/office/drawing/2014/main" id="{4A1177FE-FA5C-45C5-A8FA-C63482931B4E}"/>
+                <a16:creationId xmlns:a16="http://schemas.microsoft.com/office/drawing/2014/main" id="{08A9E249-FD4A-4AA5-A81B-8EC2376DD972}"/>
               </a:ext>
             </a:extLst>
           </p:cNvPr>
@@ -4870,7 +4870,7 @@
           <p:cNvPr id="12" name="">
             <a:extLst xmlns:a="http://schemas.openxmlformats.org/drawingml/2006/main">
               <a:ext uri="{FF2B5EF4-FFF2-40B4-BE49-F238E27FC236}">
-                <a16:creationId xmlns:a16="http://schemas.microsoft.com/office/drawing/2014/main" id="{4BA57588-86FA-4AA9-A44D-42E0ABC0A1A7}"/>
+                <a16:creationId xmlns:a16="http://schemas.microsoft.com/office/drawing/2014/main" id="{E8D7A10A-836D-4FDE-8979-B35A1AC85046}"/>
               </a:ext>
             </a:extLst>
           </p:cNvPr>
@@ -4928,7 +4928,7 @@
           <p:cNvPr id="13" name="">
             <a:extLst xmlns:a="http://schemas.openxmlformats.org/drawingml/2006/main">
               <a:ext uri="{FF2B5EF4-FFF2-40B4-BE49-F238E27FC236}">
-                <a16:creationId xmlns:a16="http://schemas.microsoft.com/office/drawing/2014/main" id="{FA47A710-B5F7-4F33-80A5-33C3A3557F5F}"/>
+                <a16:creationId xmlns:a16="http://schemas.microsoft.com/office/drawing/2014/main" id="{520BF400-16EC-4404-9B52-21B21008D846}"/>
               </a:ext>
             </a:extLst>
           </p:cNvPr>
@@ -4986,7 +4986,7 @@
           <p:cNvPr id="14" name="">
             <a:extLst xmlns:a="http://schemas.openxmlformats.org/drawingml/2006/main">
               <a:ext uri="{FF2B5EF4-FFF2-40B4-BE49-F238E27FC236}">
-                <a16:creationId xmlns:a16="http://schemas.microsoft.com/office/drawing/2014/main" id="{AD8125AD-5642-4A2D-ABCF-531F62880912}"/>
+                <a16:creationId xmlns:a16="http://schemas.microsoft.com/office/drawing/2014/main" id="{3BAA2B04-C3C8-477B-B025-3C0CA1CB1C8E}"/>
               </a:ext>
             </a:extLst>
           </p:cNvPr>
@@ -5044,7 +5044,7 @@
           <p:cNvPr id="15" name="">
             <a:extLst xmlns:a="http://schemas.openxmlformats.org/drawingml/2006/main">
               <a:ext uri="{FF2B5EF4-FFF2-40B4-BE49-F238E27FC236}">
-                <a16:creationId xmlns:a16="http://schemas.microsoft.com/office/drawing/2014/main" id="{C792A09E-221F-4C6A-9BFA-9CDE0F1D60C5}"/>
+                <a16:creationId xmlns:a16="http://schemas.microsoft.com/office/drawing/2014/main" id="{0438BE9F-138C-4DFB-8ED8-78647658D5C0}"/>
               </a:ext>
             </a:extLst>
           </p:cNvPr>
@@ -5100,7 +5100,7 @@
     </p:spTree>
     <p:extLst>
       <p:ext uri="{BB962C8B-B14F-4D97-AF65-F5344CB8AC3E}">
-        <p14:creationId xmlns:p14="http://schemas.microsoft.com/office/powerpoint/2010/main" val="2017024100"/>
+        <p14:creationId xmlns:p14="http://schemas.microsoft.com/office/powerpoint/2010/main" val="1255195211"/>
       </p:ext>
     </p:extLst>
   </p:cSld>
@@ -5131,7 +5131,7 @@
           <p:cNvPr id="19" name="">
             <a:extLst xmlns:a="http://schemas.openxmlformats.org/drawingml/2006/main">
               <a:ext uri="{FF2B5EF4-FFF2-40B4-BE49-F238E27FC236}">
-                <a16:creationId xmlns:a16="http://schemas.microsoft.com/office/drawing/2014/main" id="{52929E6F-29A8-41D1-B7DF-7FE0295DEB51}"/>
+                <a16:creationId xmlns:a16="http://schemas.microsoft.com/office/drawing/2014/main" id="{CEFA4281-7E95-447C-90DE-DB460CEA96F7}"/>
               </a:ext>
             </a:extLst>
           </p:cNvPr>
@@ -5189,7 +5189,7 @@
           <p:cNvPr id="2" name="">
             <a:extLst xmlns:a="http://schemas.openxmlformats.org/drawingml/2006/main">
               <a:ext uri="{FF2B5EF4-FFF2-40B4-BE49-F238E27FC236}">
-                <a16:creationId xmlns:a16="http://schemas.microsoft.com/office/drawing/2014/main" id="{A88DCC55-F757-4BB5-87AA-4F8BDBAD0F55}"/>
+                <a16:creationId xmlns:a16="http://schemas.microsoft.com/office/drawing/2014/main" id="{265B35C8-C2AB-4B0D-BBC5-4AA9C7B9DACB}"/>
               </a:ext>
             </a:extLst>
           </p:cNvPr>
@@ -5222,7 +5222,7 @@
           <p:cNvPr id="3" name="">
             <a:extLst xmlns:a="http://schemas.openxmlformats.org/drawingml/2006/main">
               <a:ext uri="{FF2B5EF4-FFF2-40B4-BE49-F238E27FC236}">
-                <a16:creationId xmlns:a16="http://schemas.microsoft.com/office/drawing/2014/main" id="{9AF2ABA1-6EE4-46DC-B6AB-0314BF3E4A7F}"/>
+                <a16:creationId xmlns:a16="http://schemas.microsoft.com/office/drawing/2014/main" id="{D1A07303-75A1-42DE-9F59-C851AB605DB8}"/>
               </a:ext>
             </a:extLst>
           </p:cNvPr>
@@ -5280,7 +5280,7 @@
           <p:cNvPr id="4" name="">
             <a:extLst xmlns:a="http://schemas.openxmlformats.org/drawingml/2006/main">
               <a:ext uri="{FF2B5EF4-FFF2-40B4-BE49-F238E27FC236}">
-                <a16:creationId xmlns:a16="http://schemas.microsoft.com/office/drawing/2014/main" id="{0BE235CE-E3F6-4317-B45C-CE9CA2DBCCEF}"/>
+                <a16:creationId xmlns:a16="http://schemas.microsoft.com/office/drawing/2014/main" id="{9E1AD368-7D73-4B7C-B724-1634B9B65EE5}"/>
               </a:ext>
             </a:extLst>
           </p:cNvPr>
@@ -5338,7 +5338,7 @@
           <p:cNvPr id="5" name="">
             <a:extLst xmlns:a="http://schemas.openxmlformats.org/drawingml/2006/main">
               <a:ext uri="{FF2B5EF4-FFF2-40B4-BE49-F238E27FC236}">
-                <a16:creationId xmlns:a16="http://schemas.microsoft.com/office/drawing/2014/main" id="{33A50B8B-A7E7-4359-AB1C-B6EEF85DB1A2}"/>
+                <a16:creationId xmlns:a16="http://schemas.microsoft.com/office/drawing/2014/main" id="{8FA872B9-83C7-4BB2-AC57-FB258D0E7030}"/>
               </a:ext>
             </a:extLst>
           </p:cNvPr>
@@ -5396,7 +5396,7 @@
           <p:cNvPr id="6" name="">
             <a:extLst xmlns:a="http://schemas.openxmlformats.org/drawingml/2006/main">
               <a:ext uri="{FF2B5EF4-FFF2-40B4-BE49-F238E27FC236}">
-                <a16:creationId xmlns:a16="http://schemas.microsoft.com/office/drawing/2014/main" id="{84AAC412-A10F-4401-AD80-D559D25CA38F}"/>
+                <a16:creationId xmlns:a16="http://schemas.microsoft.com/office/drawing/2014/main" id="{69D440D3-909E-4E4B-84B4-E652E8B68D1E}"/>
               </a:ext>
             </a:extLst>
           </p:cNvPr>
@@ -5454,7 +5454,7 @@
           <p:cNvPr id="7" name="">
             <a:extLst xmlns:a="http://schemas.openxmlformats.org/drawingml/2006/main">
               <a:ext uri="{FF2B5EF4-FFF2-40B4-BE49-F238E27FC236}">
-                <a16:creationId xmlns:a16="http://schemas.microsoft.com/office/drawing/2014/main" id="{3B367595-541E-4482-847E-431DE52BF983}"/>
+                <a16:creationId xmlns:a16="http://schemas.microsoft.com/office/drawing/2014/main" id="{B0766FA7-2F15-4F1E-A6A8-113B20499588}"/>
               </a:ext>
             </a:extLst>
           </p:cNvPr>
@@ -5512,7 +5512,7 @@
           <p:cNvPr id="8" name="">
             <a:extLst xmlns:a="http://schemas.openxmlformats.org/drawingml/2006/main">
               <a:ext uri="{FF2B5EF4-FFF2-40B4-BE49-F238E27FC236}">
-                <a16:creationId xmlns:a16="http://schemas.microsoft.com/office/drawing/2014/main" id="{95678AA4-8E74-4529-B3FF-EF65BA424BFC}"/>
+                <a16:creationId xmlns:a16="http://schemas.microsoft.com/office/drawing/2014/main" id="{2ACD267D-4BAF-4C80-8A77-C9E4DF9C28AA}"/>
               </a:ext>
             </a:extLst>
           </p:cNvPr>
@@ -5570,7 +5570,7 @@
           <p:cNvPr id="9" name="">
             <a:extLst xmlns:a="http://schemas.openxmlformats.org/drawingml/2006/main">
               <a:ext uri="{FF2B5EF4-FFF2-40B4-BE49-F238E27FC236}">
-                <a16:creationId xmlns:a16="http://schemas.microsoft.com/office/drawing/2014/main" id="{347A3C88-DA87-474B-902F-8A63ADB9F07C}"/>
+                <a16:creationId xmlns:a16="http://schemas.microsoft.com/office/drawing/2014/main" id="{DC816C4A-B0E4-4D34-88BD-43F5A3CCC938}"/>
               </a:ext>
             </a:extLst>
           </p:cNvPr>
@@ -5628,7 +5628,7 @@
           <p:cNvPr id="10" name="">
             <a:extLst xmlns:a="http://schemas.openxmlformats.org/drawingml/2006/main">
               <a:ext uri="{FF2B5EF4-FFF2-40B4-BE49-F238E27FC236}">
-                <a16:creationId xmlns:a16="http://schemas.microsoft.com/office/drawing/2014/main" id="{6A716C4C-9F40-4D7E-BAD0-20F7E0355B71}"/>
+                <a16:creationId xmlns:a16="http://schemas.microsoft.com/office/drawing/2014/main" id="{6E704FB2-09D4-4C23-B26F-AE799A7BB863}"/>
               </a:ext>
             </a:extLst>
           </p:cNvPr>
@@ -5665,7 +5665,7 @@
           <p:nvPr/>
         </p:nvPicPr>
         <p:blipFill>
-          <a:blip xmlns:r="http://schemas.openxmlformats.org/officeDocument/2006/relationships" xmlns:a="http://schemas.openxmlformats.org/drawingml/2006/main" r:embed="R0958f2c0e6cb4431"/>
+          <a:blip xmlns:r="http://schemas.openxmlformats.org/officeDocument/2006/relationships" xmlns:a="http://schemas.openxmlformats.org/drawingml/2006/main" r:embed="Ra10a762e6c4046f9"/>
           <a:stretch xmlns:a="http://schemas.openxmlformats.org/drawingml/2006/main"/>
         </p:blipFill>
         <p:spPr>
@@ -5683,7 +5683,7 @@
           <p:cNvPr id="12" name="">
             <a:extLst xmlns:a="http://schemas.openxmlformats.org/drawingml/2006/main">
               <a:ext uri="{FF2B5EF4-FFF2-40B4-BE49-F238E27FC236}">
-                <a16:creationId xmlns:a16="http://schemas.microsoft.com/office/drawing/2014/main" id="{B9419BC2-8055-430A-9CF0-EDB0F69C9D4B}"/>
+                <a16:creationId xmlns:a16="http://schemas.microsoft.com/office/drawing/2014/main" id="{D9741278-BAF8-4038-8ACA-C5BEC13A64E1}"/>
               </a:ext>
             </a:extLst>
           </p:cNvPr>
@@ -5741,7 +5741,7 @@
           <p:cNvPr id="13" name="">
             <a:extLst xmlns:a="http://schemas.openxmlformats.org/drawingml/2006/main">
               <a:ext uri="{FF2B5EF4-FFF2-40B4-BE49-F238E27FC236}">
-                <a16:creationId xmlns:a16="http://schemas.microsoft.com/office/drawing/2014/main" id="{8EFC9BCA-67F1-404A-A0DD-371025830B2C}"/>
+                <a16:creationId xmlns:a16="http://schemas.microsoft.com/office/drawing/2014/main" id="{3EAE0823-BA7B-414D-878B-B26FDFAC0F8D}"/>
               </a:ext>
             </a:extLst>
           </p:cNvPr>
@@ -5799,7 +5799,7 @@
           <p:cNvPr id="14" name="">
             <a:extLst xmlns:a="http://schemas.openxmlformats.org/drawingml/2006/main">
               <a:ext uri="{FF2B5EF4-FFF2-40B4-BE49-F238E27FC236}">
-                <a16:creationId xmlns:a16="http://schemas.microsoft.com/office/drawing/2014/main" id="{770FA1FD-6E3F-48E1-A2D5-E4518BAFF145}"/>
+                <a16:creationId xmlns:a16="http://schemas.microsoft.com/office/drawing/2014/main" id="{755DE7A3-BAD2-4722-A619-3ECA3611715C}"/>
               </a:ext>
             </a:extLst>
           </p:cNvPr>
@@ -5926,7 +5926,7 @@
           <p:cNvPr id="15" name="">
             <a:extLst xmlns:a="http://schemas.openxmlformats.org/drawingml/2006/main">
               <a:ext uri="{FF2B5EF4-FFF2-40B4-BE49-F238E27FC236}">
-                <a16:creationId xmlns:a16="http://schemas.microsoft.com/office/drawing/2014/main" id="{85BB5944-D70F-44C0-B324-612AAFE941ED}"/>
+                <a16:creationId xmlns:a16="http://schemas.microsoft.com/office/drawing/2014/main" id="{480E9023-8D2B-4F87-BAA7-4BDFAE92D295}"/>
               </a:ext>
             </a:extLst>
           </p:cNvPr>
@@ -5959,7 +5959,7 @@
           <p:cNvPr id="16" name="">
             <a:extLst xmlns:a="http://schemas.openxmlformats.org/drawingml/2006/main">
               <a:ext uri="{FF2B5EF4-FFF2-40B4-BE49-F238E27FC236}">
-                <a16:creationId xmlns:a16="http://schemas.microsoft.com/office/drawing/2014/main" id="{08B0BC70-610C-49EB-B3B7-BB7A9EC1BFFB}"/>
+                <a16:creationId xmlns:a16="http://schemas.microsoft.com/office/drawing/2014/main" id="{13F4BA7C-AE85-4D0C-8D9F-062303AF55F0}"/>
               </a:ext>
             </a:extLst>
           </p:cNvPr>
@@ -6017,7 +6017,7 @@
           <p:cNvPr id="17" name="">
             <a:extLst xmlns:a="http://schemas.openxmlformats.org/drawingml/2006/main">
               <a:ext uri="{FF2B5EF4-FFF2-40B4-BE49-F238E27FC236}">
-                <a16:creationId xmlns:a16="http://schemas.microsoft.com/office/drawing/2014/main" id="{138309D3-71E6-48F9-9807-200AF3E7892C}"/>
+                <a16:creationId xmlns:a16="http://schemas.microsoft.com/office/drawing/2014/main" id="{689E1281-D387-494E-8DF1-259429122C0F}"/>
               </a:ext>
             </a:extLst>
           </p:cNvPr>
@@ -6075,7 +6075,7 @@
           <p:cNvPr id="18" name="">
             <a:extLst xmlns:a="http://schemas.openxmlformats.org/drawingml/2006/main">
               <a:ext uri="{FF2B5EF4-FFF2-40B4-BE49-F238E27FC236}">
-                <a16:creationId xmlns:a16="http://schemas.microsoft.com/office/drawing/2014/main" id="{24CA22F8-8DFC-44FB-9180-37B77D3F49F0}"/>
+                <a16:creationId xmlns:a16="http://schemas.microsoft.com/office/drawing/2014/main" id="{CE969B65-036D-45CC-BB03-86BAB96AE2C1}"/>
               </a:ext>
             </a:extLst>
           </p:cNvPr>
@@ -6131,7 +6131,7 @@
     </p:spTree>
     <p:extLst>
       <p:ext uri="{BB962C8B-B14F-4D97-AF65-F5344CB8AC3E}">
-        <p14:creationId xmlns:p14="http://schemas.microsoft.com/office/powerpoint/2010/main" val="1357592775"/>
+        <p14:creationId xmlns:p14="http://schemas.microsoft.com/office/powerpoint/2010/main" val="379077350"/>
       </p:ext>
     </p:extLst>
   </p:cSld>
@@ -6162,7 +6162,7 @@
           <p:cNvPr id="24" name="">
             <a:extLst xmlns:a="http://schemas.openxmlformats.org/drawingml/2006/main">
               <a:ext uri="{FF2B5EF4-FFF2-40B4-BE49-F238E27FC236}">
-                <a16:creationId xmlns:a16="http://schemas.microsoft.com/office/drawing/2014/main" id="{CE18EFF2-36B0-452B-ACFB-2FAE00313063}"/>
+                <a16:creationId xmlns:a16="http://schemas.microsoft.com/office/drawing/2014/main" id="{FF831420-7FDB-478E-9FB7-15A68A3DC9EA}"/>
               </a:ext>
             </a:extLst>
           </p:cNvPr>
@@ -6220,7 +6220,7 @@
           <p:cNvPr id="2" name="">
             <a:extLst xmlns:a="http://schemas.openxmlformats.org/drawingml/2006/main">
               <a:ext uri="{FF2B5EF4-FFF2-40B4-BE49-F238E27FC236}">
-                <a16:creationId xmlns:a16="http://schemas.microsoft.com/office/drawing/2014/main" id="{70A7E915-0052-45C5-A330-AC50397EFBC4}"/>
+                <a16:creationId xmlns:a16="http://schemas.microsoft.com/office/drawing/2014/main" id="{8FC99CB8-4C89-4019-9EDD-A44C16472A05}"/>
               </a:ext>
             </a:extLst>
           </p:cNvPr>
@@ -6253,7 +6253,7 @@
           <p:cNvPr id="3" name="">
             <a:extLst xmlns:a="http://schemas.openxmlformats.org/drawingml/2006/main">
               <a:ext uri="{FF2B5EF4-FFF2-40B4-BE49-F238E27FC236}">
-                <a16:creationId xmlns:a16="http://schemas.microsoft.com/office/drawing/2014/main" id="{F5D980EA-3452-42D7-B017-670097EFBCA8}"/>
+                <a16:creationId xmlns:a16="http://schemas.microsoft.com/office/drawing/2014/main" id="{DB309D49-ED6D-4DEB-AE56-9D3E1BA652D9}"/>
               </a:ext>
             </a:extLst>
           </p:cNvPr>
@@ -6311,7 +6311,7 @@
           <p:cNvPr id="4" name="">
             <a:extLst xmlns:a="http://schemas.openxmlformats.org/drawingml/2006/main">
               <a:ext uri="{FF2B5EF4-FFF2-40B4-BE49-F238E27FC236}">
-                <a16:creationId xmlns:a16="http://schemas.microsoft.com/office/drawing/2014/main" id="{06C8D15C-E8BB-4646-AE50-9C59E73F89DD}"/>
+                <a16:creationId xmlns:a16="http://schemas.microsoft.com/office/drawing/2014/main" id="{F7C48F16-B90A-481B-BA64-90D562530047}"/>
               </a:ext>
             </a:extLst>
           </p:cNvPr>
@@ -6369,7 +6369,7 @@
           <p:cNvPr id="5" name="">
             <a:extLst xmlns:a="http://schemas.openxmlformats.org/drawingml/2006/main">
               <a:ext uri="{FF2B5EF4-FFF2-40B4-BE49-F238E27FC236}">
-                <a16:creationId xmlns:a16="http://schemas.microsoft.com/office/drawing/2014/main" id="{3D9BC08D-D597-4824-868B-657A7E7529EE}"/>
+                <a16:creationId xmlns:a16="http://schemas.microsoft.com/office/drawing/2014/main" id="{AAC1291D-4788-4FC9-91D9-1C4E5D05F310}"/>
               </a:ext>
             </a:extLst>
           </p:cNvPr>
@@ -6417,7 +6417,7 @@
                 <a:ea typeface="Microsoft YaHei"/>
                 <a:cs typeface="Microsoft YaHei"/>
               </a:rPr>
-              <a:t>134</a:t>
+              <a:t>138</a:t>
             </a:r>
           </a:p>
         </p:txBody>
@@ -6427,7 +6427,7 @@
           <p:cNvPr id="6" name="">
             <a:extLst xmlns:a="http://schemas.openxmlformats.org/drawingml/2006/main">
               <a:ext uri="{FF2B5EF4-FFF2-40B4-BE49-F238E27FC236}">
-                <a16:creationId xmlns:a16="http://schemas.microsoft.com/office/drawing/2014/main" id="{024CB8A4-2F27-42CE-B58B-19E9995CFBE7}"/>
+                <a16:creationId xmlns:a16="http://schemas.microsoft.com/office/drawing/2014/main" id="{62EB35C0-4066-4A31-A18E-2E4BC3CF170F}"/>
               </a:ext>
             </a:extLst>
           </p:cNvPr>
@@ -6485,7 +6485,7 @@
           <p:cNvPr id="7" name="">
             <a:extLst xmlns:a="http://schemas.openxmlformats.org/drawingml/2006/main">
               <a:ext uri="{FF2B5EF4-FFF2-40B4-BE49-F238E27FC236}">
-                <a16:creationId xmlns:a16="http://schemas.microsoft.com/office/drawing/2014/main" id="{6A5F440E-C4AA-4678-8BEC-B023F1820F29}"/>
+                <a16:creationId xmlns:a16="http://schemas.microsoft.com/office/drawing/2014/main" id="{571BDC2C-1533-496C-B654-220E2EEE8879}"/>
               </a:ext>
             </a:extLst>
           </p:cNvPr>
@@ -6543,7 +6543,7 @@
           <p:cNvPr id="8" name="">
             <a:extLst xmlns:a="http://schemas.openxmlformats.org/drawingml/2006/main">
               <a:ext uri="{FF2B5EF4-FFF2-40B4-BE49-F238E27FC236}">
-                <a16:creationId xmlns:a16="http://schemas.microsoft.com/office/drawing/2014/main" id="{8AABBF13-CD9C-4253-81D7-94F74F5AAA0B}"/>
+                <a16:creationId xmlns:a16="http://schemas.microsoft.com/office/drawing/2014/main" id="{6BC8DD33-4F1E-4A91-A627-6A6645D29CBF}"/>
               </a:ext>
             </a:extLst>
           </p:cNvPr>
@@ -6601,7 +6601,7 @@
           <p:cNvPr id="9" name="">
             <a:extLst xmlns:a="http://schemas.openxmlformats.org/drawingml/2006/main">
               <a:ext uri="{FF2B5EF4-FFF2-40B4-BE49-F238E27FC236}">
-                <a16:creationId xmlns:a16="http://schemas.microsoft.com/office/drawing/2014/main" id="{D70DEF51-3C3C-4194-A18A-D39D43728568}"/>
+                <a16:creationId xmlns:a16="http://schemas.microsoft.com/office/drawing/2014/main" id="{05631F48-6780-4CAB-A5A8-783FCA73AD81}"/>
               </a:ext>
             </a:extLst>
           </p:cNvPr>
@@ -6659,7 +6659,7 @@
           <p:cNvPr id="10" name="">
             <a:extLst xmlns:a="http://schemas.openxmlformats.org/drawingml/2006/main">
               <a:ext uri="{FF2B5EF4-FFF2-40B4-BE49-F238E27FC236}">
-                <a16:creationId xmlns:a16="http://schemas.microsoft.com/office/drawing/2014/main" id="{595284BC-97C8-428F-8AB8-CAAD10FF0D7C}"/>
+                <a16:creationId xmlns:a16="http://schemas.microsoft.com/office/drawing/2014/main" id="{6E86A02F-9BBB-42C8-9FF3-A9061951BEB3}"/>
               </a:ext>
             </a:extLst>
           </p:cNvPr>
@@ -6717,7 +6717,7 @@
           <p:cNvPr id="11" name="">
             <a:extLst xmlns:a="http://schemas.openxmlformats.org/drawingml/2006/main">
               <a:ext uri="{FF2B5EF4-FFF2-40B4-BE49-F238E27FC236}">
-                <a16:creationId xmlns:a16="http://schemas.microsoft.com/office/drawing/2014/main" id="{D53BADB9-1B80-4AAF-BF1C-77A7389BD293}"/>
+                <a16:creationId xmlns:a16="http://schemas.microsoft.com/office/drawing/2014/main" id="{511C6A8C-A560-4C51-B2DA-AAEB28F4B0ED}"/>
               </a:ext>
             </a:extLst>
           </p:cNvPr>
@@ -6744,7 +6744,7 @@
           <p:cNvPr id="12" name="">
             <a:extLst xmlns:a="http://schemas.openxmlformats.org/drawingml/2006/main">
               <a:ext uri="{FF2B5EF4-FFF2-40B4-BE49-F238E27FC236}">
-                <a16:creationId xmlns:a16="http://schemas.microsoft.com/office/drawing/2014/main" id="{FCA1D144-2133-44EF-8611-EE47E707B89D}"/>
+                <a16:creationId xmlns:a16="http://schemas.microsoft.com/office/drawing/2014/main" id="{CEB89C15-EFF2-4B9A-84B3-9C99438E1409}"/>
               </a:ext>
             </a:extLst>
           </p:cNvPr>
@@ -6802,7 +6802,7 @@
           <p:cNvPr id="13" name="">
             <a:extLst xmlns:a="http://schemas.openxmlformats.org/drawingml/2006/main">
               <a:ext uri="{FF2B5EF4-FFF2-40B4-BE49-F238E27FC236}">
-                <a16:creationId xmlns:a16="http://schemas.microsoft.com/office/drawing/2014/main" id="{4B500776-8F71-473D-BE72-C62DC1E4919F}"/>
+                <a16:creationId xmlns:a16="http://schemas.microsoft.com/office/drawing/2014/main" id="{6F01E085-682D-40BF-8977-E64584788AD2}"/>
               </a:ext>
             </a:extLst>
           </p:cNvPr>
@@ -6952,7 +6952,7 @@
           <p:cNvPr id="14" name="">
             <a:extLst xmlns:a="http://schemas.openxmlformats.org/drawingml/2006/main">
               <a:ext uri="{FF2B5EF4-FFF2-40B4-BE49-F238E27FC236}">
-                <a16:creationId xmlns:a16="http://schemas.microsoft.com/office/drawing/2014/main" id="{CCCD96D6-C278-47F3-AB16-D5132FE1041A}"/>
+                <a16:creationId xmlns:a16="http://schemas.microsoft.com/office/drawing/2014/main" id="{D0EFC726-C7DE-4ABC-A0C1-749E726751EF}"/>
               </a:ext>
             </a:extLst>
           </p:cNvPr>
@@ -6985,7 +6985,7 @@
           <p:cNvPr id="15" name="">
             <a:extLst xmlns:a="http://schemas.openxmlformats.org/drawingml/2006/main">
               <a:ext uri="{FF2B5EF4-FFF2-40B4-BE49-F238E27FC236}">
-                <a16:creationId xmlns:a16="http://schemas.microsoft.com/office/drawing/2014/main" id="{3F84E7D5-8492-467F-9AAA-2C3208ADB592}"/>
+                <a16:creationId xmlns:a16="http://schemas.microsoft.com/office/drawing/2014/main" id="{EE9A927D-B3CD-4793-B928-9C18CED8F154}"/>
               </a:ext>
             </a:extLst>
           </p:cNvPr>
@@ -7066,7 +7066,7 @@
           <p:cNvPr id="16" name="">
             <a:extLst xmlns:a="http://schemas.openxmlformats.org/drawingml/2006/main">
               <a:ext uri="{FF2B5EF4-FFF2-40B4-BE49-F238E27FC236}">
-                <a16:creationId xmlns:a16="http://schemas.microsoft.com/office/drawing/2014/main" id="{6DA4F18B-3375-4038-9B6E-61A62DFC61D7}"/>
+                <a16:creationId xmlns:a16="http://schemas.microsoft.com/office/drawing/2014/main" id="{F9E422DB-BC61-47A5-8395-116E0F36D6C0}"/>
               </a:ext>
             </a:extLst>
           </p:cNvPr>
@@ -7093,7 +7093,7 @@
           <p:cNvPr id="17" name="">
             <a:extLst xmlns:a="http://schemas.openxmlformats.org/drawingml/2006/main">
               <a:ext uri="{FF2B5EF4-FFF2-40B4-BE49-F238E27FC236}">
-                <a16:creationId xmlns:a16="http://schemas.microsoft.com/office/drawing/2014/main" id="{3A16AD24-4D57-4800-876D-1A843CD58F21}"/>
+                <a16:creationId xmlns:a16="http://schemas.microsoft.com/office/drawing/2014/main" id="{20DD6F93-239A-483D-BDDD-2D51C4BBEA4A}"/>
               </a:ext>
             </a:extLst>
           </p:cNvPr>
@@ -7151,7 +7151,7 @@
           <p:cNvPr id="18" name="">
             <a:extLst xmlns:a="http://schemas.openxmlformats.org/drawingml/2006/main">
               <a:ext uri="{FF2B5EF4-FFF2-40B4-BE49-F238E27FC236}">
-                <a16:creationId xmlns:a16="http://schemas.microsoft.com/office/drawing/2014/main" id="{F1475058-777E-4DDE-B7B6-0E5A20F29DDF}"/>
+                <a16:creationId xmlns:a16="http://schemas.microsoft.com/office/drawing/2014/main" id="{364FE05A-F5A2-4789-93E6-ED60E325BD71}"/>
               </a:ext>
             </a:extLst>
           </p:cNvPr>
@@ -7209,7 +7209,7 @@
           <p:cNvPr id="19" name="">
             <a:extLst xmlns:a="http://schemas.openxmlformats.org/drawingml/2006/main">
               <a:ext uri="{FF2B5EF4-FFF2-40B4-BE49-F238E27FC236}">
-                <a16:creationId xmlns:a16="http://schemas.microsoft.com/office/drawing/2014/main" id="{7E43DF9C-AB51-4726-BD2D-080CA0DD67C5}"/>
+                <a16:creationId xmlns:a16="http://schemas.microsoft.com/office/drawing/2014/main" id="{9F5DF451-DF72-4C04-8BF0-2872BBBF0068}"/>
               </a:ext>
             </a:extLst>
           </p:cNvPr>
@@ -7267,7 +7267,7 @@
           <p:cNvPr id="20" name="">
             <a:extLst xmlns:a="http://schemas.openxmlformats.org/drawingml/2006/main">
               <a:ext uri="{FF2B5EF4-FFF2-40B4-BE49-F238E27FC236}">
-                <a16:creationId xmlns:a16="http://schemas.microsoft.com/office/drawing/2014/main" id="{851B334E-8598-495A-932E-E5619856665E}"/>
+                <a16:creationId xmlns:a16="http://schemas.microsoft.com/office/drawing/2014/main" id="{CB310EA1-8040-462D-9272-1D2876EEB40A}"/>
               </a:ext>
             </a:extLst>
           </p:cNvPr>
@@ -7315,7 +7315,7 @@
                 <a:ea typeface="Consolas"/>
                 <a:cs typeface="Consolas"/>
               </a:rPr>
-              <a:t>Run 33311037079</a:t>
+              <a:t>Run 33314875879</a:t>
             </a:r>
           </a:p>
         </p:txBody>
@@ -7325,7 +7325,7 @@
           <p:cNvPr id="21" name="">
             <a:extLst xmlns:a="http://schemas.openxmlformats.org/drawingml/2006/main">
               <a:ext uri="{FF2B5EF4-FFF2-40B4-BE49-F238E27FC236}">
-                <a16:creationId xmlns:a16="http://schemas.microsoft.com/office/drawing/2014/main" id="{B884E119-97C1-4A67-9770-D86C44279A2C}"/>
+                <a16:creationId xmlns:a16="http://schemas.microsoft.com/office/drawing/2014/main" id="{BEB221F2-D225-4D31-80F0-D280E7CD116B}"/>
               </a:ext>
             </a:extLst>
           </p:cNvPr>
@@ -7406,7 +7406,7 @@
           <p:cNvPr id="22" name="">
             <a:extLst xmlns:a="http://schemas.openxmlformats.org/drawingml/2006/main">
               <a:ext uri="{FF2B5EF4-FFF2-40B4-BE49-F238E27FC236}">
-                <a16:creationId xmlns:a16="http://schemas.microsoft.com/office/drawing/2014/main" id="{1FB54F01-7274-4386-A2C1-D5FECDA4FFEA}"/>
+                <a16:creationId xmlns:a16="http://schemas.microsoft.com/office/drawing/2014/main" id="{C2D31C39-C010-4C5D-8FA2-C6B4B770F24F}"/>
               </a:ext>
             </a:extLst>
           </p:cNvPr>
@@ -7487,7 +7487,7 @@
           <p:cNvPr id="23" name="">
             <a:extLst xmlns:a="http://schemas.openxmlformats.org/drawingml/2006/main">
               <a:ext uri="{FF2B5EF4-FFF2-40B4-BE49-F238E27FC236}">
-                <a16:creationId xmlns:a16="http://schemas.microsoft.com/office/drawing/2014/main" id="{E409A9B4-BE73-4388-B4F9-ACEB25DE36A2}"/>
+                <a16:creationId xmlns:a16="http://schemas.microsoft.com/office/drawing/2014/main" id="{820AA345-0DE9-4AD6-8732-650D09CDB082}"/>
               </a:ext>
             </a:extLst>
           </p:cNvPr>
@@ -7543,7 +7543,7 @@
     </p:spTree>
     <p:extLst>
       <p:ext uri="{BB962C8B-B14F-4D97-AF65-F5344CB8AC3E}">
-        <p14:creationId xmlns:p14="http://schemas.microsoft.com/office/powerpoint/2010/main" val="1369003249"/>
+        <p14:creationId xmlns:p14="http://schemas.microsoft.com/office/powerpoint/2010/main" val="788239077"/>
       </p:ext>
     </p:extLst>
   </p:cSld>

--- a/docs/Software-Agent-Interview-Deck.pptx
+++ b/docs/Software-Agent-Interview-Deck.pptx
@@ -2,17 +2,17 @@
 <file path=ppt/presentation.xml><?xml version="1.0" encoding="utf-8"?>
 <p:presentation xmlns:p="http://schemas.openxmlformats.org/presentationml/2006/main">
   <p:sldMasterIdLst>
-    <p:sldMasterId xmlns:r="http://schemas.openxmlformats.org/officeDocument/2006/relationships" id="2147483648" r:id="R3430c4c1217b4713"/>
+    <p:sldMasterId xmlns:r="http://schemas.openxmlformats.org/officeDocument/2006/relationships" id="2147483648" r:id="R71da8c5b0c8249bd"/>
   </p:sldMasterIdLst>
   <p:notesMasterIdLst>
-    <p:notesMasterId xmlns:r="http://schemas.openxmlformats.org/officeDocument/2006/relationships" r:id="R353c2d8643384d0d"/>
+    <p:notesMasterId xmlns:r="http://schemas.openxmlformats.org/officeDocument/2006/relationships" r:id="Rb92fe46859ef4635"/>
   </p:notesMasterIdLst>
   <p:sldIdLst>
-    <p:sldId xmlns:r="http://schemas.openxmlformats.org/officeDocument/2006/relationships" id="256" r:id="R3f92d30697c84a01"/>
-    <p:sldId xmlns:r="http://schemas.openxmlformats.org/officeDocument/2006/relationships" id="257" r:id="R402fddb2281c4d61"/>
-    <p:sldId xmlns:r="http://schemas.openxmlformats.org/officeDocument/2006/relationships" id="258" r:id="Rae141cd615c6443e"/>
-    <p:sldId xmlns:r="http://schemas.openxmlformats.org/officeDocument/2006/relationships" id="259" r:id="R6bb192fee711433c"/>
-    <p:sldId xmlns:r="http://schemas.openxmlformats.org/officeDocument/2006/relationships" id="260" r:id="R3ee2142ac4d14110"/>
+    <p:sldId xmlns:r="http://schemas.openxmlformats.org/officeDocument/2006/relationships" id="256" r:id="Re541306fb0e840c7"/>
+    <p:sldId xmlns:r="http://schemas.openxmlformats.org/officeDocument/2006/relationships" id="257" r:id="Rc9102bfdb83249e4"/>
+    <p:sldId xmlns:r="http://schemas.openxmlformats.org/officeDocument/2006/relationships" id="258" r:id="Rf9b14ff73c114123"/>
+    <p:sldId xmlns:r="http://schemas.openxmlformats.org/officeDocument/2006/relationships" id="259" r:id="R4ce22cd5be1c4a76"/>
+    <p:sldId xmlns:r="http://schemas.openxmlformats.org/officeDocument/2006/relationships" id="260" r:id="Rc4e4e802a8cf4386"/>
   </p:sldIdLst>
   <p:sldSz cx="12192000" cy="6858000"/>
   <p:notesSz cx="6858000" cy="9144000"/>
@@ -471,7 +471,7 @@
           </a:p>
           <a:p xmlns:a="http://schemas.openxmlformats.org/drawingml/2006/main">
             <a:r>
-              <a:t>- Current CI evidence: https://github.com/Isoldelu/software-engineering-agent/actions/runs/33314875879</a:t>
+              <a:t>- Current CI evidence: https://github.com/Isoldelu/software-engineering-agent/actions/runs/33354020784</a:t>
             </a:r>
           </a:p>
         </p:txBody>
@@ -846,7 +846,7 @@
           </a:p>
           <a:p xmlns:a="http://schemas.openxmlformats.org/drawingml/2006/main">
             <a:r>
-              <a:t>- GitHub Actions Run: https://github.com/Isoldelu/software-engineering-agent/actions/runs/33314875879</a:t>
+              <a:t>- GitHub Actions Run: https://github.com/Isoldelu/software-engineering-agent/actions/runs/33354020784</a:t>
             </a:r>
           </a:p>
           <a:p xmlns:a="http://schemas.openxmlformats.org/drawingml/2006/main">
@@ -929,7 +929,7 @@
   </p:cSld>
   <p:clrMap bg1="lt1" tx1="dk1" bg2="lt2" tx2="dk2" accent1="accent1" accent2="accent2" accent3="accent3" accent4="accent4" accent5="accent5" accent6="accent6" hlink="hlink" folHlink="folHlink"/>
   <p:sldLayoutIdLst>
-    <p:sldLayoutId xmlns:r="http://schemas.openxmlformats.org/officeDocument/2006/relationships" id="2147483649" r:id="R71e29550d58f410b"/>
+    <p:sldLayoutId xmlns:r="http://schemas.openxmlformats.org/officeDocument/2006/relationships" id="2147483649" r:id="Ra5aed6970a5046c8"/>
   </p:sldLayoutIdLst>
   <p:txStyles>
     <p:titleStyle>
@@ -1480,7 +1480,7 @@
           <p:cNvPr id="17" name="">
             <a:extLst xmlns:a="http://schemas.openxmlformats.org/drawingml/2006/main">
               <a:ext uri="{FF2B5EF4-FFF2-40B4-BE49-F238E27FC236}">
-                <a16:creationId xmlns:a16="http://schemas.microsoft.com/office/drawing/2014/main" id="{C9C5A807-45E2-4128-87C7-970F790C071B}"/>
+                <a16:creationId xmlns:a16="http://schemas.microsoft.com/office/drawing/2014/main" id="{5843AA7A-C4E8-44AD-8C80-413B4D8A7B5D}"/>
               </a:ext>
             </a:extLst>
           </p:cNvPr>
@@ -1513,7 +1513,7 @@
           <p:cNvPr id="2" name="">
             <a:extLst xmlns:a="http://schemas.openxmlformats.org/drawingml/2006/main">
               <a:ext uri="{FF2B5EF4-FFF2-40B4-BE49-F238E27FC236}">
-                <a16:creationId xmlns:a16="http://schemas.microsoft.com/office/drawing/2014/main" id="{D81DADDD-DA53-41EA-968A-5FCF3A7DCCB5}"/>
+                <a16:creationId xmlns:a16="http://schemas.microsoft.com/office/drawing/2014/main" id="{F99F33B7-B530-4C24-9EA2-2294E5F4F9EC}"/>
               </a:ext>
             </a:extLst>
           </p:cNvPr>
@@ -1571,7 +1571,7 @@
           <p:cNvPr id="3" name="">
             <a:extLst xmlns:a="http://schemas.openxmlformats.org/drawingml/2006/main">
               <a:ext uri="{FF2B5EF4-FFF2-40B4-BE49-F238E27FC236}">
-                <a16:creationId xmlns:a16="http://schemas.microsoft.com/office/drawing/2014/main" id="{ADFF012D-8136-459D-A7A2-A3ABBC07FB03}"/>
+                <a16:creationId xmlns:a16="http://schemas.microsoft.com/office/drawing/2014/main" id="{605536A0-CB38-4769-8115-538E22754E76}"/>
               </a:ext>
             </a:extLst>
           </p:cNvPr>
@@ -1652,7 +1652,7 @@
           <p:cNvPr id="4" name="">
             <a:extLst xmlns:a="http://schemas.openxmlformats.org/drawingml/2006/main">
               <a:ext uri="{FF2B5EF4-FFF2-40B4-BE49-F238E27FC236}">
-                <a16:creationId xmlns:a16="http://schemas.microsoft.com/office/drawing/2014/main" id="{698A9896-3D1E-4484-B823-62CAE05444BE}"/>
+                <a16:creationId xmlns:a16="http://schemas.microsoft.com/office/drawing/2014/main" id="{542F8C68-E3A6-414F-83DA-D2CB2406B6B5}"/>
               </a:ext>
             </a:extLst>
           </p:cNvPr>
@@ -1710,7 +1710,7 @@
           <p:cNvPr id="5" name="">
             <a:extLst xmlns:a="http://schemas.openxmlformats.org/drawingml/2006/main">
               <a:ext uri="{FF2B5EF4-FFF2-40B4-BE49-F238E27FC236}">
-                <a16:creationId xmlns:a16="http://schemas.microsoft.com/office/drawing/2014/main" id="{DBEEF0B8-86CE-496B-A392-968F2AE37272}"/>
+                <a16:creationId xmlns:a16="http://schemas.microsoft.com/office/drawing/2014/main" id="{59376669-2C59-4782-9F25-9729CD7FA79F}"/>
               </a:ext>
             </a:extLst>
           </p:cNvPr>
@@ -1743,7 +1743,7 @@
           <p:cNvPr id="6" name="">
             <a:extLst xmlns:a="http://schemas.openxmlformats.org/drawingml/2006/main">
               <a:ext uri="{FF2B5EF4-FFF2-40B4-BE49-F238E27FC236}">
-                <a16:creationId xmlns:a16="http://schemas.microsoft.com/office/drawing/2014/main" id="{D8F6552B-C6F7-4154-BAB6-80489846275F}"/>
+                <a16:creationId xmlns:a16="http://schemas.microsoft.com/office/drawing/2014/main" id="{AF927E2D-BB6D-4FB8-801E-A0044649F24F}"/>
               </a:ext>
             </a:extLst>
           </p:cNvPr>
@@ -1801,7 +1801,7 @@
           <p:cNvPr id="7" name="">
             <a:extLst xmlns:a="http://schemas.openxmlformats.org/drawingml/2006/main">
               <a:ext uri="{FF2B5EF4-FFF2-40B4-BE49-F238E27FC236}">
-                <a16:creationId xmlns:a16="http://schemas.microsoft.com/office/drawing/2014/main" id="{ED1D7796-BC60-4FAB-BEDF-7FBCEA34B38E}"/>
+                <a16:creationId xmlns:a16="http://schemas.microsoft.com/office/drawing/2014/main" id="{60FC1B95-3B87-48C5-98D6-4256AF8A12CE}"/>
               </a:ext>
             </a:extLst>
           </p:cNvPr>
@@ -1951,7 +1951,7 @@
           <p:cNvPr id="8" name="">
             <a:extLst xmlns:a="http://schemas.openxmlformats.org/drawingml/2006/main">
               <a:ext uri="{FF2B5EF4-FFF2-40B4-BE49-F238E27FC236}">
-                <a16:creationId xmlns:a16="http://schemas.microsoft.com/office/drawing/2014/main" id="{C238FA0F-A3F4-4136-8C13-A28AAA2E54BF}"/>
+                <a16:creationId xmlns:a16="http://schemas.microsoft.com/office/drawing/2014/main" id="{8166441C-FED5-4E91-AD54-335B4D13EEF8}"/>
               </a:ext>
             </a:extLst>
           </p:cNvPr>
@@ -1984,7 +1984,7 @@
           <p:cNvPr id="9" name="">
             <a:extLst xmlns:a="http://schemas.openxmlformats.org/drawingml/2006/main">
               <a:ext uri="{FF2B5EF4-FFF2-40B4-BE49-F238E27FC236}">
-                <a16:creationId xmlns:a16="http://schemas.microsoft.com/office/drawing/2014/main" id="{28BE40BC-9238-4113-A39F-3F4A1D34B218}"/>
+                <a16:creationId xmlns:a16="http://schemas.microsoft.com/office/drawing/2014/main" id="{60644898-68E0-4F47-BCDD-CFC89821CA8E}"/>
               </a:ext>
             </a:extLst>
           </p:cNvPr>
@@ -2032,7 +2032,7 @@
                 <a:ea typeface="Microsoft YaHei"/>
                 <a:cs typeface="Microsoft YaHei"/>
               </a:rPr>
-              <a:t>138</a:t>
+              <a:t>150</a:t>
             </a:r>
           </a:p>
         </p:txBody>
@@ -2042,7 +2042,7 @@
           <p:cNvPr id="10" name="">
             <a:extLst xmlns:a="http://schemas.openxmlformats.org/drawingml/2006/main">
               <a:ext uri="{FF2B5EF4-FFF2-40B4-BE49-F238E27FC236}">
-                <a16:creationId xmlns:a16="http://schemas.microsoft.com/office/drawing/2014/main" id="{24CD8346-42C1-47C9-A48E-A864D7A007A0}"/>
+                <a16:creationId xmlns:a16="http://schemas.microsoft.com/office/drawing/2014/main" id="{DB2C126C-5E82-4BA8-8341-214E4950AEFD}"/>
               </a:ext>
             </a:extLst>
           </p:cNvPr>
@@ -2100,7 +2100,7 @@
           <p:cNvPr id="11" name="">
             <a:extLst xmlns:a="http://schemas.openxmlformats.org/drawingml/2006/main">
               <a:ext uri="{FF2B5EF4-FFF2-40B4-BE49-F238E27FC236}">
-                <a16:creationId xmlns:a16="http://schemas.microsoft.com/office/drawing/2014/main" id="{13F8D317-82C6-4DA9-BB46-A0A8C05450D1}"/>
+                <a16:creationId xmlns:a16="http://schemas.microsoft.com/office/drawing/2014/main" id="{C8E685AE-5AE2-4F6F-958B-49F8F167B4EF}"/>
               </a:ext>
             </a:extLst>
           </p:cNvPr>
@@ -2158,7 +2158,7 @@
           <p:cNvPr id="12" name="">
             <a:extLst xmlns:a="http://schemas.openxmlformats.org/drawingml/2006/main">
               <a:ext uri="{FF2B5EF4-FFF2-40B4-BE49-F238E27FC236}">
-                <a16:creationId xmlns:a16="http://schemas.microsoft.com/office/drawing/2014/main" id="{3C229F30-2A7D-4262-814F-BABB5238FBCD}"/>
+                <a16:creationId xmlns:a16="http://schemas.microsoft.com/office/drawing/2014/main" id="{538C03FB-17E3-435F-88AF-E95F40B8B7DF}"/>
               </a:ext>
             </a:extLst>
           </p:cNvPr>
@@ -2216,7 +2216,7 @@
           <p:cNvPr id="13" name="">
             <a:extLst xmlns:a="http://schemas.openxmlformats.org/drawingml/2006/main">
               <a:ext uri="{FF2B5EF4-FFF2-40B4-BE49-F238E27FC236}">
-                <a16:creationId xmlns:a16="http://schemas.microsoft.com/office/drawing/2014/main" id="{EF25EB89-E5B9-4E16-8D78-889CE0AE641D}"/>
+                <a16:creationId xmlns:a16="http://schemas.microsoft.com/office/drawing/2014/main" id="{0C83CF3E-16F1-4F5F-B438-D0BD3292D1C7}"/>
               </a:ext>
             </a:extLst>
           </p:cNvPr>
@@ -2274,7 +2274,7 @@
           <p:cNvPr id="14" name="">
             <a:extLst xmlns:a="http://schemas.openxmlformats.org/drawingml/2006/main">
               <a:ext uri="{FF2B5EF4-FFF2-40B4-BE49-F238E27FC236}">
-                <a16:creationId xmlns:a16="http://schemas.microsoft.com/office/drawing/2014/main" id="{5E35DC94-6891-4BC0-AD3D-C415FC487D43}"/>
+                <a16:creationId xmlns:a16="http://schemas.microsoft.com/office/drawing/2014/main" id="{CFC92971-993E-4CB4-B92B-821B5713039D}"/>
               </a:ext>
             </a:extLst>
           </p:cNvPr>
@@ -2332,7 +2332,7 @@
           <p:cNvPr id="15" name="">
             <a:extLst xmlns:a="http://schemas.openxmlformats.org/drawingml/2006/main">
               <a:ext uri="{FF2B5EF4-FFF2-40B4-BE49-F238E27FC236}">
-                <a16:creationId xmlns:a16="http://schemas.microsoft.com/office/drawing/2014/main" id="{51B73CE4-408B-4570-90CB-BB66D2BA8431}"/>
+                <a16:creationId xmlns:a16="http://schemas.microsoft.com/office/drawing/2014/main" id="{39121691-488C-411D-A81B-6F48BD1C4594}"/>
               </a:ext>
             </a:extLst>
           </p:cNvPr>
@@ -2390,7 +2390,7 @@
           <p:cNvPr id="16" name="">
             <a:extLst xmlns:a="http://schemas.openxmlformats.org/drawingml/2006/main">
               <a:ext uri="{FF2B5EF4-FFF2-40B4-BE49-F238E27FC236}">
-                <a16:creationId xmlns:a16="http://schemas.microsoft.com/office/drawing/2014/main" id="{4313E844-F464-4016-9B85-D3F4042F7D1D}"/>
+                <a16:creationId xmlns:a16="http://schemas.microsoft.com/office/drawing/2014/main" id="{A4857B25-246C-4587-9C80-0849507D81C6}"/>
               </a:ext>
             </a:extLst>
           </p:cNvPr>
@@ -2446,7 +2446,7 @@
     </p:spTree>
     <p:extLst>
       <p:ext uri="{BB962C8B-B14F-4D97-AF65-F5344CB8AC3E}">
-        <p14:creationId xmlns:p14="http://schemas.microsoft.com/office/powerpoint/2010/main" val="1140183188"/>
+        <p14:creationId xmlns:p14="http://schemas.microsoft.com/office/powerpoint/2010/main" val="688239225"/>
       </p:ext>
     </p:extLst>
   </p:cSld>
@@ -2477,7 +2477,7 @@
           <p:cNvPr id="35" name="">
             <a:extLst xmlns:a="http://schemas.openxmlformats.org/drawingml/2006/main">
               <a:ext uri="{FF2B5EF4-FFF2-40B4-BE49-F238E27FC236}">
-                <a16:creationId xmlns:a16="http://schemas.microsoft.com/office/drawing/2014/main" id="{FE31A972-7EBB-48BA-B889-0901A9D1F518}"/>
+                <a16:creationId xmlns:a16="http://schemas.microsoft.com/office/drawing/2014/main" id="{DDB7E21E-AA61-4291-AD89-5D68C450A9A1}"/>
               </a:ext>
             </a:extLst>
           </p:cNvPr>
@@ -2535,7 +2535,7 @@
           <p:cNvPr id="2" name="">
             <a:extLst xmlns:a="http://schemas.openxmlformats.org/drawingml/2006/main">
               <a:ext uri="{FF2B5EF4-FFF2-40B4-BE49-F238E27FC236}">
-                <a16:creationId xmlns:a16="http://schemas.microsoft.com/office/drawing/2014/main" id="{533F8FD6-D82E-4A24-AF97-A261B81ACB06}"/>
+                <a16:creationId xmlns:a16="http://schemas.microsoft.com/office/drawing/2014/main" id="{DA18D2B1-AD82-47D3-A8FC-E45DD55E4429}"/>
               </a:ext>
             </a:extLst>
           </p:cNvPr>
@@ -2568,7 +2568,7 @@
           <p:cNvPr id="3" name="">
             <a:extLst xmlns:a="http://schemas.openxmlformats.org/drawingml/2006/main">
               <a:ext uri="{FF2B5EF4-FFF2-40B4-BE49-F238E27FC236}">
-                <a16:creationId xmlns:a16="http://schemas.microsoft.com/office/drawing/2014/main" id="{FDD48B7C-46B4-4289-8521-899F5271E6D5}"/>
+                <a16:creationId xmlns:a16="http://schemas.microsoft.com/office/drawing/2014/main" id="{142C4C03-B96B-48F1-8400-4ABE9588AE7E}"/>
               </a:ext>
             </a:extLst>
           </p:cNvPr>
@@ -2626,7 +2626,7 @@
           <p:cNvPr id="4" name="">
             <a:extLst xmlns:a="http://schemas.openxmlformats.org/drawingml/2006/main">
               <a:ext uri="{FF2B5EF4-FFF2-40B4-BE49-F238E27FC236}">
-                <a16:creationId xmlns:a16="http://schemas.microsoft.com/office/drawing/2014/main" id="{4273B345-ED92-404D-B5CC-8F3785FFA8F2}"/>
+                <a16:creationId xmlns:a16="http://schemas.microsoft.com/office/drawing/2014/main" id="{12C6DC45-A8AC-423B-AA68-C515F3030DF7}"/>
               </a:ext>
             </a:extLst>
           </p:cNvPr>
@@ -2684,7 +2684,7 @@
           <p:cNvPr id="5" name="">
             <a:extLst xmlns:a="http://schemas.openxmlformats.org/drawingml/2006/main">
               <a:ext uri="{FF2B5EF4-FFF2-40B4-BE49-F238E27FC236}">
-                <a16:creationId xmlns:a16="http://schemas.microsoft.com/office/drawing/2014/main" id="{8AB0EDE2-EC95-4D47-8894-071BA28A11A5}"/>
+                <a16:creationId xmlns:a16="http://schemas.microsoft.com/office/drawing/2014/main" id="{CD06B7CB-6260-4EFD-B87E-E65AA7BCD46D}"/>
               </a:ext>
             </a:extLst>
           </p:cNvPr>
@@ -2742,7 +2742,7 @@
           <p:cNvPr id="6" name="">
             <a:extLst xmlns:a="http://schemas.openxmlformats.org/drawingml/2006/main">
               <a:ext uri="{FF2B5EF4-FFF2-40B4-BE49-F238E27FC236}">
-                <a16:creationId xmlns:a16="http://schemas.microsoft.com/office/drawing/2014/main" id="{1D7B4033-34F1-42B7-B994-CEA75807896F}"/>
+                <a16:creationId xmlns:a16="http://schemas.microsoft.com/office/drawing/2014/main" id="{1BE3BC0B-6FBD-407C-9E7D-F165C8182F73}"/>
               </a:ext>
             </a:extLst>
           </p:cNvPr>
@@ -2800,7 +2800,7 @@
           <p:cNvPr id="7" name="">
             <a:extLst xmlns:a="http://schemas.openxmlformats.org/drawingml/2006/main">
               <a:ext uri="{FF2B5EF4-FFF2-40B4-BE49-F238E27FC236}">
-                <a16:creationId xmlns:a16="http://schemas.microsoft.com/office/drawing/2014/main" id="{604A0073-96EF-45B7-9837-9098328BEA47}"/>
+                <a16:creationId xmlns:a16="http://schemas.microsoft.com/office/drawing/2014/main" id="{6FCB67A1-B820-44C4-BF15-341A6B4F0A35}"/>
               </a:ext>
             </a:extLst>
           </p:cNvPr>
@@ -2858,7 +2858,7 @@
           <p:cNvPr id="8" name="">
             <a:extLst xmlns:a="http://schemas.openxmlformats.org/drawingml/2006/main">
               <a:ext uri="{FF2B5EF4-FFF2-40B4-BE49-F238E27FC236}">
-                <a16:creationId xmlns:a16="http://schemas.microsoft.com/office/drawing/2014/main" id="{30D9DD18-5DC8-48D5-BA87-D8CBBC9BE4DE}"/>
+                <a16:creationId xmlns:a16="http://schemas.microsoft.com/office/drawing/2014/main" id="{7E6012ED-42FB-4991-858C-2EEB13E58140}"/>
               </a:ext>
             </a:extLst>
           </p:cNvPr>
@@ -2891,7 +2891,7 @@
           <p:cNvPr id="9" name="">
             <a:extLst xmlns:a="http://schemas.openxmlformats.org/drawingml/2006/main">
               <a:ext uri="{FF2B5EF4-FFF2-40B4-BE49-F238E27FC236}">
-                <a16:creationId xmlns:a16="http://schemas.microsoft.com/office/drawing/2014/main" id="{1FA68C97-6CB2-458E-819F-CE286043CFE4}"/>
+                <a16:creationId xmlns:a16="http://schemas.microsoft.com/office/drawing/2014/main" id="{2878BABD-8E6E-416E-80E3-6DBA9D6BDB87}"/>
               </a:ext>
             </a:extLst>
           </p:cNvPr>
@@ -2949,7 +2949,7 @@
           <p:cNvPr id="10" name="">
             <a:extLst xmlns:a="http://schemas.openxmlformats.org/drawingml/2006/main">
               <a:ext uri="{FF2B5EF4-FFF2-40B4-BE49-F238E27FC236}">
-                <a16:creationId xmlns:a16="http://schemas.microsoft.com/office/drawing/2014/main" id="{9B5E6051-A485-41C7-8C95-4965D763BB51}"/>
+                <a16:creationId xmlns:a16="http://schemas.microsoft.com/office/drawing/2014/main" id="{DF5746FE-389A-462C-A8FE-2725716E6A96}"/>
               </a:ext>
             </a:extLst>
           </p:cNvPr>
@@ -3007,7 +3007,7 @@
           <p:cNvPr id="11" name="">
             <a:extLst xmlns:a="http://schemas.openxmlformats.org/drawingml/2006/main">
               <a:ext uri="{FF2B5EF4-FFF2-40B4-BE49-F238E27FC236}">
-                <a16:creationId xmlns:a16="http://schemas.microsoft.com/office/drawing/2014/main" id="{4DFCA482-6718-4B40-9713-977ACC75D4DB}"/>
+                <a16:creationId xmlns:a16="http://schemas.microsoft.com/office/drawing/2014/main" id="{90490ADC-6832-467B-82FC-8E43A8EFD534}"/>
               </a:ext>
             </a:extLst>
           </p:cNvPr>
@@ -3040,7 +3040,7 @@
           <p:cNvPr id="12" name="">
             <a:extLst xmlns:a="http://schemas.openxmlformats.org/drawingml/2006/main">
               <a:ext uri="{FF2B5EF4-FFF2-40B4-BE49-F238E27FC236}">
-                <a16:creationId xmlns:a16="http://schemas.microsoft.com/office/drawing/2014/main" id="{A9A1F909-5AEF-4EA9-B63A-E89997022E2A}"/>
+                <a16:creationId xmlns:a16="http://schemas.microsoft.com/office/drawing/2014/main" id="{A74E546B-56EB-45DC-8963-85DA08B07375}"/>
               </a:ext>
             </a:extLst>
           </p:cNvPr>
@@ -3098,7 +3098,7 @@
           <p:cNvPr id="13" name="">
             <a:extLst xmlns:a="http://schemas.openxmlformats.org/drawingml/2006/main">
               <a:ext uri="{FF2B5EF4-FFF2-40B4-BE49-F238E27FC236}">
-                <a16:creationId xmlns:a16="http://schemas.microsoft.com/office/drawing/2014/main" id="{C4F481A5-3E10-41AB-90DF-1772FA4B4481}"/>
+                <a16:creationId xmlns:a16="http://schemas.microsoft.com/office/drawing/2014/main" id="{9E1722F1-27C9-42BE-ABE9-7249A9A8A5DD}"/>
               </a:ext>
             </a:extLst>
           </p:cNvPr>
@@ -3156,7 +3156,7 @@
           <p:cNvPr id="14" name="">
             <a:extLst xmlns:a="http://schemas.openxmlformats.org/drawingml/2006/main">
               <a:ext uri="{FF2B5EF4-FFF2-40B4-BE49-F238E27FC236}">
-                <a16:creationId xmlns:a16="http://schemas.microsoft.com/office/drawing/2014/main" id="{B7982D99-7699-4ACD-94FE-83BBF01D4781}"/>
+                <a16:creationId xmlns:a16="http://schemas.microsoft.com/office/drawing/2014/main" id="{3160475A-EC11-44F1-8502-7158E5CF018E}"/>
               </a:ext>
             </a:extLst>
           </p:cNvPr>
@@ -3189,7 +3189,7 @@
           <p:cNvPr id="15" name="">
             <a:extLst xmlns:a="http://schemas.openxmlformats.org/drawingml/2006/main">
               <a:ext uri="{FF2B5EF4-FFF2-40B4-BE49-F238E27FC236}">
-                <a16:creationId xmlns:a16="http://schemas.microsoft.com/office/drawing/2014/main" id="{A38991BF-8A36-4FCE-9E01-F4338D4FFF70}"/>
+                <a16:creationId xmlns:a16="http://schemas.microsoft.com/office/drawing/2014/main" id="{9CE463A3-A34E-4E4D-B54D-1622490DD0DD}"/>
               </a:ext>
             </a:extLst>
           </p:cNvPr>
@@ -3247,7 +3247,7 @@
           <p:cNvPr id="16" name="">
             <a:extLst xmlns:a="http://schemas.openxmlformats.org/drawingml/2006/main">
               <a:ext uri="{FF2B5EF4-FFF2-40B4-BE49-F238E27FC236}">
-                <a16:creationId xmlns:a16="http://schemas.microsoft.com/office/drawing/2014/main" id="{D02C6A47-A5EC-4E03-B2AA-B85280F8B95A}"/>
+                <a16:creationId xmlns:a16="http://schemas.microsoft.com/office/drawing/2014/main" id="{64195379-A5EB-4338-AF0F-8F7A127F8228}"/>
               </a:ext>
             </a:extLst>
           </p:cNvPr>
@@ -3305,7 +3305,7 @@
           <p:cNvPr id="17" name="">
             <a:extLst xmlns:a="http://schemas.openxmlformats.org/drawingml/2006/main">
               <a:ext uri="{FF2B5EF4-FFF2-40B4-BE49-F238E27FC236}">
-                <a16:creationId xmlns:a16="http://schemas.microsoft.com/office/drawing/2014/main" id="{1D9D4A6C-527E-4021-84A1-D526734B11E2}"/>
+                <a16:creationId xmlns:a16="http://schemas.microsoft.com/office/drawing/2014/main" id="{ED5E436B-867C-4D5D-947A-9BE37FD987D4}"/>
               </a:ext>
             </a:extLst>
           </p:cNvPr>
@@ -3338,7 +3338,7 @@
           <p:cNvPr id="18" name="">
             <a:extLst xmlns:a="http://schemas.openxmlformats.org/drawingml/2006/main">
               <a:ext uri="{FF2B5EF4-FFF2-40B4-BE49-F238E27FC236}">
-                <a16:creationId xmlns:a16="http://schemas.microsoft.com/office/drawing/2014/main" id="{106A52AB-C001-4B4E-A219-B4661C55D094}"/>
+                <a16:creationId xmlns:a16="http://schemas.microsoft.com/office/drawing/2014/main" id="{6B69583E-D3A9-45B5-9F9A-7CB191DA8242}"/>
               </a:ext>
             </a:extLst>
           </p:cNvPr>
@@ -3396,7 +3396,7 @@
           <p:cNvPr id="19" name="">
             <a:extLst xmlns:a="http://schemas.openxmlformats.org/drawingml/2006/main">
               <a:ext uri="{FF2B5EF4-FFF2-40B4-BE49-F238E27FC236}">
-                <a16:creationId xmlns:a16="http://schemas.microsoft.com/office/drawing/2014/main" id="{1D9A2901-5103-4FE9-A805-9033070BED13}"/>
+                <a16:creationId xmlns:a16="http://schemas.microsoft.com/office/drawing/2014/main" id="{DADF3D19-5A66-4259-BD29-4F58C895A613}"/>
               </a:ext>
             </a:extLst>
           </p:cNvPr>
@@ -3454,7 +3454,7 @@
           <p:cNvPr id="20" name="">
             <a:extLst xmlns:a="http://schemas.openxmlformats.org/drawingml/2006/main">
               <a:ext uri="{FF2B5EF4-FFF2-40B4-BE49-F238E27FC236}">
-                <a16:creationId xmlns:a16="http://schemas.microsoft.com/office/drawing/2014/main" id="{AE9741AD-AE56-4882-8929-1D01948F1120}"/>
+                <a16:creationId xmlns:a16="http://schemas.microsoft.com/office/drawing/2014/main" id="{E95844D5-9AF8-460A-A321-F7F34AF4AB8C}"/>
               </a:ext>
             </a:extLst>
           </p:cNvPr>
@@ -3487,7 +3487,7 @@
           <p:cNvPr id="21" name="">
             <a:extLst xmlns:a="http://schemas.openxmlformats.org/drawingml/2006/main">
               <a:ext uri="{FF2B5EF4-FFF2-40B4-BE49-F238E27FC236}">
-                <a16:creationId xmlns:a16="http://schemas.microsoft.com/office/drawing/2014/main" id="{8D3A7F12-5C9D-4C38-9422-55EB5C216DD8}"/>
+                <a16:creationId xmlns:a16="http://schemas.microsoft.com/office/drawing/2014/main" id="{6B976874-5D44-42C3-A9E3-178268568D9C}"/>
               </a:ext>
             </a:extLst>
           </p:cNvPr>
@@ -3545,7 +3545,7 @@
           <p:cNvPr id="22" name="">
             <a:extLst xmlns:a="http://schemas.openxmlformats.org/drawingml/2006/main">
               <a:ext uri="{FF2B5EF4-FFF2-40B4-BE49-F238E27FC236}">
-                <a16:creationId xmlns:a16="http://schemas.microsoft.com/office/drawing/2014/main" id="{8F325C0D-9B0F-432A-9C49-EA40D2BADF3F}"/>
+                <a16:creationId xmlns:a16="http://schemas.microsoft.com/office/drawing/2014/main" id="{B4EE49CB-C96C-4C68-91D3-148FE84BD608}"/>
               </a:ext>
             </a:extLst>
           </p:cNvPr>
@@ -3603,7 +3603,7 @@
           <p:cNvPr id="23" name="">
             <a:extLst xmlns:a="http://schemas.openxmlformats.org/drawingml/2006/main">
               <a:ext uri="{FF2B5EF4-FFF2-40B4-BE49-F238E27FC236}">
-                <a16:creationId xmlns:a16="http://schemas.microsoft.com/office/drawing/2014/main" id="{05CD4EFE-4255-4494-8F62-C9EB04414939}"/>
+                <a16:creationId xmlns:a16="http://schemas.microsoft.com/office/drawing/2014/main" id="{531AB121-BC61-4E21-BB98-4CD2F5E8E2B4}"/>
               </a:ext>
             </a:extLst>
           </p:cNvPr>
@@ -3661,7 +3661,7 @@
           <p:cNvPr id="24" name="">
             <a:extLst xmlns:a="http://schemas.openxmlformats.org/drawingml/2006/main">
               <a:ext uri="{FF2B5EF4-FFF2-40B4-BE49-F238E27FC236}">
-                <a16:creationId xmlns:a16="http://schemas.microsoft.com/office/drawing/2014/main" id="{FF272A3C-1EA6-4F40-96BE-5AD10D2A6F55}"/>
+                <a16:creationId xmlns:a16="http://schemas.microsoft.com/office/drawing/2014/main" id="{526CEB1E-4B83-48A8-9CC2-77AC61FA22B0}"/>
               </a:ext>
             </a:extLst>
           </p:cNvPr>
@@ -3694,7 +3694,7 @@
           <p:cNvPr id="25" name="">
             <a:extLst xmlns:a="http://schemas.openxmlformats.org/drawingml/2006/main">
               <a:ext uri="{FF2B5EF4-FFF2-40B4-BE49-F238E27FC236}">
-                <a16:creationId xmlns:a16="http://schemas.microsoft.com/office/drawing/2014/main" id="{5833223A-8A6A-489B-8AED-B6F35BCC1824}"/>
+                <a16:creationId xmlns:a16="http://schemas.microsoft.com/office/drawing/2014/main" id="{0A82C6DE-A9BD-4707-BE11-991B060E8A72}"/>
               </a:ext>
             </a:extLst>
           </p:cNvPr>
@@ -3727,7 +3727,7 @@
           <p:cNvPr id="26" name="">
             <a:extLst xmlns:a="http://schemas.openxmlformats.org/drawingml/2006/main">
               <a:ext uri="{FF2B5EF4-FFF2-40B4-BE49-F238E27FC236}">
-                <a16:creationId xmlns:a16="http://schemas.microsoft.com/office/drawing/2014/main" id="{E473146B-2816-4D93-AFA6-2B795FCB75C9}"/>
+                <a16:creationId xmlns:a16="http://schemas.microsoft.com/office/drawing/2014/main" id="{61255090-6597-4BE4-8210-43C4E270A644}"/>
               </a:ext>
             </a:extLst>
           </p:cNvPr>
@@ -3785,7 +3785,7 @@
           <p:cNvPr id="27" name="">
             <a:extLst xmlns:a="http://schemas.openxmlformats.org/drawingml/2006/main">
               <a:ext uri="{FF2B5EF4-FFF2-40B4-BE49-F238E27FC236}">
-                <a16:creationId xmlns:a16="http://schemas.microsoft.com/office/drawing/2014/main" id="{AF1EECB6-5268-4244-9747-A16C2B4188E6}"/>
+                <a16:creationId xmlns:a16="http://schemas.microsoft.com/office/drawing/2014/main" id="{D8F52740-CE49-4B7A-9D1B-ED7E925421E3}"/>
               </a:ext>
             </a:extLst>
           </p:cNvPr>
@@ -3866,7 +3866,7 @@
           <p:cNvPr id="28" name="">
             <a:extLst xmlns:a="http://schemas.openxmlformats.org/drawingml/2006/main">
               <a:ext uri="{FF2B5EF4-FFF2-40B4-BE49-F238E27FC236}">
-                <a16:creationId xmlns:a16="http://schemas.microsoft.com/office/drawing/2014/main" id="{1C630BEF-4428-4555-BD6F-95A763007015}"/>
+                <a16:creationId xmlns:a16="http://schemas.microsoft.com/office/drawing/2014/main" id="{1D6535CC-23F2-48A6-8EA3-C1B35E03B2F2}"/>
               </a:ext>
             </a:extLst>
           </p:cNvPr>
@@ -3899,7 +3899,7 @@
           <p:cNvPr id="29" name="">
             <a:extLst xmlns:a="http://schemas.openxmlformats.org/drawingml/2006/main">
               <a:ext uri="{FF2B5EF4-FFF2-40B4-BE49-F238E27FC236}">
-                <a16:creationId xmlns:a16="http://schemas.microsoft.com/office/drawing/2014/main" id="{A3386415-B47D-4098-8EDA-3954AEB19D34}"/>
+                <a16:creationId xmlns:a16="http://schemas.microsoft.com/office/drawing/2014/main" id="{192AE9B4-F35B-4D5C-A092-D2627D0558A3}"/>
               </a:ext>
             </a:extLst>
           </p:cNvPr>
@@ -3957,7 +3957,7 @@
           <p:cNvPr id="30" name="">
             <a:extLst xmlns:a="http://schemas.openxmlformats.org/drawingml/2006/main">
               <a:ext uri="{FF2B5EF4-FFF2-40B4-BE49-F238E27FC236}">
-                <a16:creationId xmlns:a16="http://schemas.microsoft.com/office/drawing/2014/main" id="{C7A1A70E-C062-44AE-BC28-2C15DA8AB69F}"/>
+                <a16:creationId xmlns:a16="http://schemas.microsoft.com/office/drawing/2014/main" id="{925663DB-3948-4600-A12A-F61ACBE39497}"/>
               </a:ext>
             </a:extLst>
           </p:cNvPr>
@@ -4038,7 +4038,7 @@
           <p:cNvPr id="31" name="">
             <a:extLst xmlns:a="http://schemas.openxmlformats.org/drawingml/2006/main">
               <a:ext uri="{FF2B5EF4-FFF2-40B4-BE49-F238E27FC236}">
-                <a16:creationId xmlns:a16="http://schemas.microsoft.com/office/drawing/2014/main" id="{CE8BB824-7751-4FCE-9FB7-125B47CB654D}"/>
+                <a16:creationId xmlns:a16="http://schemas.microsoft.com/office/drawing/2014/main" id="{2D29BD14-F80B-4023-AC54-3654F7CCA379}"/>
               </a:ext>
             </a:extLst>
           </p:cNvPr>
@@ -4071,7 +4071,7 @@
           <p:cNvPr id="32" name="">
             <a:extLst xmlns:a="http://schemas.openxmlformats.org/drawingml/2006/main">
               <a:ext uri="{FF2B5EF4-FFF2-40B4-BE49-F238E27FC236}">
-                <a16:creationId xmlns:a16="http://schemas.microsoft.com/office/drawing/2014/main" id="{381A72E3-7883-4DC3-859B-835B23C73177}"/>
+                <a16:creationId xmlns:a16="http://schemas.microsoft.com/office/drawing/2014/main" id="{10F0898E-6108-41FC-8CDF-D0D5485792F6}"/>
               </a:ext>
             </a:extLst>
           </p:cNvPr>
@@ -4129,7 +4129,7 @@
           <p:cNvPr id="33" name="">
             <a:extLst xmlns:a="http://schemas.openxmlformats.org/drawingml/2006/main">
               <a:ext uri="{FF2B5EF4-FFF2-40B4-BE49-F238E27FC236}">
-                <a16:creationId xmlns:a16="http://schemas.microsoft.com/office/drawing/2014/main" id="{EA210F45-0035-4313-A308-29FF18B0A487}"/>
+                <a16:creationId xmlns:a16="http://schemas.microsoft.com/office/drawing/2014/main" id="{D7F8395D-CD95-429C-9B01-0CBCD6AD26C8}"/>
               </a:ext>
             </a:extLst>
           </p:cNvPr>
@@ -4210,7 +4210,7 @@
           <p:cNvPr id="34" name="">
             <a:extLst xmlns:a="http://schemas.openxmlformats.org/drawingml/2006/main">
               <a:ext uri="{FF2B5EF4-FFF2-40B4-BE49-F238E27FC236}">
-                <a16:creationId xmlns:a16="http://schemas.microsoft.com/office/drawing/2014/main" id="{948143FA-4226-4601-B198-75D95B0EB38E}"/>
+                <a16:creationId xmlns:a16="http://schemas.microsoft.com/office/drawing/2014/main" id="{B59A583A-0333-48DD-928B-71C8CAA621F5}"/>
               </a:ext>
             </a:extLst>
           </p:cNvPr>
@@ -4266,7 +4266,7 @@
     </p:spTree>
     <p:extLst>
       <p:ext uri="{BB962C8B-B14F-4D97-AF65-F5344CB8AC3E}">
-        <p14:creationId xmlns:p14="http://schemas.microsoft.com/office/powerpoint/2010/main" val="789454669"/>
+        <p14:creationId xmlns:p14="http://schemas.microsoft.com/office/powerpoint/2010/main" val="506377417"/>
       </p:ext>
     </p:extLst>
   </p:cSld>
@@ -4297,7 +4297,7 @@
           <p:cNvPr id="16" name="">
             <a:extLst xmlns:a="http://schemas.openxmlformats.org/drawingml/2006/main">
               <a:ext uri="{FF2B5EF4-FFF2-40B4-BE49-F238E27FC236}">
-                <a16:creationId xmlns:a16="http://schemas.microsoft.com/office/drawing/2014/main" id="{55547BA3-97B8-4865-9B56-E51B852F4F01}"/>
+                <a16:creationId xmlns:a16="http://schemas.microsoft.com/office/drawing/2014/main" id="{1FDB83B9-2903-445D-9211-BECEFF4B4924}"/>
               </a:ext>
             </a:extLst>
           </p:cNvPr>
@@ -4355,7 +4355,7 @@
           <p:cNvPr id="2" name="">
             <a:extLst xmlns:a="http://schemas.openxmlformats.org/drawingml/2006/main">
               <a:ext uri="{FF2B5EF4-FFF2-40B4-BE49-F238E27FC236}">
-                <a16:creationId xmlns:a16="http://schemas.microsoft.com/office/drawing/2014/main" id="{3BD7274B-BFF8-416B-AC23-77C4E45BF17F}"/>
+                <a16:creationId xmlns:a16="http://schemas.microsoft.com/office/drawing/2014/main" id="{460260FD-DC05-46CF-9872-1CD8BD5224D1}"/>
               </a:ext>
             </a:extLst>
           </p:cNvPr>
@@ -4388,7 +4388,7 @@
           <p:cNvPr id="3" name="">
             <a:extLst xmlns:a="http://schemas.openxmlformats.org/drawingml/2006/main">
               <a:ext uri="{FF2B5EF4-FFF2-40B4-BE49-F238E27FC236}">
-                <a16:creationId xmlns:a16="http://schemas.microsoft.com/office/drawing/2014/main" id="{731B81EF-6F53-480B-816E-CF00A9A911F9}"/>
+                <a16:creationId xmlns:a16="http://schemas.microsoft.com/office/drawing/2014/main" id="{A40AA676-B122-4BCF-9A8D-75EE99EBD0FE}"/>
               </a:ext>
             </a:extLst>
           </p:cNvPr>
@@ -4446,7 +4446,7 @@
           <p:cNvPr id="4" name="">
             <a:extLst xmlns:a="http://schemas.openxmlformats.org/drawingml/2006/main">
               <a:ext uri="{FF2B5EF4-FFF2-40B4-BE49-F238E27FC236}">
-                <a16:creationId xmlns:a16="http://schemas.microsoft.com/office/drawing/2014/main" id="{B0653C3B-1C61-490D-8ABC-A0AC6EA3FB1D}"/>
+                <a16:creationId xmlns:a16="http://schemas.microsoft.com/office/drawing/2014/main" id="{109837D6-0B56-4CA6-B605-865380BF348C}"/>
               </a:ext>
             </a:extLst>
           </p:cNvPr>
@@ -4504,7 +4504,7 @@
           <p:cNvPr id="5" name="">
             <a:extLst xmlns:a="http://schemas.openxmlformats.org/drawingml/2006/main">
               <a:ext uri="{FF2B5EF4-FFF2-40B4-BE49-F238E27FC236}">
-                <a16:creationId xmlns:a16="http://schemas.microsoft.com/office/drawing/2014/main" id="{4E6CD20F-6469-46F1-9C77-AC408783FF46}"/>
+                <a16:creationId xmlns:a16="http://schemas.microsoft.com/office/drawing/2014/main" id="{BFB2FFC4-0882-4966-B743-113267CB8551}"/>
               </a:ext>
             </a:extLst>
           </p:cNvPr>
@@ -4541,7 +4541,7 @@
           <p:nvPr/>
         </p:nvPicPr>
         <p:blipFill>
-          <a:blip xmlns:r="http://schemas.openxmlformats.org/officeDocument/2006/relationships" xmlns:a="http://schemas.openxmlformats.org/drawingml/2006/main" r:embed="R75e845c236584214"/>
+          <a:blip xmlns:r="http://schemas.openxmlformats.org/officeDocument/2006/relationships" xmlns:a="http://schemas.openxmlformats.org/drawingml/2006/main" r:embed="R51cbd36ea3f34d7f"/>
           <a:stretch xmlns:a="http://schemas.openxmlformats.org/drawingml/2006/main"/>
         </p:blipFill>
         <p:spPr>
@@ -4559,7 +4559,7 @@
           <p:cNvPr id="7" name="">
             <a:extLst xmlns:a="http://schemas.openxmlformats.org/drawingml/2006/main">
               <a:ext uri="{FF2B5EF4-FFF2-40B4-BE49-F238E27FC236}">
-                <a16:creationId xmlns:a16="http://schemas.microsoft.com/office/drawing/2014/main" id="{36D359B4-D961-4835-B3BD-E5CEB4ACBFF7}"/>
+                <a16:creationId xmlns:a16="http://schemas.microsoft.com/office/drawing/2014/main" id="{A302D241-403F-4B4F-99FC-E1FA3DA8906C}"/>
               </a:ext>
             </a:extLst>
           </p:cNvPr>
@@ -4617,7 +4617,7 @@
           <p:cNvPr id="8" name="">
             <a:extLst xmlns:a="http://schemas.openxmlformats.org/drawingml/2006/main">
               <a:ext uri="{FF2B5EF4-FFF2-40B4-BE49-F238E27FC236}">
-                <a16:creationId xmlns:a16="http://schemas.microsoft.com/office/drawing/2014/main" id="{5AA203C5-CC51-4A6F-A76A-ED5230BD11CB}"/>
+                <a16:creationId xmlns:a16="http://schemas.microsoft.com/office/drawing/2014/main" id="{B3575FEA-0D23-4E84-96AC-40D07467C6D2}"/>
               </a:ext>
             </a:extLst>
           </p:cNvPr>
@@ -4721,7 +4721,7 @@
           <p:cNvPr id="9" name="">
             <a:extLst xmlns:a="http://schemas.openxmlformats.org/drawingml/2006/main">
               <a:ext uri="{FF2B5EF4-FFF2-40B4-BE49-F238E27FC236}">
-                <a16:creationId xmlns:a16="http://schemas.microsoft.com/office/drawing/2014/main" id="{0D597DF9-588A-4363-9D60-696D850CCDC6}"/>
+                <a16:creationId xmlns:a16="http://schemas.microsoft.com/office/drawing/2014/main" id="{82A2EE33-9EBA-48F3-B8AF-CD0F30DD7590}"/>
               </a:ext>
             </a:extLst>
           </p:cNvPr>
@@ -4754,7 +4754,7 @@
           <p:cNvPr id="10" name="">
             <a:extLst xmlns:a="http://schemas.openxmlformats.org/drawingml/2006/main">
               <a:ext uri="{FF2B5EF4-FFF2-40B4-BE49-F238E27FC236}">
-                <a16:creationId xmlns:a16="http://schemas.microsoft.com/office/drawing/2014/main" id="{02055FFC-973C-4DB0-80F9-39078C07A251}"/>
+                <a16:creationId xmlns:a16="http://schemas.microsoft.com/office/drawing/2014/main" id="{6C6797BF-A5FA-44D4-BE96-C62637786CC6}"/>
               </a:ext>
             </a:extLst>
           </p:cNvPr>
@@ -4812,7 +4812,7 @@
           <p:cNvPr id="11" name="">
             <a:extLst xmlns:a="http://schemas.openxmlformats.org/drawingml/2006/main">
               <a:ext uri="{FF2B5EF4-FFF2-40B4-BE49-F238E27FC236}">
-                <a16:creationId xmlns:a16="http://schemas.microsoft.com/office/drawing/2014/main" id="{08A9E249-FD4A-4AA5-A81B-8EC2376DD972}"/>
+                <a16:creationId xmlns:a16="http://schemas.microsoft.com/office/drawing/2014/main" id="{40386A56-72E8-4786-9C75-CE31007BB0A9}"/>
               </a:ext>
             </a:extLst>
           </p:cNvPr>
@@ -4870,7 +4870,7 @@
           <p:cNvPr id="12" name="">
             <a:extLst xmlns:a="http://schemas.openxmlformats.org/drawingml/2006/main">
               <a:ext uri="{FF2B5EF4-FFF2-40B4-BE49-F238E27FC236}">
-                <a16:creationId xmlns:a16="http://schemas.microsoft.com/office/drawing/2014/main" id="{E8D7A10A-836D-4FDE-8979-B35A1AC85046}"/>
+                <a16:creationId xmlns:a16="http://schemas.microsoft.com/office/drawing/2014/main" id="{EB5C51CD-0C1A-4F10-8141-804E1E3DA345}"/>
               </a:ext>
             </a:extLst>
           </p:cNvPr>
@@ -4928,7 +4928,7 @@
           <p:cNvPr id="13" name="">
             <a:extLst xmlns:a="http://schemas.openxmlformats.org/drawingml/2006/main">
               <a:ext uri="{FF2B5EF4-FFF2-40B4-BE49-F238E27FC236}">
-                <a16:creationId xmlns:a16="http://schemas.microsoft.com/office/drawing/2014/main" id="{520BF400-16EC-4404-9B52-21B21008D846}"/>
+                <a16:creationId xmlns:a16="http://schemas.microsoft.com/office/drawing/2014/main" id="{3CEC3617-A663-4410-A707-69F1058D97A8}"/>
               </a:ext>
             </a:extLst>
           </p:cNvPr>
@@ -4986,7 +4986,7 @@
           <p:cNvPr id="14" name="">
             <a:extLst xmlns:a="http://schemas.openxmlformats.org/drawingml/2006/main">
               <a:ext uri="{FF2B5EF4-FFF2-40B4-BE49-F238E27FC236}">
-                <a16:creationId xmlns:a16="http://schemas.microsoft.com/office/drawing/2014/main" id="{3BAA2B04-C3C8-477B-B025-3C0CA1CB1C8E}"/>
+                <a16:creationId xmlns:a16="http://schemas.microsoft.com/office/drawing/2014/main" id="{626B9001-C94F-4C08-B204-BAB737889568}"/>
               </a:ext>
             </a:extLst>
           </p:cNvPr>
@@ -5044,7 +5044,7 @@
           <p:cNvPr id="15" name="">
             <a:extLst xmlns:a="http://schemas.openxmlformats.org/drawingml/2006/main">
               <a:ext uri="{FF2B5EF4-FFF2-40B4-BE49-F238E27FC236}">
-                <a16:creationId xmlns:a16="http://schemas.microsoft.com/office/drawing/2014/main" id="{0438BE9F-138C-4DFB-8ED8-78647658D5C0}"/>
+                <a16:creationId xmlns:a16="http://schemas.microsoft.com/office/drawing/2014/main" id="{44117B6E-C098-4939-A4D8-258AD7DACCE0}"/>
               </a:ext>
             </a:extLst>
           </p:cNvPr>
@@ -5100,7 +5100,7 @@
     </p:spTree>
     <p:extLst>
       <p:ext uri="{BB962C8B-B14F-4D97-AF65-F5344CB8AC3E}">
-        <p14:creationId xmlns:p14="http://schemas.microsoft.com/office/powerpoint/2010/main" val="1255195211"/>
+        <p14:creationId xmlns:p14="http://schemas.microsoft.com/office/powerpoint/2010/main" val="695730236"/>
       </p:ext>
     </p:extLst>
   </p:cSld>
@@ -5131,7 +5131,7 @@
           <p:cNvPr id="19" name="">
             <a:extLst xmlns:a="http://schemas.openxmlformats.org/drawingml/2006/main">
               <a:ext uri="{FF2B5EF4-FFF2-40B4-BE49-F238E27FC236}">
-                <a16:creationId xmlns:a16="http://schemas.microsoft.com/office/drawing/2014/main" id="{CEFA4281-7E95-447C-90DE-DB460CEA96F7}"/>
+                <a16:creationId xmlns:a16="http://schemas.microsoft.com/office/drawing/2014/main" id="{19E69356-7951-4928-884A-037A0498AB81}"/>
               </a:ext>
             </a:extLst>
           </p:cNvPr>
@@ -5189,7 +5189,7 @@
           <p:cNvPr id="2" name="">
             <a:extLst xmlns:a="http://schemas.openxmlformats.org/drawingml/2006/main">
               <a:ext uri="{FF2B5EF4-FFF2-40B4-BE49-F238E27FC236}">
-                <a16:creationId xmlns:a16="http://schemas.microsoft.com/office/drawing/2014/main" id="{265B35C8-C2AB-4B0D-BBC5-4AA9C7B9DACB}"/>
+                <a16:creationId xmlns:a16="http://schemas.microsoft.com/office/drawing/2014/main" id="{1110B661-4B6F-4002-A0EB-92B619EE49DD}"/>
               </a:ext>
             </a:extLst>
           </p:cNvPr>
@@ -5222,7 +5222,7 @@
           <p:cNvPr id="3" name="">
             <a:extLst xmlns:a="http://schemas.openxmlformats.org/drawingml/2006/main">
               <a:ext uri="{FF2B5EF4-FFF2-40B4-BE49-F238E27FC236}">
-                <a16:creationId xmlns:a16="http://schemas.microsoft.com/office/drawing/2014/main" id="{D1A07303-75A1-42DE-9F59-C851AB605DB8}"/>
+                <a16:creationId xmlns:a16="http://schemas.microsoft.com/office/drawing/2014/main" id="{1650FC39-29F2-4256-A8AB-6D93FB5B2102}"/>
               </a:ext>
             </a:extLst>
           </p:cNvPr>
@@ -5280,7 +5280,7 @@
           <p:cNvPr id="4" name="">
             <a:extLst xmlns:a="http://schemas.openxmlformats.org/drawingml/2006/main">
               <a:ext uri="{FF2B5EF4-FFF2-40B4-BE49-F238E27FC236}">
-                <a16:creationId xmlns:a16="http://schemas.microsoft.com/office/drawing/2014/main" id="{9E1AD368-7D73-4B7C-B724-1634B9B65EE5}"/>
+                <a16:creationId xmlns:a16="http://schemas.microsoft.com/office/drawing/2014/main" id="{2BF28A86-451C-4F63-BAD7-16280BE09541}"/>
               </a:ext>
             </a:extLst>
           </p:cNvPr>
@@ -5338,7 +5338,7 @@
           <p:cNvPr id="5" name="">
             <a:extLst xmlns:a="http://schemas.openxmlformats.org/drawingml/2006/main">
               <a:ext uri="{FF2B5EF4-FFF2-40B4-BE49-F238E27FC236}">
-                <a16:creationId xmlns:a16="http://schemas.microsoft.com/office/drawing/2014/main" id="{8FA872B9-83C7-4BB2-AC57-FB258D0E7030}"/>
+                <a16:creationId xmlns:a16="http://schemas.microsoft.com/office/drawing/2014/main" id="{CFA4CA24-0DEC-43F6-B3BB-3E5B6B8264A0}"/>
               </a:ext>
             </a:extLst>
           </p:cNvPr>
@@ -5396,7 +5396,7 @@
           <p:cNvPr id="6" name="">
             <a:extLst xmlns:a="http://schemas.openxmlformats.org/drawingml/2006/main">
               <a:ext uri="{FF2B5EF4-FFF2-40B4-BE49-F238E27FC236}">
-                <a16:creationId xmlns:a16="http://schemas.microsoft.com/office/drawing/2014/main" id="{69D440D3-909E-4E4B-84B4-E652E8B68D1E}"/>
+                <a16:creationId xmlns:a16="http://schemas.microsoft.com/office/drawing/2014/main" id="{7F86CD93-FADC-40B1-B628-70AFFBBBFC7A}"/>
               </a:ext>
             </a:extLst>
           </p:cNvPr>
@@ -5454,7 +5454,7 @@
           <p:cNvPr id="7" name="">
             <a:extLst xmlns:a="http://schemas.openxmlformats.org/drawingml/2006/main">
               <a:ext uri="{FF2B5EF4-FFF2-40B4-BE49-F238E27FC236}">
-                <a16:creationId xmlns:a16="http://schemas.microsoft.com/office/drawing/2014/main" id="{B0766FA7-2F15-4F1E-A6A8-113B20499588}"/>
+                <a16:creationId xmlns:a16="http://schemas.microsoft.com/office/drawing/2014/main" id="{EA3C0EFE-1629-4302-99BB-130E74D6D6AB}"/>
               </a:ext>
             </a:extLst>
           </p:cNvPr>
@@ -5512,7 +5512,7 @@
           <p:cNvPr id="8" name="">
             <a:extLst xmlns:a="http://schemas.openxmlformats.org/drawingml/2006/main">
               <a:ext uri="{FF2B5EF4-FFF2-40B4-BE49-F238E27FC236}">
-                <a16:creationId xmlns:a16="http://schemas.microsoft.com/office/drawing/2014/main" id="{2ACD267D-4BAF-4C80-8A77-C9E4DF9C28AA}"/>
+                <a16:creationId xmlns:a16="http://schemas.microsoft.com/office/drawing/2014/main" id="{726AC711-6A13-4713-99A0-A42B45B8B8D2}"/>
               </a:ext>
             </a:extLst>
           </p:cNvPr>
@@ -5570,7 +5570,7 @@
           <p:cNvPr id="9" name="">
             <a:extLst xmlns:a="http://schemas.openxmlformats.org/drawingml/2006/main">
               <a:ext uri="{FF2B5EF4-FFF2-40B4-BE49-F238E27FC236}">
-                <a16:creationId xmlns:a16="http://schemas.microsoft.com/office/drawing/2014/main" id="{DC816C4A-B0E4-4D34-88BD-43F5A3CCC938}"/>
+                <a16:creationId xmlns:a16="http://schemas.microsoft.com/office/drawing/2014/main" id="{78D07605-27E4-4D12-A7C0-73BA92CAE5FD}"/>
               </a:ext>
             </a:extLst>
           </p:cNvPr>
@@ -5628,7 +5628,7 @@
           <p:cNvPr id="10" name="">
             <a:extLst xmlns:a="http://schemas.openxmlformats.org/drawingml/2006/main">
               <a:ext uri="{FF2B5EF4-FFF2-40B4-BE49-F238E27FC236}">
-                <a16:creationId xmlns:a16="http://schemas.microsoft.com/office/drawing/2014/main" id="{6E704FB2-09D4-4C23-B26F-AE799A7BB863}"/>
+                <a16:creationId xmlns:a16="http://schemas.microsoft.com/office/drawing/2014/main" id="{65DE2F5C-130E-4123-B173-461E63889F65}"/>
               </a:ext>
             </a:extLst>
           </p:cNvPr>
@@ -5665,7 +5665,7 @@
           <p:nvPr/>
         </p:nvPicPr>
         <p:blipFill>
-          <a:blip xmlns:r="http://schemas.openxmlformats.org/officeDocument/2006/relationships" xmlns:a="http://schemas.openxmlformats.org/drawingml/2006/main" r:embed="Ra10a762e6c4046f9"/>
+          <a:blip xmlns:r="http://schemas.openxmlformats.org/officeDocument/2006/relationships" xmlns:a="http://schemas.openxmlformats.org/drawingml/2006/main" r:embed="Rf9c9bf18d40941f4"/>
           <a:stretch xmlns:a="http://schemas.openxmlformats.org/drawingml/2006/main"/>
         </p:blipFill>
         <p:spPr>
@@ -5683,7 +5683,7 @@
           <p:cNvPr id="12" name="">
             <a:extLst xmlns:a="http://schemas.openxmlformats.org/drawingml/2006/main">
               <a:ext uri="{FF2B5EF4-FFF2-40B4-BE49-F238E27FC236}">
-                <a16:creationId xmlns:a16="http://schemas.microsoft.com/office/drawing/2014/main" id="{D9741278-BAF8-4038-8ACA-C5BEC13A64E1}"/>
+                <a16:creationId xmlns:a16="http://schemas.microsoft.com/office/drawing/2014/main" id="{DD9BE811-EDD4-40AE-B49C-ACD2AA17746C}"/>
               </a:ext>
             </a:extLst>
           </p:cNvPr>
@@ -5741,7 +5741,7 @@
           <p:cNvPr id="13" name="">
             <a:extLst xmlns:a="http://schemas.openxmlformats.org/drawingml/2006/main">
               <a:ext uri="{FF2B5EF4-FFF2-40B4-BE49-F238E27FC236}">
-                <a16:creationId xmlns:a16="http://schemas.microsoft.com/office/drawing/2014/main" id="{3EAE0823-BA7B-414D-878B-B26FDFAC0F8D}"/>
+                <a16:creationId xmlns:a16="http://schemas.microsoft.com/office/drawing/2014/main" id="{940F3037-81F8-4C33-9112-6F66E5693992}"/>
               </a:ext>
             </a:extLst>
           </p:cNvPr>
@@ -5799,7 +5799,7 @@
           <p:cNvPr id="14" name="">
             <a:extLst xmlns:a="http://schemas.openxmlformats.org/drawingml/2006/main">
               <a:ext uri="{FF2B5EF4-FFF2-40B4-BE49-F238E27FC236}">
-                <a16:creationId xmlns:a16="http://schemas.microsoft.com/office/drawing/2014/main" id="{755DE7A3-BAD2-4722-A619-3ECA3611715C}"/>
+                <a16:creationId xmlns:a16="http://schemas.microsoft.com/office/drawing/2014/main" id="{F003CDAC-FC49-403A-BD8E-B0C8AA10790F}"/>
               </a:ext>
             </a:extLst>
           </p:cNvPr>
@@ -5926,7 +5926,7 @@
           <p:cNvPr id="15" name="">
             <a:extLst xmlns:a="http://schemas.openxmlformats.org/drawingml/2006/main">
               <a:ext uri="{FF2B5EF4-FFF2-40B4-BE49-F238E27FC236}">
-                <a16:creationId xmlns:a16="http://schemas.microsoft.com/office/drawing/2014/main" id="{480E9023-8D2B-4F87-BAA7-4BDFAE92D295}"/>
+                <a16:creationId xmlns:a16="http://schemas.microsoft.com/office/drawing/2014/main" id="{0F176BD1-EEAE-4ADD-9330-3CDA2621FD94}"/>
               </a:ext>
             </a:extLst>
           </p:cNvPr>
@@ -5959,7 +5959,7 @@
           <p:cNvPr id="16" name="">
             <a:extLst xmlns:a="http://schemas.openxmlformats.org/drawingml/2006/main">
               <a:ext uri="{FF2B5EF4-FFF2-40B4-BE49-F238E27FC236}">
-                <a16:creationId xmlns:a16="http://schemas.microsoft.com/office/drawing/2014/main" id="{13F4BA7C-AE85-4D0C-8D9F-062303AF55F0}"/>
+                <a16:creationId xmlns:a16="http://schemas.microsoft.com/office/drawing/2014/main" id="{2F49BEBF-E0AA-4B08-A71E-651E5DD4E06D}"/>
               </a:ext>
             </a:extLst>
           </p:cNvPr>
@@ -6017,7 +6017,7 @@
           <p:cNvPr id="17" name="">
             <a:extLst xmlns:a="http://schemas.openxmlformats.org/drawingml/2006/main">
               <a:ext uri="{FF2B5EF4-FFF2-40B4-BE49-F238E27FC236}">
-                <a16:creationId xmlns:a16="http://schemas.microsoft.com/office/drawing/2014/main" id="{689E1281-D387-494E-8DF1-259429122C0F}"/>
+                <a16:creationId xmlns:a16="http://schemas.microsoft.com/office/drawing/2014/main" id="{5E5FCA15-E280-44A1-86AF-ED555464F753}"/>
               </a:ext>
             </a:extLst>
           </p:cNvPr>
@@ -6075,7 +6075,7 @@
           <p:cNvPr id="18" name="">
             <a:extLst xmlns:a="http://schemas.openxmlformats.org/drawingml/2006/main">
               <a:ext uri="{FF2B5EF4-FFF2-40B4-BE49-F238E27FC236}">
-                <a16:creationId xmlns:a16="http://schemas.microsoft.com/office/drawing/2014/main" id="{CE969B65-036D-45CC-BB03-86BAB96AE2C1}"/>
+                <a16:creationId xmlns:a16="http://schemas.microsoft.com/office/drawing/2014/main" id="{A56D6A2C-0E90-4698-8E09-90DE09D47D5F}"/>
               </a:ext>
             </a:extLst>
           </p:cNvPr>
@@ -6131,7 +6131,7 @@
     </p:spTree>
     <p:extLst>
       <p:ext uri="{BB962C8B-B14F-4D97-AF65-F5344CB8AC3E}">
-        <p14:creationId xmlns:p14="http://schemas.microsoft.com/office/powerpoint/2010/main" val="379077350"/>
+        <p14:creationId xmlns:p14="http://schemas.microsoft.com/office/powerpoint/2010/main" val="1230037755"/>
       </p:ext>
     </p:extLst>
   </p:cSld>
@@ -6162,7 +6162,7 @@
           <p:cNvPr id="24" name="">
             <a:extLst xmlns:a="http://schemas.openxmlformats.org/drawingml/2006/main">
               <a:ext uri="{FF2B5EF4-FFF2-40B4-BE49-F238E27FC236}">
-                <a16:creationId xmlns:a16="http://schemas.microsoft.com/office/drawing/2014/main" id="{FF831420-7FDB-478E-9FB7-15A68A3DC9EA}"/>
+                <a16:creationId xmlns:a16="http://schemas.microsoft.com/office/drawing/2014/main" id="{E1CAD704-F232-4767-AAB5-80EA5B6EF7A7}"/>
               </a:ext>
             </a:extLst>
           </p:cNvPr>
@@ -6220,7 +6220,7 @@
           <p:cNvPr id="2" name="">
             <a:extLst xmlns:a="http://schemas.openxmlformats.org/drawingml/2006/main">
               <a:ext uri="{FF2B5EF4-FFF2-40B4-BE49-F238E27FC236}">
-                <a16:creationId xmlns:a16="http://schemas.microsoft.com/office/drawing/2014/main" id="{8FC99CB8-4C89-4019-9EDD-A44C16472A05}"/>
+                <a16:creationId xmlns:a16="http://schemas.microsoft.com/office/drawing/2014/main" id="{442E5BF9-5EC8-4693-8EE4-DA04652EAEB1}"/>
               </a:ext>
             </a:extLst>
           </p:cNvPr>
@@ -6253,7 +6253,7 @@
           <p:cNvPr id="3" name="">
             <a:extLst xmlns:a="http://schemas.openxmlformats.org/drawingml/2006/main">
               <a:ext uri="{FF2B5EF4-FFF2-40B4-BE49-F238E27FC236}">
-                <a16:creationId xmlns:a16="http://schemas.microsoft.com/office/drawing/2014/main" id="{DB309D49-ED6D-4DEB-AE56-9D3E1BA652D9}"/>
+                <a16:creationId xmlns:a16="http://schemas.microsoft.com/office/drawing/2014/main" id="{2E849A3D-974E-41B6-B977-D987049FADA6}"/>
               </a:ext>
             </a:extLst>
           </p:cNvPr>
@@ -6311,7 +6311,7 @@
           <p:cNvPr id="4" name="">
             <a:extLst xmlns:a="http://schemas.openxmlformats.org/drawingml/2006/main">
               <a:ext uri="{FF2B5EF4-FFF2-40B4-BE49-F238E27FC236}">
-                <a16:creationId xmlns:a16="http://schemas.microsoft.com/office/drawing/2014/main" id="{F7C48F16-B90A-481B-BA64-90D562530047}"/>
+                <a16:creationId xmlns:a16="http://schemas.microsoft.com/office/drawing/2014/main" id="{36CB84AB-6EFC-4FB8-A8CD-D87087189BFF}"/>
               </a:ext>
             </a:extLst>
           </p:cNvPr>
@@ -6369,7 +6369,7 @@
           <p:cNvPr id="5" name="">
             <a:extLst xmlns:a="http://schemas.openxmlformats.org/drawingml/2006/main">
               <a:ext uri="{FF2B5EF4-FFF2-40B4-BE49-F238E27FC236}">
-                <a16:creationId xmlns:a16="http://schemas.microsoft.com/office/drawing/2014/main" id="{AAC1291D-4788-4FC9-91D9-1C4E5D05F310}"/>
+                <a16:creationId xmlns:a16="http://schemas.microsoft.com/office/drawing/2014/main" id="{A78600AA-0652-40DE-8B91-13F454938117}"/>
               </a:ext>
             </a:extLst>
           </p:cNvPr>
@@ -6417,7 +6417,7 @@
                 <a:ea typeface="Microsoft YaHei"/>
                 <a:cs typeface="Microsoft YaHei"/>
               </a:rPr>
-              <a:t>138</a:t>
+              <a:t>150</a:t>
             </a:r>
           </a:p>
         </p:txBody>
@@ -6427,7 +6427,7 @@
           <p:cNvPr id="6" name="">
             <a:extLst xmlns:a="http://schemas.openxmlformats.org/drawingml/2006/main">
               <a:ext uri="{FF2B5EF4-FFF2-40B4-BE49-F238E27FC236}">
-                <a16:creationId xmlns:a16="http://schemas.microsoft.com/office/drawing/2014/main" id="{62EB35C0-4066-4A31-A18E-2E4BC3CF170F}"/>
+                <a16:creationId xmlns:a16="http://schemas.microsoft.com/office/drawing/2014/main" id="{F0BAA303-10A2-4590-94CC-266797FC76ED}"/>
               </a:ext>
             </a:extLst>
           </p:cNvPr>
@@ -6485,7 +6485,7 @@
           <p:cNvPr id="7" name="">
             <a:extLst xmlns:a="http://schemas.openxmlformats.org/drawingml/2006/main">
               <a:ext uri="{FF2B5EF4-FFF2-40B4-BE49-F238E27FC236}">
-                <a16:creationId xmlns:a16="http://schemas.microsoft.com/office/drawing/2014/main" id="{571BDC2C-1533-496C-B654-220E2EEE8879}"/>
+                <a16:creationId xmlns:a16="http://schemas.microsoft.com/office/drawing/2014/main" id="{1B7AC1C7-EF4E-4DB3-BBE0-2935A9164DCC}"/>
               </a:ext>
             </a:extLst>
           </p:cNvPr>
@@ -6543,7 +6543,7 @@
           <p:cNvPr id="8" name="">
             <a:extLst xmlns:a="http://schemas.openxmlformats.org/drawingml/2006/main">
               <a:ext uri="{FF2B5EF4-FFF2-40B4-BE49-F238E27FC236}">
-                <a16:creationId xmlns:a16="http://schemas.microsoft.com/office/drawing/2014/main" id="{6BC8DD33-4F1E-4A91-A627-6A6645D29CBF}"/>
+                <a16:creationId xmlns:a16="http://schemas.microsoft.com/office/drawing/2014/main" id="{F3731984-8FDC-41D3-B131-9E2ED321CCDF}"/>
               </a:ext>
             </a:extLst>
           </p:cNvPr>
@@ -6601,7 +6601,7 @@
           <p:cNvPr id="9" name="">
             <a:extLst xmlns:a="http://schemas.openxmlformats.org/drawingml/2006/main">
               <a:ext uri="{FF2B5EF4-FFF2-40B4-BE49-F238E27FC236}">
-                <a16:creationId xmlns:a16="http://schemas.microsoft.com/office/drawing/2014/main" id="{05631F48-6780-4CAB-A5A8-783FCA73AD81}"/>
+                <a16:creationId xmlns:a16="http://schemas.microsoft.com/office/drawing/2014/main" id="{9D88BBED-43C0-4744-BDE9-1AFAAEDB7792}"/>
               </a:ext>
             </a:extLst>
           </p:cNvPr>
@@ -6659,7 +6659,7 @@
           <p:cNvPr id="10" name="">
             <a:extLst xmlns:a="http://schemas.openxmlformats.org/drawingml/2006/main">
               <a:ext uri="{FF2B5EF4-FFF2-40B4-BE49-F238E27FC236}">
-                <a16:creationId xmlns:a16="http://schemas.microsoft.com/office/drawing/2014/main" id="{6E86A02F-9BBB-42C8-9FF3-A9061951BEB3}"/>
+                <a16:creationId xmlns:a16="http://schemas.microsoft.com/office/drawing/2014/main" id="{ABB1A132-DFF4-4829-9D7D-9ED1D1F4C129}"/>
               </a:ext>
             </a:extLst>
           </p:cNvPr>
@@ -6717,7 +6717,7 @@
           <p:cNvPr id="11" name="">
             <a:extLst xmlns:a="http://schemas.openxmlformats.org/drawingml/2006/main">
               <a:ext uri="{FF2B5EF4-FFF2-40B4-BE49-F238E27FC236}">
-                <a16:creationId xmlns:a16="http://schemas.microsoft.com/office/drawing/2014/main" id="{511C6A8C-A560-4C51-B2DA-AAEB28F4B0ED}"/>
+                <a16:creationId xmlns:a16="http://schemas.microsoft.com/office/drawing/2014/main" id="{C1469990-D1D9-4FAC-AF50-3344CDB8AE5F}"/>
               </a:ext>
             </a:extLst>
           </p:cNvPr>
@@ -6744,7 +6744,7 @@
           <p:cNvPr id="12" name="">
             <a:extLst xmlns:a="http://schemas.openxmlformats.org/drawingml/2006/main">
               <a:ext uri="{FF2B5EF4-FFF2-40B4-BE49-F238E27FC236}">
-                <a16:creationId xmlns:a16="http://schemas.microsoft.com/office/drawing/2014/main" id="{CEB89C15-EFF2-4B9A-84B3-9C99438E1409}"/>
+                <a16:creationId xmlns:a16="http://schemas.microsoft.com/office/drawing/2014/main" id="{D678BD90-E515-4C29-93AD-2F4A580649BE}"/>
               </a:ext>
             </a:extLst>
           </p:cNvPr>
@@ -6802,7 +6802,7 @@
           <p:cNvPr id="13" name="">
             <a:extLst xmlns:a="http://schemas.openxmlformats.org/drawingml/2006/main">
               <a:ext uri="{FF2B5EF4-FFF2-40B4-BE49-F238E27FC236}">
-                <a16:creationId xmlns:a16="http://schemas.microsoft.com/office/drawing/2014/main" id="{6F01E085-682D-40BF-8977-E64584788AD2}"/>
+                <a16:creationId xmlns:a16="http://schemas.microsoft.com/office/drawing/2014/main" id="{33AC80D3-F732-43BF-A5FE-C6ACE9C59B4E}"/>
               </a:ext>
             </a:extLst>
           </p:cNvPr>
@@ -6919,7 +6919,7 @@
                 <a:ea typeface="Microsoft YaHei"/>
                 <a:cs typeface="Microsoft YaHei"/>
               </a:rPr>
-              <a:t>Shadow + 全量回归 + 人审</a:t>
+              <a:t>Shadow + 人审 + Reviewed Bridge</a:t>
             </a:r>
           </a:p>
           <a:p xmlns:a="http://schemas.openxmlformats.org/drawingml/2006/main">
@@ -6952,7 +6952,7 @@
           <p:cNvPr id="14" name="">
             <a:extLst xmlns:a="http://schemas.openxmlformats.org/drawingml/2006/main">
               <a:ext uri="{FF2B5EF4-FFF2-40B4-BE49-F238E27FC236}">
-                <a16:creationId xmlns:a16="http://schemas.microsoft.com/office/drawing/2014/main" id="{D0EFC726-C7DE-4ABC-A0C1-749E726751EF}"/>
+                <a16:creationId xmlns:a16="http://schemas.microsoft.com/office/drawing/2014/main" id="{6C067650-A533-4181-A64A-B1835473AC94}"/>
               </a:ext>
             </a:extLst>
           </p:cNvPr>
@@ -6985,7 +6985,7 @@
           <p:cNvPr id="15" name="">
             <a:extLst xmlns:a="http://schemas.openxmlformats.org/drawingml/2006/main">
               <a:ext uri="{FF2B5EF4-FFF2-40B4-BE49-F238E27FC236}">
-                <a16:creationId xmlns:a16="http://schemas.microsoft.com/office/drawing/2014/main" id="{EE9A927D-B3CD-4793-B928-9C18CED8F154}"/>
+                <a16:creationId xmlns:a16="http://schemas.microsoft.com/office/drawing/2014/main" id="{4428B59A-CEE3-471B-A537-733DA9BE7BD4}"/>
               </a:ext>
             </a:extLst>
           </p:cNvPr>
@@ -7066,7 +7066,7 @@
           <p:cNvPr id="16" name="">
             <a:extLst xmlns:a="http://schemas.openxmlformats.org/drawingml/2006/main">
               <a:ext uri="{FF2B5EF4-FFF2-40B4-BE49-F238E27FC236}">
-                <a16:creationId xmlns:a16="http://schemas.microsoft.com/office/drawing/2014/main" id="{F9E422DB-BC61-47A5-8395-116E0F36D6C0}"/>
+                <a16:creationId xmlns:a16="http://schemas.microsoft.com/office/drawing/2014/main" id="{7E78F131-9363-4A9E-B16B-B50DE91785F6}"/>
               </a:ext>
             </a:extLst>
           </p:cNvPr>
@@ -7093,7 +7093,7 @@
           <p:cNvPr id="17" name="">
             <a:extLst xmlns:a="http://schemas.openxmlformats.org/drawingml/2006/main">
               <a:ext uri="{FF2B5EF4-FFF2-40B4-BE49-F238E27FC236}">
-                <a16:creationId xmlns:a16="http://schemas.microsoft.com/office/drawing/2014/main" id="{20DD6F93-239A-483D-BDDD-2D51C4BBEA4A}"/>
+                <a16:creationId xmlns:a16="http://schemas.microsoft.com/office/drawing/2014/main" id="{4CBBDB84-377A-4D08-886E-A2CF52EBD8AB}"/>
               </a:ext>
             </a:extLst>
           </p:cNvPr>
@@ -7151,7 +7151,7 @@
           <p:cNvPr id="18" name="">
             <a:extLst xmlns:a="http://schemas.openxmlformats.org/drawingml/2006/main">
               <a:ext uri="{FF2B5EF4-FFF2-40B4-BE49-F238E27FC236}">
-                <a16:creationId xmlns:a16="http://schemas.microsoft.com/office/drawing/2014/main" id="{364FE05A-F5A2-4789-93E6-ED60E325BD71}"/>
+                <a16:creationId xmlns:a16="http://schemas.microsoft.com/office/drawing/2014/main" id="{FFB7D56C-47A4-4CC1-A166-A2F24BB9FE81}"/>
               </a:ext>
             </a:extLst>
           </p:cNvPr>
@@ -7209,7 +7209,7 @@
           <p:cNvPr id="19" name="">
             <a:extLst xmlns:a="http://schemas.openxmlformats.org/drawingml/2006/main">
               <a:ext uri="{FF2B5EF4-FFF2-40B4-BE49-F238E27FC236}">
-                <a16:creationId xmlns:a16="http://schemas.microsoft.com/office/drawing/2014/main" id="{9F5DF451-DF72-4C04-8BF0-2872BBBF0068}"/>
+                <a16:creationId xmlns:a16="http://schemas.microsoft.com/office/drawing/2014/main" id="{A8085697-74DD-4F2A-A245-5B6016580E28}"/>
               </a:ext>
             </a:extLst>
           </p:cNvPr>
@@ -7267,7 +7267,7 @@
           <p:cNvPr id="20" name="">
             <a:extLst xmlns:a="http://schemas.openxmlformats.org/drawingml/2006/main">
               <a:ext uri="{FF2B5EF4-FFF2-40B4-BE49-F238E27FC236}">
-                <a16:creationId xmlns:a16="http://schemas.microsoft.com/office/drawing/2014/main" id="{CB310EA1-8040-462D-9272-1D2876EEB40A}"/>
+                <a16:creationId xmlns:a16="http://schemas.microsoft.com/office/drawing/2014/main" id="{9B821062-E583-47AE-A67C-C11A3DCF8F10}"/>
               </a:ext>
             </a:extLst>
           </p:cNvPr>
@@ -7315,7 +7315,7 @@
                 <a:ea typeface="Consolas"/>
                 <a:cs typeface="Consolas"/>
               </a:rPr>
-              <a:t>Run 33314875879</a:t>
+              <a:t>Run 33354020784</a:t>
             </a:r>
           </a:p>
         </p:txBody>
@@ -7325,7 +7325,7 @@
           <p:cNvPr id="21" name="">
             <a:extLst xmlns:a="http://schemas.openxmlformats.org/drawingml/2006/main">
               <a:ext uri="{FF2B5EF4-FFF2-40B4-BE49-F238E27FC236}">
-                <a16:creationId xmlns:a16="http://schemas.microsoft.com/office/drawing/2014/main" id="{BEB221F2-D225-4D31-80F0-D280E7CD116B}"/>
+                <a16:creationId xmlns:a16="http://schemas.microsoft.com/office/drawing/2014/main" id="{32EF5B1B-9226-4BC9-9D0A-EF2B8E37F9AA}"/>
               </a:ext>
             </a:extLst>
           </p:cNvPr>
@@ -7406,7 +7406,7 @@
           <p:cNvPr id="22" name="">
             <a:extLst xmlns:a="http://schemas.openxmlformats.org/drawingml/2006/main">
               <a:ext uri="{FF2B5EF4-FFF2-40B4-BE49-F238E27FC236}">
-                <a16:creationId xmlns:a16="http://schemas.microsoft.com/office/drawing/2014/main" id="{C2D31C39-C010-4C5D-8FA2-C6B4B770F24F}"/>
+                <a16:creationId xmlns:a16="http://schemas.microsoft.com/office/drawing/2014/main" id="{395686AE-D18D-45E1-BA8A-AE0EA84A9010}"/>
               </a:ext>
             </a:extLst>
           </p:cNvPr>
@@ -7487,7 +7487,7 @@
           <p:cNvPr id="23" name="">
             <a:extLst xmlns:a="http://schemas.openxmlformats.org/drawingml/2006/main">
               <a:ext uri="{FF2B5EF4-FFF2-40B4-BE49-F238E27FC236}">
-                <a16:creationId xmlns:a16="http://schemas.microsoft.com/office/drawing/2014/main" id="{820AA345-0DE9-4AD6-8732-650D09CDB082}"/>
+                <a16:creationId xmlns:a16="http://schemas.microsoft.com/office/drawing/2014/main" id="{6EB7312E-4E31-4708-9674-B8634F3D11C6}"/>
               </a:ext>
             </a:extLst>
           </p:cNvPr>
@@ -7543,7 +7543,7 @@
     </p:spTree>
     <p:extLst>
       <p:ext uri="{BB962C8B-B14F-4D97-AF65-F5344CB8AC3E}">
-        <p14:creationId xmlns:p14="http://schemas.microsoft.com/office/powerpoint/2010/main" val="788239077"/>
+        <p14:creationId xmlns:p14="http://schemas.microsoft.com/office/powerpoint/2010/main" val="621817738"/>
       </p:ext>
     </p:extLst>
   </p:cSld>

--- a/docs/Software-Agent-Interview-Deck.pptx
+++ b/docs/Software-Agent-Interview-Deck.pptx
@@ -2,17 +2,17 @@
 <file path=ppt/presentation.xml><?xml version="1.0" encoding="utf-8"?>
 <p:presentation xmlns:p="http://schemas.openxmlformats.org/presentationml/2006/main">
   <p:sldMasterIdLst>
-    <p:sldMasterId xmlns:r="http://schemas.openxmlformats.org/officeDocument/2006/relationships" id="2147483648" r:id="R71da8c5b0c8249bd"/>
+    <p:sldMasterId xmlns:r="http://schemas.openxmlformats.org/officeDocument/2006/relationships" id="2147483648" r:id="R39be438d55d74526"/>
   </p:sldMasterIdLst>
   <p:notesMasterIdLst>
-    <p:notesMasterId xmlns:r="http://schemas.openxmlformats.org/officeDocument/2006/relationships" r:id="Rb92fe46859ef4635"/>
+    <p:notesMasterId xmlns:r="http://schemas.openxmlformats.org/officeDocument/2006/relationships" r:id="R1ccee42a9e764df1"/>
   </p:notesMasterIdLst>
   <p:sldIdLst>
-    <p:sldId xmlns:r="http://schemas.openxmlformats.org/officeDocument/2006/relationships" id="256" r:id="Re541306fb0e840c7"/>
-    <p:sldId xmlns:r="http://schemas.openxmlformats.org/officeDocument/2006/relationships" id="257" r:id="Rc9102bfdb83249e4"/>
-    <p:sldId xmlns:r="http://schemas.openxmlformats.org/officeDocument/2006/relationships" id="258" r:id="Rf9b14ff73c114123"/>
-    <p:sldId xmlns:r="http://schemas.openxmlformats.org/officeDocument/2006/relationships" id="259" r:id="R4ce22cd5be1c4a76"/>
-    <p:sldId xmlns:r="http://schemas.openxmlformats.org/officeDocument/2006/relationships" id="260" r:id="Rc4e4e802a8cf4386"/>
+    <p:sldId xmlns:r="http://schemas.openxmlformats.org/officeDocument/2006/relationships" id="256" r:id="Rfd78fe4d71ea4d7a"/>
+    <p:sldId xmlns:r="http://schemas.openxmlformats.org/officeDocument/2006/relationships" id="257" r:id="Raddcad3f9cf24d57"/>
+    <p:sldId xmlns:r="http://schemas.openxmlformats.org/officeDocument/2006/relationships" id="258" r:id="R648850dbd8774dfd"/>
+    <p:sldId xmlns:r="http://schemas.openxmlformats.org/officeDocument/2006/relationships" id="259" r:id="Rbf5e32568be8413d"/>
+    <p:sldId xmlns:r="http://schemas.openxmlformats.org/officeDocument/2006/relationships" id="260" r:id="R81c0cf2adf2b4fc9"/>
   </p:sldIdLst>
   <p:sldSz cx="12192000" cy="6858000"/>
   <p:notesSz cx="6858000" cy="9144000"/>
@@ -471,7 +471,7 @@
           </a:p>
           <a:p xmlns:a="http://schemas.openxmlformats.org/drawingml/2006/main">
             <a:r>
-              <a:t>- Current CI evidence: https://github.com/Isoldelu/software-engineering-agent/actions/runs/33354020784</a:t>
+              <a:t>- Current CI evidence: https://github.com/Isoldelu/software-engineering-agent/actions/runs/33363220127</a:t>
             </a:r>
           </a:p>
         </p:txBody>
@@ -846,7 +846,12 @@
           </a:p>
           <a:p xmlns:a="http://schemas.openxmlformats.org/drawingml/2006/main">
             <a:r>
-              <a:t>- GitHub Actions Run: https://github.com/Isoldelu/software-engineering-agent/actions/runs/33354020784</a:t>
+              <a:t>- GitHub Actions Run: https://github.com/Isoldelu/software-engineering-agent/actions/runs/33363220127</a:t>
+            </a:r>
+          </a:p>
+          <a:p xmlns:a="http://schemas.openxmlformats.org/drawingml/2006/main">
+            <a:r>
+              <a:t>- Step 34 evidence: evaluation/step34_bridge_fault_report.md</a:t>
             </a:r>
           </a:p>
           <a:p xmlns:a="http://schemas.openxmlformats.org/drawingml/2006/main">
@@ -929,7 +934,7 @@
   </p:cSld>
   <p:clrMap bg1="lt1" tx1="dk1" bg2="lt2" tx2="dk2" accent1="accent1" accent2="accent2" accent3="accent3" accent4="accent4" accent5="accent5" accent6="accent6" hlink="hlink" folHlink="folHlink"/>
   <p:sldLayoutIdLst>
-    <p:sldLayoutId xmlns:r="http://schemas.openxmlformats.org/officeDocument/2006/relationships" id="2147483649" r:id="Ra5aed6970a5046c8"/>
+    <p:sldLayoutId xmlns:r="http://schemas.openxmlformats.org/officeDocument/2006/relationships" id="2147483649" r:id="R8b16320a6e2842a6"/>
   </p:sldLayoutIdLst>
   <p:txStyles>
     <p:titleStyle>
@@ -1480,7 +1485,7 @@
           <p:cNvPr id="17" name="">
             <a:extLst xmlns:a="http://schemas.openxmlformats.org/drawingml/2006/main">
               <a:ext uri="{FF2B5EF4-FFF2-40B4-BE49-F238E27FC236}">
-                <a16:creationId xmlns:a16="http://schemas.microsoft.com/office/drawing/2014/main" id="{5843AA7A-C4E8-44AD-8C80-413B4D8A7B5D}"/>
+                <a16:creationId xmlns:a16="http://schemas.microsoft.com/office/drawing/2014/main" id="{12CAB05E-4F31-4D2F-AD38-1821BD4270EF}"/>
               </a:ext>
             </a:extLst>
           </p:cNvPr>
@@ -1513,7 +1518,7 @@
           <p:cNvPr id="2" name="">
             <a:extLst xmlns:a="http://schemas.openxmlformats.org/drawingml/2006/main">
               <a:ext uri="{FF2B5EF4-FFF2-40B4-BE49-F238E27FC236}">
-                <a16:creationId xmlns:a16="http://schemas.microsoft.com/office/drawing/2014/main" id="{F99F33B7-B530-4C24-9EA2-2294E5F4F9EC}"/>
+                <a16:creationId xmlns:a16="http://schemas.microsoft.com/office/drawing/2014/main" id="{F19CD36A-6A48-46B8-BC63-7DE28D894632}"/>
               </a:ext>
             </a:extLst>
           </p:cNvPr>
@@ -1571,7 +1576,7 @@
           <p:cNvPr id="3" name="">
             <a:extLst xmlns:a="http://schemas.openxmlformats.org/drawingml/2006/main">
               <a:ext uri="{FF2B5EF4-FFF2-40B4-BE49-F238E27FC236}">
-                <a16:creationId xmlns:a16="http://schemas.microsoft.com/office/drawing/2014/main" id="{605536A0-CB38-4769-8115-538E22754E76}"/>
+                <a16:creationId xmlns:a16="http://schemas.microsoft.com/office/drawing/2014/main" id="{D6E43A04-47EC-4200-8836-DB23DD705B70}"/>
               </a:ext>
             </a:extLst>
           </p:cNvPr>
@@ -1652,7 +1657,7 @@
           <p:cNvPr id="4" name="">
             <a:extLst xmlns:a="http://schemas.openxmlformats.org/drawingml/2006/main">
               <a:ext uri="{FF2B5EF4-FFF2-40B4-BE49-F238E27FC236}">
-                <a16:creationId xmlns:a16="http://schemas.microsoft.com/office/drawing/2014/main" id="{542F8C68-E3A6-414F-83DA-D2CB2406B6B5}"/>
+                <a16:creationId xmlns:a16="http://schemas.microsoft.com/office/drawing/2014/main" id="{4A3DBFD0-F604-4058-ACAC-F0BD15082E2E}"/>
               </a:ext>
             </a:extLst>
           </p:cNvPr>
@@ -1710,7 +1715,7 @@
           <p:cNvPr id="5" name="">
             <a:extLst xmlns:a="http://schemas.openxmlformats.org/drawingml/2006/main">
               <a:ext uri="{FF2B5EF4-FFF2-40B4-BE49-F238E27FC236}">
-                <a16:creationId xmlns:a16="http://schemas.microsoft.com/office/drawing/2014/main" id="{59376669-2C59-4782-9F25-9729CD7FA79F}"/>
+                <a16:creationId xmlns:a16="http://schemas.microsoft.com/office/drawing/2014/main" id="{0BD7F4F7-E16D-40E0-84F2-560670305D93}"/>
               </a:ext>
             </a:extLst>
           </p:cNvPr>
@@ -1743,7 +1748,7 @@
           <p:cNvPr id="6" name="">
             <a:extLst xmlns:a="http://schemas.openxmlformats.org/drawingml/2006/main">
               <a:ext uri="{FF2B5EF4-FFF2-40B4-BE49-F238E27FC236}">
-                <a16:creationId xmlns:a16="http://schemas.microsoft.com/office/drawing/2014/main" id="{AF927E2D-BB6D-4FB8-801E-A0044649F24F}"/>
+                <a16:creationId xmlns:a16="http://schemas.microsoft.com/office/drawing/2014/main" id="{7FBD1CF8-DDDD-484F-8A77-41F3A76521AA}"/>
               </a:ext>
             </a:extLst>
           </p:cNvPr>
@@ -1801,7 +1806,7 @@
           <p:cNvPr id="7" name="">
             <a:extLst xmlns:a="http://schemas.openxmlformats.org/drawingml/2006/main">
               <a:ext uri="{FF2B5EF4-FFF2-40B4-BE49-F238E27FC236}">
-                <a16:creationId xmlns:a16="http://schemas.microsoft.com/office/drawing/2014/main" id="{60FC1B95-3B87-48C5-98D6-4256AF8A12CE}"/>
+                <a16:creationId xmlns:a16="http://schemas.microsoft.com/office/drawing/2014/main" id="{07851866-A68F-4A65-A773-9B3C1CDD5ACB}"/>
               </a:ext>
             </a:extLst>
           </p:cNvPr>
@@ -1951,7 +1956,7 @@
           <p:cNvPr id="8" name="">
             <a:extLst xmlns:a="http://schemas.openxmlformats.org/drawingml/2006/main">
               <a:ext uri="{FF2B5EF4-FFF2-40B4-BE49-F238E27FC236}">
-                <a16:creationId xmlns:a16="http://schemas.microsoft.com/office/drawing/2014/main" id="{8166441C-FED5-4E91-AD54-335B4D13EEF8}"/>
+                <a16:creationId xmlns:a16="http://schemas.microsoft.com/office/drawing/2014/main" id="{0317EEC6-097D-458A-A92F-8B2CC3821EA1}"/>
               </a:ext>
             </a:extLst>
           </p:cNvPr>
@@ -1984,7 +1989,7 @@
           <p:cNvPr id="9" name="">
             <a:extLst xmlns:a="http://schemas.openxmlformats.org/drawingml/2006/main">
               <a:ext uri="{FF2B5EF4-FFF2-40B4-BE49-F238E27FC236}">
-                <a16:creationId xmlns:a16="http://schemas.microsoft.com/office/drawing/2014/main" id="{60644898-68E0-4F47-BCDD-CFC89821CA8E}"/>
+                <a16:creationId xmlns:a16="http://schemas.microsoft.com/office/drawing/2014/main" id="{F65BF8C7-1E0F-4754-8C48-5A8EB720B021}"/>
               </a:ext>
             </a:extLst>
           </p:cNvPr>
@@ -2032,7 +2037,7 @@
                 <a:ea typeface="Microsoft YaHei"/>
                 <a:cs typeface="Microsoft YaHei"/>
               </a:rPr>
-              <a:t>150</a:t>
+              <a:t>155</a:t>
             </a:r>
           </a:p>
         </p:txBody>
@@ -2042,7 +2047,7 @@
           <p:cNvPr id="10" name="">
             <a:extLst xmlns:a="http://schemas.openxmlformats.org/drawingml/2006/main">
               <a:ext uri="{FF2B5EF4-FFF2-40B4-BE49-F238E27FC236}">
-                <a16:creationId xmlns:a16="http://schemas.microsoft.com/office/drawing/2014/main" id="{DB2C126C-5E82-4BA8-8341-214E4950AEFD}"/>
+                <a16:creationId xmlns:a16="http://schemas.microsoft.com/office/drawing/2014/main" id="{9A8D9FDB-6D57-48ED-A842-A1B873EDC10A}"/>
               </a:ext>
             </a:extLst>
           </p:cNvPr>
@@ -2100,7 +2105,7 @@
           <p:cNvPr id="11" name="">
             <a:extLst xmlns:a="http://schemas.openxmlformats.org/drawingml/2006/main">
               <a:ext uri="{FF2B5EF4-FFF2-40B4-BE49-F238E27FC236}">
-                <a16:creationId xmlns:a16="http://schemas.microsoft.com/office/drawing/2014/main" id="{C8E685AE-5AE2-4F6F-958B-49F8F167B4EF}"/>
+                <a16:creationId xmlns:a16="http://schemas.microsoft.com/office/drawing/2014/main" id="{4F2FFE91-D61A-4FCB-98B8-77F85047E208}"/>
               </a:ext>
             </a:extLst>
           </p:cNvPr>
@@ -2158,7 +2163,7 @@
           <p:cNvPr id="12" name="">
             <a:extLst xmlns:a="http://schemas.openxmlformats.org/drawingml/2006/main">
               <a:ext uri="{FF2B5EF4-FFF2-40B4-BE49-F238E27FC236}">
-                <a16:creationId xmlns:a16="http://schemas.microsoft.com/office/drawing/2014/main" id="{538C03FB-17E3-435F-88AF-E95F40B8B7DF}"/>
+                <a16:creationId xmlns:a16="http://schemas.microsoft.com/office/drawing/2014/main" id="{BAAEE12D-190D-4609-81D7-8FACAEFCAA58}"/>
               </a:ext>
             </a:extLst>
           </p:cNvPr>
@@ -2216,7 +2221,7 @@
           <p:cNvPr id="13" name="">
             <a:extLst xmlns:a="http://schemas.openxmlformats.org/drawingml/2006/main">
               <a:ext uri="{FF2B5EF4-FFF2-40B4-BE49-F238E27FC236}">
-                <a16:creationId xmlns:a16="http://schemas.microsoft.com/office/drawing/2014/main" id="{0C83CF3E-16F1-4F5F-B438-D0BD3292D1C7}"/>
+                <a16:creationId xmlns:a16="http://schemas.microsoft.com/office/drawing/2014/main" id="{7AEA7BB1-3644-497A-87A6-5746AE4F92B3}"/>
               </a:ext>
             </a:extLst>
           </p:cNvPr>
@@ -2274,7 +2279,7 @@
           <p:cNvPr id="14" name="">
             <a:extLst xmlns:a="http://schemas.openxmlformats.org/drawingml/2006/main">
               <a:ext uri="{FF2B5EF4-FFF2-40B4-BE49-F238E27FC236}">
-                <a16:creationId xmlns:a16="http://schemas.microsoft.com/office/drawing/2014/main" id="{CFC92971-993E-4CB4-B92B-821B5713039D}"/>
+                <a16:creationId xmlns:a16="http://schemas.microsoft.com/office/drawing/2014/main" id="{D74C587F-6B59-4EF4-8AA0-9EF6F2F73B1C}"/>
               </a:ext>
             </a:extLst>
           </p:cNvPr>
@@ -2332,7 +2337,7 @@
           <p:cNvPr id="15" name="">
             <a:extLst xmlns:a="http://schemas.openxmlformats.org/drawingml/2006/main">
               <a:ext uri="{FF2B5EF4-FFF2-40B4-BE49-F238E27FC236}">
-                <a16:creationId xmlns:a16="http://schemas.microsoft.com/office/drawing/2014/main" id="{39121691-488C-411D-A81B-6F48BD1C4594}"/>
+                <a16:creationId xmlns:a16="http://schemas.microsoft.com/office/drawing/2014/main" id="{4612E35B-9731-4E01-A6E1-AB068A40787A}"/>
               </a:ext>
             </a:extLst>
           </p:cNvPr>
@@ -2390,7 +2395,7 @@
           <p:cNvPr id="16" name="">
             <a:extLst xmlns:a="http://schemas.openxmlformats.org/drawingml/2006/main">
               <a:ext uri="{FF2B5EF4-FFF2-40B4-BE49-F238E27FC236}">
-                <a16:creationId xmlns:a16="http://schemas.microsoft.com/office/drawing/2014/main" id="{A4857B25-246C-4587-9C80-0849507D81C6}"/>
+                <a16:creationId xmlns:a16="http://schemas.microsoft.com/office/drawing/2014/main" id="{1B6F52F1-CE57-4225-BFFB-DC59571B2CD1}"/>
               </a:ext>
             </a:extLst>
           </p:cNvPr>
@@ -2446,7 +2451,7 @@
     </p:spTree>
     <p:extLst>
       <p:ext uri="{BB962C8B-B14F-4D97-AF65-F5344CB8AC3E}">
-        <p14:creationId xmlns:p14="http://schemas.microsoft.com/office/powerpoint/2010/main" val="688239225"/>
+        <p14:creationId xmlns:p14="http://schemas.microsoft.com/office/powerpoint/2010/main" val="157817072"/>
       </p:ext>
     </p:extLst>
   </p:cSld>
@@ -2477,7 +2482,7 @@
           <p:cNvPr id="35" name="">
             <a:extLst xmlns:a="http://schemas.openxmlformats.org/drawingml/2006/main">
               <a:ext uri="{FF2B5EF4-FFF2-40B4-BE49-F238E27FC236}">
-                <a16:creationId xmlns:a16="http://schemas.microsoft.com/office/drawing/2014/main" id="{DDB7E21E-AA61-4291-AD89-5D68C450A9A1}"/>
+                <a16:creationId xmlns:a16="http://schemas.microsoft.com/office/drawing/2014/main" id="{A5F55EA5-AF53-4CFD-8AA6-C0E5B4B7021D}"/>
               </a:ext>
             </a:extLst>
           </p:cNvPr>
@@ -2535,7 +2540,7 @@
           <p:cNvPr id="2" name="">
             <a:extLst xmlns:a="http://schemas.openxmlformats.org/drawingml/2006/main">
               <a:ext uri="{FF2B5EF4-FFF2-40B4-BE49-F238E27FC236}">
-                <a16:creationId xmlns:a16="http://schemas.microsoft.com/office/drawing/2014/main" id="{DA18D2B1-AD82-47D3-A8FC-E45DD55E4429}"/>
+                <a16:creationId xmlns:a16="http://schemas.microsoft.com/office/drawing/2014/main" id="{7CF3CAB5-6E21-495F-B8CE-3A049421A770}"/>
               </a:ext>
             </a:extLst>
           </p:cNvPr>
@@ -2568,7 +2573,7 @@
           <p:cNvPr id="3" name="">
             <a:extLst xmlns:a="http://schemas.openxmlformats.org/drawingml/2006/main">
               <a:ext uri="{FF2B5EF4-FFF2-40B4-BE49-F238E27FC236}">
-                <a16:creationId xmlns:a16="http://schemas.microsoft.com/office/drawing/2014/main" id="{142C4C03-B96B-48F1-8400-4ABE9588AE7E}"/>
+                <a16:creationId xmlns:a16="http://schemas.microsoft.com/office/drawing/2014/main" id="{36C64766-54DE-408D-B0C6-C7CD7D947054}"/>
               </a:ext>
             </a:extLst>
           </p:cNvPr>
@@ -2626,7 +2631,7 @@
           <p:cNvPr id="4" name="">
             <a:extLst xmlns:a="http://schemas.openxmlformats.org/drawingml/2006/main">
               <a:ext uri="{FF2B5EF4-FFF2-40B4-BE49-F238E27FC236}">
-                <a16:creationId xmlns:a16="http://schemas.microsoft.com/office/drawing/2014/main" id="{12C6DC45-A8AC-423B-AA68-C515F3030DF7}"/>
+                <a16:creationId xmlns:a16="http://schemas.microsoft.com/office/drawing/2014/main" id="{D303634E-BD4C-40AB-861F-62E249615076}"/>
               </a:ext>
             </a:extLst>
           </p:cNvPr>
@@ -2684,7 +2689,7 @@
           <p:cNvPr id="5" name="">
             <a:extLst xmlns:a="http://schemas.openxmlformats.org/drawingml/2006/main">
               <a:ext uri="{FF2B5EF4-FFF2-40B4-BE49-F238E27FC236}">
-                <a16:creationId xmlns:a16="http://schemas.microsoft.com/office/drawing/2014/main" id="{CD06B7CB-6260-4EFD-B87E-E65AA7BCD46D}"/>
+                <a16:creationId xmlns:a16="http://schemas.microsoft.com/office/drawing/2014/main" id="{5ED826B6-C587-44D6-925C-51771A151807}"/>
               </a:ext>
             </a:extLst>
           </p:cNvPr>
@@ -2742,7 +2747,7 @@
           <p:cNvPr id="6" name="">
             <a:extLst xmlns:a="http://schemas.openxmlformats.org/drawingml/2006/main">
               <a:ext uri="{FF2B5EF4-FFF2-40B4-BE49-F238E27FC236}">
-                <a16:creationId xmlns:a16="http://schemas.microsoft.com/office/drawing/2014/main" id="{1BE3BC0B-6FBD-407C-9E7D-F165C8182F73}"/>
+                <a16:creationId xmlns:a16="http://schemas.microsoft.com/office/drawing/2014/main" id="{6060F3E2-A320-4B8A-AFDE-83E3D64B1D06}"/>
               </a:ext>
             </a:extLst>
           </p:cNvPr>
@@ -2800,7 +2805,7 @@
           <p:cNvPr id="7" name="">
             <a:extLst xmlns:a="http://schemas.openxmlformats.org/drawingml/2006/main">
               <a:ext uri="{FF2B5EF4-FFF2-40B4-BE49-F238E27FC236}">
-                <a16:creationId xmlns:a16="http://schemas.microsoft.com/office/drawing/2014/main" id="{6FCB67A1-B820-44C4-BF15-341A6B4F0A35}"/>
+                <a16:creationId xmlns:a16="http://schemas.microsoft.com/office/drawing/2014/main" id="{0A88214A-E3EE-4C28-AFB8-D756137018B5}"/>
               </a:ext>
             </a:extLst>
           </p:cNvPr>
@@ -2858,7 +2863,7 @@
           <p:cNvPr id="8" name="">
             <a:extLst xmlns:a="http://schemas.openxmlformats.org/drawingml/2006/main">
               <a:ext uri="{FF2B5EF4-FFF2-40B4-BE49-F238E27FC236}">
-                <a16:creationId xmlns:a16="http://schemas.microsoft.com/office/drawing/2014/main" id="{7E6012ED-42FB-4991-858C-2EEB13E58140}"/>
+                <a16:creationId xmlns:a16="http://schemas.microsoft.com/office/drawing/2014/main" id="{090F45DA-9291-47F3-B03F-0FE3DD98A85D}"/>
               </a:ext>
             </a:extLst>
           </p:cNvPr>
@@ -2891,7 +2896,7 @@
           <p:cNvPr id="9" name="">
             <a:extLst xmlns:a="http://schemas.openxmlformats.org/drawingml/2006/main">
               <a:ext uri="{FF2B5EF4-FFF2-40B4-BE49-F238E27FC236}">
-                <a16:creationId xmlns:a16="http://schemas.microsoft.com/office/drawing/2014/main" id="{2878BABD-8E6E-416E-80E3-6DBA9D6BDB87}"/>
+                <a16:creationId xmlns:a16="http://schemas.microsoft.com/office/drawing/2014/main" id="{C953ADD1-626E-4C97-ABB5-DBD580F3C21A}"/>
               </a:ext>
             </a:extLst>
           </p:cNvPr>
@@ -2949,7 +2954,7 @@
           <p:cNvPr id="10" name="">
             <a:extLst xmlns:a="http://schemas.openxmlformats.org/drawingml/2006/main">
               <a:ext uri="{FF2B5EF4-FFF2-40B4-BE49-F238E27FC236}">
-                <a16:creationId xmlns:a16="http://schemas.microsoft.com/office/drawing/2014/main" id="{DF5746FE-389A-462C-A8FE-2725716E6A96}"/>
+                <a16:creationId xmlns:a16="http://schemas.microsoft.com/office/drawing/2014/main" id="{B330D847-7442-4D8B-877B-E236034D36DC}"/>
               </a:ext>
             </a:extLst>
           </p:cNvPr>
@@ -3007,7 +3012,7 @@
           <p:cNvPr id="11" name="">
             <a:extLst xmlns:a="http://schemas.openxmlformats.org/drawingml/2006/main">
               <a:ext uri="{FF2B5EF4-FFF2-40B4-BE49-F238E27FC236}">
-                <a16:creationId xmlns:a16="http://schemas.microsoft.com/office/drawing/2014/main" id="{90490ADC-6832-467B-82FC-8E43A8EFD534}"/>
+                <a16:creationId xmlns:a16="http://schemas.microsoft.com/office/drawing/2014/main" id="{07977503-0B0F-4EE9-ABE7-AA748F70A8C9}"/>
               </a:ext>
             </a:extLst>
           </p:cNvPr>
@@ -3040,7 +3045,7 @@
           <p:cNvPr id="12" name="">
             <a:extLst xmlns:a="http://schemas.openxmlformats.org/drawingml/2006/main">
               <a:ext uri="{FF2B5EF4-FFF2-40B4-BE49-F238E27FC236}">
-                <a16:creationId xmlns:a16="http://schemas.microsoft.com/office/drawing/2014/main" id="{A74E546B-56EB-45DC-8963-85DA08B07375}"/>
+                <a16:creationId xmlns:a16="http://schemas.microsoft.com/office/drawing/2014/main" id="{E78DB871-08EC-4154-89B4-19849CC91D5D}"/>
               </a:ext>
             </a:extLst>
           </p:cNvPr>
@@ -3098,7 +3103,7 @@
           <p:cNvPr id="13" name="">
             <a:extLst xmlns:a="http://schemas.openxmlformats.org/drawingml/2006/main">
               <a:ext uri="{FF2B5EF4-FFF2-40B4-BE49-F238E27FC236}">
-                <a16:creationId xmlns:a16="http://schemas.microsoft.com/office/drawing/2014/main" id="{9E1722F1-27C9-42BE-ABE9-7249A9A8A5DD}"/>
+                <a16:creationId xmlns:a16="http://schemas.microsoft.com/office/drawing/2014/main" id="{28B5118B-C554-4F38-998A-1A73FAB13AF6}"/>
               </a:ext>
             </a:extLst>
           </p:cNvPr>
@@ -3156,7 +3161,7 @@
           <p:cNvPr id="14" name="">
             <a:extLst xmlns:a="http://schemas.openxmlformats.org/drawingml/2006/main">
               <a:ext uri="{FF2B5EF4-FFF2-40B4-BE49-F238E27FC236}">
-                <a16:creationId xmlns:a16="http://schemas.microsoft.com/office/drawing/2014/main" id="{3160475A-EC11-44F1-8502-7158E5CF018E}"/>
+                <a16:creationId xmlns:a16="http://schemas.microsoft.com/office/drawing/2014/main" id="{468ABBA5-C66A-41C7-87A6-2AFB57B5B1D6}"/>
               </a:ext>
             </a:extLst>
           </p:cNvPr>
@@ -3189,7 +3194,7 @@
           <p:cNvPr id="15" name="">
             <a:extLst xmlns:a="http://schemas.openxmlformats.org/drawingml/2006/main">
               <a:ext uri="{FF2B5EF4-FFF2-40B4-BE49-F238E27FC236}">
-                <a16:creationId xmlns:a16="http://schemas.microsoft.com/office/drawing/2014/main" id="{9CE463A3-A34E-4E4D-B54D-1622490DD0DD}"/>
+                <a16:creationId xmlns:a16="http://schemas.microsoft.com/office/drawing/2014/main" id="{F26F93A4-A012-49BE-A4DD-65B2043A723E}"/>
               </a:ext>
             </a:extLst>
           </p:cNvPr>
@@ -3247,7 +3252,7 @@
           <p:cNvPr id="16" name="">
             <a:extLst xmlns:a="http://schemas.openxmlformats.org/drawingml/2006/main">
               <a:ext uri="{FF2B5EF4-FFF2-40B4-BE49-F238E27FC236}">
-                <a16:creationId xmlns:a16="http://schemas.microsoft.com/office/drawing/2014/main" id="{64195379-A5EB-4338-AF0F-8F7A127F8228}"/>
+                <a16:creationId xmlns:a16="http://schemas.microsoft.com/office/drawing/2014/main" id="{6AB0D989-2110-4E9E-9AD0-2AF657314733}"/>
               </a:ext>
             </a:extLst>
           </p:cNvPr>
@@ -3305,7 +3310,7 @@
           <p:cNvPr id="17" name="">
             <a:extLst xmlns:a="http://schemas.openxmlformats.org/drawingml/2006/main">
               <a:ext uri="{FF2B5EF4-FFF2-40B4-BE49-F238E27FC236}">
-                <a16:creationId xmlns:a16="http://schemas.microsoft.com/office/drawing/2014/main" id="{ED5E436B-867C-4D5D-947A-9BE37FD987D4}"/>
+                <a16:creationId xmlns:a16="http://schemas.microsoft.com/office/drawing/2014/main" id="{0CE9987B-AC28-4C05-8007-F80AFAB8DDD8}"/>
               </a:ext>
             </a:extLst>
           </p:cNvPr>
@@ -3338,7 +3343,7 @@
           <p:cNvPr id="18" name="">
             <a:extLst xmlns:a="http://schemas.openxmlformats.org/drawingml/2006/main">
               <a:ext uri="{FF2B5EF4-FFF2-40B4-BE49-F238E27FC236}">
-                <a16:creationId xmlns:a16="http://schemas.microsoft.com/office/drawing/2014/main" id="{6B69583E-D3A9-45B5-9F9A-7CB191DA8242}"/>
+                <a16:creationId xmlns:a16="http://schemas.microsoft.com/office/drawing/2014/main" id="{3C74165A-2296-49F3-B2C4-DE16576615EB}"/>
               </a:ext>
             </a:extLst>
           </p:cNvPr>
@@ -3396,7 +3401,7 @@
           <p:cNvPr id="19" name="">
             <a:extLst xmlns:a="http://schemas.openxmlformats.org/drawingml/2006/main">
               <a:ext uri="{FF2B5EF4-FFF2-40B4-BE49-F238E27FC236}">
-                <a16:creationId xmlns:a16="http://schemas.microsoft.com/office/drawing/2014/main" id="{DADF3D19-5A66-4259-BD29-4F58C895A613}"/>
+                <a16:creationId xmlns:a16="http://schemas.microsoft.com/office/drawing/2014/main" id="{B92A2B2B-A417-4A20-83DF-E1313F100026}"/>
               </a:ext>
             </a:extLst>
           </p:cNvPr>
@@ -3454,7 +3459,7 @@
           <p:cNvPr id="20" name="">
             <a:extLst xmlns:a="http://schemas.openxmlformats.org/drawingml/2006/main">
               <a:ext uri="{FF2B5EF4-FFF2-40B4-BE49-F238E27FC236}">
-                <a16:creationId xmlns:a16="http://schemas.microsoft.com/office/drawing/2014/main" id="{E95844D5-9AF8-460A-A321-F7F34AF4AB8C}"/>
+                <a16:creationId xmlns:a16="http://schemas.microsoft.com/office/drawing/2014/main" id="{AF0105E1-2488-4D15-9CCE-95406ADCF271}"/>
               </a:ext>
             </a:extLst>
           </p:cNvPr>
@@ -3487,7 +3492,7 @@
           <p:cNvPr id="21" name="">
             <a:extLst xmlns:a="http://schemas.openxmlformats.org/drawingml/2006/main">
               <a:ext uri="{FF2B5EF4-FFF2-40B4-BE49-F238E27FC236}">
-                <a16:creationId xmlns:a16="http://schemas.microsoft.com/office/drawing/2014/main" id="{6B976874-5D44-42C3-A9E3-178268568D9C}"/>
+                <a16:creationId xmlns:a16="http://schemas.microsoft.com/office/drawing/2014/main" id="{88A08DA0-A74C-4F58-8BAE-36483F9D2DB1}"/>
               </a:ext>
             </a:extLst>
           </p:cNvPr>
@@ -3545,7 +3550,7 @@
           <p:cNvPr id="22" name="">
             <a:extLst xmlns:a="http://schemas.openxmlformats.org/drawingml/2006/main">
               <a:ext uri="{FF2B5EF4-FFF2-40B4-BE49-F238E27FC236}">
-                <a16:creationId xmlns:a16="http://schemas.microsoft.com/office/drawing/2014/main" id="{B4EE49CB-C96C-4C68-91D3-148FE84BD608}"/>
+                <a16:creationId xmlns:a16="http://schemas.microsoft.com/office/drawing/2014/main" id="{1DCE4299-616C-4823-B7A3-126F023D588F}"/>
               </a:ext>
             </a:extLst>
           </p:cNvPr>
@@ -3603,7 +3608,7 @@
           <p:cNvPr id="23" name="">
             <a:extLst xmlns:a="http://schemas.openxmlformats.org/drawingml/2006/main">
               <a:ext uri="{FF2B5EF4-FFF2-40B4-BE49-F238E27FC236}">
-                <a16:creationId xmlns:a16="http://schemas.microsoft.com/office/drawing/2014/main" id="{531AB121-BC61-4E21-BB98-4CD2F5E8E2B4}"/>
+                <a16:creationId xmlns:a16="http://schemas.microsoft.com/office/drawing/2014/main" id="{D86A14F9-A862-487A-BD8A-EDF692507882}"/>
               </a:ext>
             </a:extLst>
           </p:cNvPr>
@@ -3661,7 +3666,7 @@
           <p:cNvPr id="24" name="">
             <a:extLst xmlns:a="http://schemas.openxmlformats.org/drawingml/2006/main">
               <a:ext uri="{FF2B5EF4-FFF2-40B4-BE49-F238E27FC236}">
-                <a16:creationId xmlns:a16="http://schemas.microsoft.com/office/drawing/2014/main" id="{526CEB1E-4B83-48A8-9CC2-77AC61FA22B0}"/>
+                <a16:creationId xmlns:a16="http://schemas.microsoft.com/office/drawing/2014/main" id="{66F3D227-1CDE-4B8A-A93C-86536AA48361}"/>
               </a:ext>
             </a:extLst>
           </p:cNvPr>
@@ -3694,7 +3699,7 @@
           <p:cNvPr id="25" name="">
             <a:extLst xmlns:a="http://schemas.openxmlformats.org/drawingml/2006/main">
               <a:ext uri="{FF2B5EF4-FFF2-40B4-BE49-F238E27FC236}">
-                <a16:creationId xmlns:a16="http://schemas.microsoft.com/office/drawing/2014/main" id="{0A82C6DE-A9BD-4707-BE11-991B060E8A72}"/>
+                <a16:creationId xmlns:a16="http://schemas.microsoft.com/office/drawing/2014/main" id="{F208D4A7-F87A-4D31-A1BC-73BAAD6E18E3}"/>
               </a:ext>
             </a:extLst>
           </p:cNvPr>
@@ -3727,7 +3732,7 @@
           <p:cNvPr id="26" name="">
             <a:extLst xmlns:a="http://schemas.openxmlformats.org/drawingml/2006/main">
               <a:ext uri="{FF2B5EF4-FFF2-40B4-BE49-F238E27FC236}">
-                <a16:creationId xmlns:a16="http://schemas.microsoft.com/office/drawing/2014/main" id="{61255090-6597-4BE4-8210-43C4E270A644}"/>
+                <a16:creationId xmlns:a16="http://schemas.microsoft.com/office/drawing/2014/main" id="{E08F667E-1CAA-4EDF-BC4A-34E421E01E25}"/>
               </a:ext>
             </a:extLst>
           </p:cNvPr>
@@ -3785,7 +3790,7 @@
           <p:cNvPr id="27" name="">
             <a:extLst xmlns:a="http://schemas.openxmlformats.org/drawingml/2006/main">
               <a:ext uri="{FF2B5EF4-FFF2-40B4-BE49-F238E27FC236}">
-                <a16:creationId xmlns:a16="http://schemas.microsoft.com/office/drawing/2014/main" id="{D8F52740-CE49-4B7A-9D1B-ED7E925421E3}"/>
+                <a16:creationId xmlns:a16="http://schemas.microsoft.com/office/drawing/2014/main" id="{E8DAAF36-47B2-4FAA-B18E-0C091CDC25BA}"/>
               </a:ext>
             </a:extLst>
           </p:cNvPr>
@@ -3866,7 +3871,7 @@
           <p:cNvPr id="28" name="">
             <a:extLst xmlns:a="http://schemas.openxmlformats.org/drawingml/2006/main">
               <a:ext uri="{FF2B5EF4-FFF2-40B4-BE49-F238E27FC236}">
-                <a16:creationId xmlns:a16="http://schemas.microsoft.com/office/drawing/2014/main" id="{1D6535CC-23F2-48A6-8EA3-C1B35E03B2F2}"/>
+                <a16:creationId xmlns:a16="http://schemas.microsoft.com/office/drawing/2014/main" id="{DC93823B-FEDB-4FC9-A8F9-E55DA4B85905}"/>
               </a:ext>
             </a:extLst>
           </p:cNvPr>
@@ -3899,7 +3904,7 @@
           <p:cNvPr id="29" name="">
             <a:extLst xmlns:a="http://schemas.openxmlformats.org/drawingml/2006/main">
               <a:ext uri="{FF2B5EF4-FFF2-40B4-BE49-F238E27FC236}">
-                <a16:creationId xmlns:a16="http://schemas.microsoft.com/office/drawing/2014/main" id="{192AE9B4-F35B-4D5C-A092-D2627D0558A3}"/>
+                <a16:creationId xmlns:a16="http://schemas.microsoft.com/office/drawing/2014/main" id="{01F7BCDA-55E7-4083-AD21-78D228707FAB}"/>
               </a:ext>
             </a:extLst>
           </p:cNvPr>
@@ -3957,7 +3962,7 @@
           <p:cNvPr id="30" name="">
             <a:extLst xmlns:a="http://schemas.openxmlformats.org/drawingml/2006/main">
               <a:ext uri="{FF2B5EF4-FFF2-40B4-BE49-F238E27FC236}">
-                <a16:creationId xmlns:a16="http://schemas.microsoft.com/office/drawing/2014/main" id="{925663DB-3948-4600-A12A-F61ACBE39497}"/>
+                <a16:creationId xmlns:a16="http://schemas.microsoft.com/office/drawing/2014/main" id="{9B5C1A53-4230-4263-89FE-D3BCF6AF7680}"/>
               </a:ext>
             </a:extLst>
           </p:cNvPr>
@@ -4038,7 +4043,7 @@
           <p:cNvPr id="31" name="">
             <a:extLst xmlns:a="http://schemas.openxmlformats.org/drawingml/2006/main">
               <a:ext uri="{FF2B5EF4-FFF2-40B4-BE49-F238E27FC236}">
-                <a16:creationId xmlns:a16="http://schemas.microsoft.com/office/drawing/2014/main" id="{2D29BD14-F80B-4023-AC54-3654F7CCA379}"/>
+                <a16:creationId xmlns:a16="http://schemas.microsoft.com/office/drawing/2014/main" id="{3B3D57A4-0391-4AAC-830E-9D11F8FDAFA3}"/>
               </a:ext>
             </a:extLst>
           </p:cNvPr>
@@ -4071,7 +4076,7 @@
           <p:cNvPr id="32" name="">
             <a:extLst xmlns:a="http://schemas.openxmlformats.org/drawingml/2006/main">
               <a:ext uri="{FF2B5EF4-FFF2-40B4-BE49-F238E27FC236}">
-                <a16:creationId xmlns:a16="http://schemas.microsoft.com/office/drawing/2014/main" id="{10F0898E-6108-41FC-8CDF-D0D5485792F6}"/>
+                <a16:creationId xmlns:a16="http://schemas.microsoft.com/office/drawing/2014/main" id="{E9EA13FB-1302-47EA-82C8-67408722D83A}"/>
               </a:ext>
             </a:extLst>
           </p:cNvPr>
@@ -4129,7 +4134,7 @@
           <p:cNvPr id="33" name="">
             <a:extLst xmlns:a="http://schemas.openxmlformats.org/drawingml/2006/main">
               <a:ext uri="{FF2B5EF4-FFF2-40B4-BE49-F238E27FC236}">
-                <a16:creationId xmlns:a16="http://schemas.microsoft.com/office/drawing/2014/main" id="{D7F8395D-CD95-429C-9B01-0CBCD6AD26C8}"/>
+                <a16:creationId xmlns:a16="http://schemas.microsoft.com/office/drawing/2014/main" id="{ECDFAC1D-62C0-4D94-827E-7F7547300CAC}"/>
               </a:ext>
             </a:extLst>
           </p:cNvPr>
@@ -4210,7 +4215,7 @@
           <p:cNvPr id="34" name="">
             <a:extLst xmlns:a="http://schemas.openxmlformats.org/drawingml/2006/main">
               <a:ext uri="{FF2B5EF4-FFF2-40B4-BE49-F238E27FC236}">
-                <a16:creationId xmlns:a16="http://schemas.microsoft.com/office/drawing/2014/main" id="{B59A583A-0333-48DD-928B-71C8CAA621F5}"/>
+                <a16:creationId xmlns:a16="http://schemas.microsoft.com/office/drawing/2014/main" id="{DBEF1A62-8568-4874-AB8B-9797D4D87767}"/>
               </a:ext>
             </a:extLst>
           </p:cNvPr>
@@ -4266,7 +4271,7 @@
     </p:spTree>
     <p:extLst>
       <p:ext uri="{BB962C8B-B14F-4D97-AF65-F5344CB8AC3E}">
-        <p14:creationId xmlns:p14="http://schemas.microsoft.com/office/powerpoint/2010/main" val="506377417"/>
+        <p14:creationId xmlns:p14="http://schemas.microsoft.com/office/powerpoint/2010/main" val="1668392250"/>
       </p:ext>
     </p:extLst>
   </p:cSld>
@@ -4297,7 +4302,7 @@
           <p:cNvPr id="16" name="">
             <a:extLst xmlns:a="http://schemas.openxmlformats.org/drawingml/2006/main">
               <a:ext uri="{FF2B5EF4-FFF2-40B4-BE49-F238E27FC236}">
-                <a16:creationId xmlns:a16="http://schemas.microsoft.com/office/drawing/2014/main" id="{1FDB83B9-2903-445D-9211-BECEFF4B4924}"/>
+                <a16:creationId xmlns:a16="http://schemas.microsoft.com/office/drawing/2014/main" id="{0BB9B6E1-9BA7-48AA-A281-C9C528B43C14}"/>
               </a:ext>
             </a:extLst>
           </p:cNvPr>
@@ -4355,7 +4360,7 @@
           <p:cNvPr id="2" name="">
             <a:extLst xmlns:a="http://schemas.openxmlformats.org/drawingml/2006/main">
               <a:ext uri="{FF2B5EF4-FFF2-40B4-BE49-F238E27FC236}">
-                <a16:creationId xmlns:a16="http://schemas.microsoft.com/office/drawing/2014/main" id="{460260FD-DC05-46CF-9872-1CD8BD5224D1}"/>
+                <a16:creationId xmlns:a16="http://schemas.microsoft.com/office/drawing/2014/main" id="{0772511C-7E80-4B8B-B3E0-AAFE4B781022}"/>
               </a:ext>
             </a:extLst>
           </p:cNvPr>
@@ -4388,7 +4393,7 @@
           <p:cNvPr id="3" name="">
             <a:extLst xmlns:a="http://schemas.openxmlformats.org/drawingml/2006/main">
               <a:ext uri="{FF2B5EF4-FFF2-40B4-BE49-F238E27FC236}">
-                <a16:creationId xmlns:a16="http://schemas.microsoft.com/office/drawing/2014/main" id="{A40AA676-B122-4BCF-9A8D-75EE99EBD0FE}"/>
+                <a16:creationId xmlns:a16="http://schemas.microsoft.com/office/drawing/2014/main" id="{31404D11-50CA-47D0-8173-723CF5F792B5}"/>
               </a:ext>
             </a:extLst>
           </p:cNvPr>
@@ -4446,7 +4451,7 @@
           <p:cNvPr id="4" name="">
             <a:extLst xmlns:a="http://schemas.openxmlformats.org/drawingml/2006/main">
               <a:ext uri="{FF2B5EF4-FFF2-40B4-BE49-F238E27FC236}">
-                <a16:creationId xmlns:a16="http://schemas.microsoft.com/office/drawing/2014/main" id="{109837D6-0B56-4CA6-B605-865380BF348C}"/>
+                <a16:creationId xmlns:a16="http://schemas.microsoft.com/office/drawing/2014/main" id="{A259ABEC-3BE0-461F-9959-78F1D1A65E3D}"/>
               </a:ext>
             </a:extLst>
           </p:cNvPr>
@@ -4504,7 +4509,7 @@
           <p:cNvPr id="5" name="">
             <a:extLst xmlns:a="http://schemas.openxmlformats.org/drawingml/2006/main">
               <a:ext uri="{FF2B5EF4-FFF2-40B4-BE49-F238E27FC236}">
-                <a16:creationId xmlns:a16="http://schemas.microsoft.com/office/drawing/2014/main" id="{BFB2FFC4-0882-4966-B743-113267CB8551}"/>
+                <a16:creationId xmlns:a16="http://schemas.microsoft.com/office/drawing/2014/main" id="{3A63A875-33C9-4A37-80B4-6B4085DC238E}"/>
               </a:ext>
             </a:extLst>
           </p:cNvPr>
@@ -4541,7 +4546,7 @@
           <p:nvPr/>
         </p:nvPicPr>
         <p:blipFill>
-          <a:blip xmlns:r="http://schemas.openxmlformats.org/officeDocument/2006/relationships" xmlns:a="http://schemas.openxmlformats.org/drawingml/2006/main" r:embed="R51cbd36ea3f34d7f"/>
+          <a:blip xmlns:r="http://schemas.openxmlformats.org/officeDocument/2006/relationships" xmlns:a="http://schemas.openxmlformats.org/drawingml/2006/main" r:embed="Rb5dcaac975d949d0"/>
           <a:stretch xmlns:a="http://schemas.openxmlformats.org/drawingml/2006/main"/>
         </p:blipFill>
         <p:spPr>
@@ -4559,7 +4564,7 @@
           <p:cNvPr id="7" name="">
             <a:extLst xmlns:a="http://schemas.openxmlformats.org/drawingml/2006/main">
               <a:ext uri="{FF2B5EF4-FFF2-40B4-BE49-F238E27FC236}">
-                <a16:creationId xmlns:a16="http://schemas.microsoft.com/office/drawing/2014/main" id="{A302D241-403F-4B4F-99FC-E1FA3DA8906C}"/>
+                <a16:creationId xmlns:a16="http://schemas.microsoft.com/office/drawing/2014/main" id="{D4943AD9-9EE6-46F0-86C8-FF0933E08EA7}"/>
               </a:ext>
             </a:extLst>
           </p:cNvPr>
@@ -4617,7 +4622,7 @@
           <p:cNvPr id="8" name="">
             <a:extLst xmlns:a="http://schemas.openxmlformats.org/drawingml/2006/main">
               <a:ext uri="{FF2B5EF4-FFF2-40B4-BE49-F238E27FC236}">
-                <a16:creationId xmlns:a16="http://schemas.microsoft.com/office/drawing/2014/main" id="{B3575FEA-0D23-4E84-96AC-40D07467C6D2}"/>
+                <a16:creationId xmlns:a16="http://schemas.microsoft.com/office/drawing/2014/main" id="{EE7F030D-AE88-4ED7-9CF5-4B6BA397F31F}"/>
               </a:ext>
             </a:extLst>
           </p:cNvPr>
@@ -4721,7 +4726,7 @@
           <p:cNvPr id="9" name="">
             <a:extLst xmlns:a="http://schemas.openxmlformats.org/drawingml/2006/main">
               <a:ext uri="{FF2B5EF4-FFF2-40B4-BE49-F238E27FC236}">
-                <a16:creationId xmlns:a16="http://schemas.microsoft.com/office/drawing/2014/main" id="{82A2EE33-9EBA-48F3-B8AF-CD0F30DD7590}"/>
+                <a16:creationId xmlns:a16="http://schemas.microsoft.com/office/drawing/2014/main" id="{E4F3911F-9794-4D68-9391-E34D1DBE36DF}"/>
               </a:ext>
             </a:extLst>
           </p:cNvPr>
@@ -4754,7 +4759,7 @@
           <p:cNvPr id="10" name="">
             <a:extLst xmlns:a="http://schemas.openxmlformats.org/drawingml/2006/main">
               <a:ext uri="{FF2B5EF4-FFF2-40B4-BE49-F238E27FC236}">
-                <a16:creationId xmlns:a16="http://schemas.microsoft.com/office/drawing/2014/main" id="{6C6797BF-A5FA-44D4-BE96-C62637786CC6}"/>
+                <a16:creationId xmlns:a16="http://schemas.microsoft.com/office/drawing/2014/main" id="{D1F4DA3F-C905-4048-8025-567AA4770051}"/>
               </a:ext>
             </a:extLst>
           </p:cNvPr>
@@ -4812,7 +4817,7 @@
           <p:cNvPr id="11" name="">
             <a:extLst xmlns:a="http://schemas.openxmlformats.org/drawingml/2006/main">
               <a:ext uri="{FF2B5EF4-FFF2-40B4-BE49-F238E27FC236}">
-                <a16:creationId xmlns:a16="http://schemas.microsoft.com/office/drawing/2014/main" id="{40386A56-72E8-4786-9C75-CE31007BB0A9}"/>
+                <a16:creationId xmlns:a16="http://schemas.microsoft.com/office/drawing/2014/main" id="{86CAD0EE-AC7F-4B7A-AFBC-D424E619AE97}"/>
               </a:ext>
             </a:extLst>
           </p:cNvPr>
@@ -4870,7 +4875,7 @@
           <p:cNvPr id="12" name="">
             <a:extLst xmlns:a="http://schemas.openxmlformats.org/drawingml/2006/main">
               <a:ext uri="{FF2B5EF4-FFF2-40B4-BE49-F238E27FC236}">
-                <a16:creationId xmlns:a16="http://schemas.microsoft.com/office/drawing/2014/main" id="{EB5C51CD-0C1A-4F10-8141-804E1E3DA345}"/>
+                <a16:creationId xmlns:a16="http://schemas.microsoft.com/office/drawing/2014/main" id="{B0A2C1E2-30A8-49E5-BD55-5D63DDABFCDC}"/>
               </a:ext>
             </a:extLst>
           </p:cNvPr>
@@ -4928,7 +4933,7 @@
           <p:cNvPr id="13" name="">
             <a:extLst xmlns:a="http://schemas.openxmlformats.org/drawingml/2006/main">
               <a:ext uri="{FF2B5EF4-FFF2-40B4-BE49-F238E27FC236}">
-                <a16:creationId xmlns:a16="http://schemas.microsoft.com/office/drawing/2014/main" id="{3CEC3617-A663-4410-A707-69F1058D97A8}"/>
+                <a16:creationId xmlns:a16="http://schemas.microsoft.com/office/drawing/2014/main" id="{A501C40F-E229-44D6-A4F9-FEC0C7FAC721}"/>
               </a:ext>
             </a:extLst>
           </p:cNvPr>
@@ -4986,7 +4991,7 @@
           <p:cNvPr id="14" name="">
             <a:extLst xmlns:a="http://schemas.openxmlformats.org/drawingml/2006/main">
               <a:ext uri="{FF2B5EF4-FFF2-40B4-BE49-F238E27FC236}">
-                <a16:creationId xmlns:a16="http://schemas.microsoft.com/office/drawing/2014/main" id="{626B9001-C94F-4C08-B204-BAB737889568}"/>
+                <a16:creationId xmlns:a16="http://schemas.microsoft.com/office/drawing/2014/main" id="{49267DAA-9842-4AD0-ADB4-2046D1D38433}"/>
               </a:ext>
             </a:extLst>
           </p:cNvPr>
@@ -5044,7 +5049,7 @@
           <p:cNvPr id="15" name="">
             <a:extLst xmlns:a="http://schemas.openxmlformats.org/drawingml/2006/main">
               <a:ext uri="{FF2B5EF4-FFF2-40B4-BE49-F238E27FC236}">
-                <a16:creationId xmlns:a16="http://schemas.microsoft.com/office/drawing/2014/main" id="{44117B6E-C098-4939-A4D8-258AD7DACCE0}"/>
+                <a16:creationId xmlns:a16="http://schemas.microsoft.com/office/drawing/2014/main" id="{02C6E361-ED7F-4DAF-8E5B-BC44F2F02AB5}"/>
               </a:ext>
             </a:extLst>
           </p:cNvPr>
@@ -5100,7 +5105,7 @@
     </p:spTree>
     <p:extLst>
       <p:ext uri="{BB962C8B-B14F-4D97-AF65-F5344CB8AC3E}">
-        <p14:creationId xmlns:p14="http://schemas.microsoft.com/office/powerpoint/2010/main" val="695730236"/>
+        <p14:creationId xmlns:p14="http://schemas.microsoft.com/office/powerpoint/2010/main" val="1889675316"/>
       </p:ext>
     </p:extLst>
   </p:cSld>
@@ -5131,7 +5136,7 @@
           <p:cNvPr id="19" name="">
             <a:extLst xmlns:a="http://schemas.openxmlformats.org/drawingml/2006/main">
               <a:ext uri="{FF2B5EF4-FFF2-40B4-BE49-F238E27FC236}">
-                <a16:creationId xmlns:a16="http://schemas.microsoft.com/office/drawing/2014/main" id="{19E69356-7951-4928-884A-037A0498AB81}"/>
+                <a16:creationId xmlns:a16="http://schemas.microsoft.com/office/drawing/2014/main" id="{EECD7789-55A1-4C50-8A83-6A4277EAC835}"/>
               </a:ext>
             </a:extLst>
           </p:cNvPr>
@@ -5189,7 +5194,7 @@
           <p:cNvPr id="2" name="">
             <a:extLst xmlns:a="http://schemas.openxmlformats.org/drawingml/2006/main">
               <a:ext uri="{FF2B5EF4-FFF2-40B4-BE49-F238E27FC236}">
-                <a16:creationId xmlns:a16="http://schemas.microsoft.com/office/drawing/2014/main" id="{1110B661-4B6F-4002-A0EB-92B619EE49DD}"/>
+                <a16:creationId xmlns:a16="http://schemas.microsoft.com/office/drawing/2014/main" id="{2E7A5DEB-57AD-41E0-9934-BE77048D0465}"/>
               </a:ext>
             </a:extLst>
           </p:cNvPr>
@@ -5222,7 +5227,7 @@
           <p:cNvPr id="3" name="">
             <a:extLst xmlns:a="http://schemas.openxmlformats.org/drawingml/2006/main">
               <a:ext uri="{FF2B5EF4-FFF2-40B4-BE49-F238E27FC236}">
-                <a16:creationId xmlns:a16="http://schemas.microsoft.com/office/drawing/2014/main" id="{1650FC39-29F2-4256-A8AB-6D93FB5B2102}"/>
+                <a16:creationId xmlns:a16="http://schemas.microsoft.com/office/drawing/2014/main" id="{830AFC8B-DAA9-4084-9207-39BC7F38AD31}"/>
               </a:ext>
             </a:extLst>
           </p:cNvPr>
@@ -5280,7 +5285,7 @@
           <p:cNvPr id="4" name="">
             <a:extLst xmlns:a="http://schemas.openxmlformats.org/drawingml/2006/main">
               <a:ext uri="{FF2B5EF4-FFF2-40B4-BE49-F238E27FC236}">
-                <a16:creationId xmlns:a16="http://schemas.microsoft.com/office/drawing/2014/main" id="{2BF28A86-451C-4F63-BAD7-16280BE09541}"/>
+                <a16:creationId xmlns:a16="http://schemas.microsoft.com/office/drawing/2014/main" id="{7DD611C0-70B6-4475-9E79-26099F13509B}"/>
               </a:ext>
             </a:extLst>
           </p:cNvPr>
@@ -5338,7 +5343,7 @@
           <p:cNvPr id="5" name="">
             <a:extLst xmlns:a="http://schemas.openxmlformats.org/drawingml/2006/main">
               <a:ext uri="{FF2B5EF4-FFF2-40B4-BE49-F238E27FC236}">
-                <a16:creationId xmlns:a16="http://schemas.microsoft.com/office/drawing/2014/main" id="{CFA4CA24-0DEC-43F6-B3BB-3E5B6B8264A0}"/>
+                <a16:creationId xmlns:a16="http://schemas.microsoft.com/office/drawing/2014/main" id="{79CB831C-F598-43C2-8DC5-8120A296009E}"/>
               </a:ext>
             </a:extLst>
           </p:cNvPr>
@@ -5396,7 +5401,7 @@
           <p:cNvPr id="6" name="">
             <a:extLst xmlns:a="http://schemas.openxmlformats.org/drawingml/2006/main">
               <a:ext uri="{FF2B5EF4-FFF2-40B4-BE49-F238E27FC236}">
-                <a16:creationId xmlns:a16="http://schemas.microsoft.com/office/drawing/2014/main" id="{7F86CD93-FADC-40B1-B628-70AFFBBBFC7A}"/>
+                <a16:creationId xmlns:a16="http://schemas.microsoft.com/office/drawing/2014/main" id="{DF5244A6-6A8C-47C6-95CC-3F02074EAEAA}"/>
               </a:ext>
             </a:extLst>
           </p:cNvPr>
@@ -5454,7 +5459,7 @@
           <p:cNvPr id="7" name="">
             <a:extLst xmlns:a="http://schemas.openxmlformats.org/drawingml/2006/main">
               <a:ext uri="{FF2B5EF4-FFF2-40B4-BE49-F238E27FC236}">
-                <a16:creationId xmlns:a16="http://schemas.microsoft.com/office/drawing/2014/main" id="{EA3C0EFE-1629-4302-99BB-130E74D6D6AB}"/>
+                <a16:creationId xmlns:a16="http://schemas.microsoft.com/office/drawing/2014/main" id="{6411D79B-BE17-458E-9D52-9AAC4679D2A0}"/>
               </a:ext>
             </a:extLst>
           </p:cNvPr>
@@ -5512,7 +5517,7 @@
           <p:cNvPr id="8" name="">
             <a:extLst xmlns:a="http://schemas.openxmlformats.org/drawingml/2006/main">
               <a:ext uri="{FF2B5EF4-FFF2-40B4-BE49-F238E27FC236}">
-                <a16:creationId xmlns:a16="http://schemas.microsoft.com/office/drawing/2014/main" id="{726AC711-6A13-4713-99A0-A42B45B8B8D2}"/>
+                <a16:creationId xmlns:a16="http://schemas.microsoft.com/office/drawing/2014/main" id="{85FCEE63-F909-47FC-A034-DC92E33E8FEA}"/>
               </a:ext>
             </a:extLst>
           </p:cNvPr>
@@ -5570,7 +5575,7 @@
           <p:cNvPr id="9" name="">
             <a:extLst xmlns:a="http://schemas.openxmlformats.org/drawingml/2006/main">
               <a:ext uri="{FF2B5EF4-FFF2-40B4-BE49-F238E27FC236}">
-                <a16:creationId xmlns:a16="http://schemas.microsoft.com/office/drawing/2014/main" id="{78D07605-27E4-4D12-A7C0-73BA92CAE5FD}"/>
+                <a16:creationId xmlns:a16="http://schemas.microsoft.com/office/drawing/2014/main" id="{45B2D879-4DC8-4591-ADA9-97526311A2AA}"/>
               </a:ext>
             </a:extLst>
           </p:cNvPr>
@@ -5628,7 +5633,7 @@
           <p:cNvPr id="10" name="">
             <a:extLst xmlns:a="http://schemas.openxmlformats.org/drawingml/2006/main">
               <a:ext uri="{FF2B5EF4-FFF2-40B4-BE49-F238E27FC236}">
-                <a16:creationId xmlns:a16="http://schemas.microsoft.com/office/drawing/2014/main" id="{65DE2F5C-130E-4123-B173-461E63889F65}"/>
+                <a16:creationId xmlns:a16="http://schemas.microsoft.com/office/drawing/2014/main" id="{48FEAFD0-B605-47D0-ACD6-D6CF38A26DD3}"/>
               </a:ext>
             </a:extLst>
           </p:cNvPr>
@@ -5665,7 +5670,7 @@
           <p:nvPr/>
         </p:nvPicPr>
         <p:blipFill>
-          <a:blip xmlns:r="http://schemas.openxmlformats.org/officeDocument/2006/relationships" xmlns:a="http://schemas.openxmlformats.org/drawingml/2006/main" r:embed="Rf9c9bf18d40941f4"/>
+          <a:blip xmlns:r="http://schemas.openxmlformats.org/officeDocument/2006/relationships" xmlns:a="http://schemas.openxmlformats.org/drawingml/2006/main" r:embed="Rcc4aad187755488e"/>
           <a:stretch xmlns:a="http://schemas.openxmlformats.org/drawingml/2006/main"/>
         </p:blipFill>
         <p:spPr>
@@ -5683,7 +5688,7 @@
           <p:cNvPr id="12" name="">
             <a:extLst xmlns:a="http://schemas.openxmlformats.org/drawingml/2006/main">
               <a:ext uri="{FF2B5EF4-FFF2-40B4-BE49-F238E27FC236}">
-                <a16:creationId xmlns:a16="http://schemas.microsoft.com/office/drawing/2014/main" id="{DD9BE811-EDD4-40AE-B49C-ACD2AA17746C}"/>
+                <a16:creationId xmlns:a16="http://schemas.microsoft.com/office/drawing/2014/main" id="{483ABE6C-121E-4613-9C64-8C03DA3A9E23}"/>
               </a:ext>
             </a:extLst>
           </p:cNvPr>
@@ -5741,7 +5746,7 @@
           <p:cNvPr id="13" name="">
             <a:extLst xmlns:a="http://schemas.openxmlformats.org/drawingml/2006/main">
               <a:ext uri="{FF2B5EF4-FFF2-40B4-BE49-F238E27FC236}">
-                <a16:creationId xmlns:a16="http://schemas.microsoft.com/office/drawing/2014/main" id="{940F3037-81F8-4C33-9112-6F66E5693992}"/>
+                <a16:creationId xmlns:a16="http://schemas.microsoft.com/office/drawing/2014/main" id="{62DF8A32-CD80-48D1-96BC-AFA005F44B49}"/>
               </a:ext>
             </a:extLst>
           </p:cNvPr>
@@ -5799,7 +5804,7 @@
           <p:cNvPr id="14" name="">
             <a:extLst xmlns:a="http://schemas.openxmlformats.org/drawingml/2006/main">
               <a:ext uri="{FF2B5EF4-FFF2-40B4-BE49-F238E27FC236}">
-                <a16:creationId xmlns:a16="http://schemas.microsoft.com/office/drawing/2014/main" id="{F003CDAC-FC49-403A-BD8E-B0C8AA10790F}"/>
+                <a16:creationId xmlns:a16="http://schemas.microsoft.com/office/drawing/2014/main" id="{71024D6E-A664-4BC7-91C4-75B76B4952BA}"/>
               </a:ext>
             </a:extLst>
           </p:cNvPr>
@@ -5926,7 +5931,7 @@
           <p:cNvPr id="15" name="">
             <a:extLst xmlns:a="http://schemas.openxmlformats.org/drawingml/2006/main">
               <a:ext uri="{FF2B5EF4-FFF2-40B4-BE49-F238E27FC236}">
-                <a16:creationId xmlns:a16="http://schemas.microsoft.com/office/drawing/2014/main" id="{0F176BD1-EEAE-4ADD-9330-3CDA2621FD94}"/>
+                <a16:creationId xmlns:a16="http://schemas.microsoft.com/office/drawing/2014/main" id="{2527DF91-CEE2-47A9-97E0-9FB331389014}"/>
               </a:ext>
             </a:extLst>
           </p:cNvPr>
@@ -5959,7 +5964,7 @@
           <p:cNvPr id="16" name="">
             <a:extLst xmlns:a="http://schemas.openxmlformats.org/drawingml/2006/main">
               <a:ext uri="{FF2B5EF4-FFF2-40B4-BE49-F238E27FC236}">
-                <a16:creationId xmlns:a16="http://schemas.microsoft.com/office/drawing/2014/main" id="{2F49BEBF-E0AA-4B08-A71E-651E5DD4E06D}"/>
+                <a16:creationId xmlns:a16="http://schemas.microsoft.com/office/drawing/2014/main" id="{1BF68861-046C-4CDE-90D0-AC3D90BB24D1}"/>
               </a:ext>
             </a:extLst>
           </p:cNvPr>
@@ -6017,7 +6022,7 @@
           <p:cNvPr id="17" name="">
             <a:extLst xmlns:a="http://schemas.openxmlformats.org/drawingml/2006/main">
               <a:ext uri="{FF2B5EF4-FFF2-40B4-BE49-F238E27FC236}">
-                <a16:creationId xmlns:a16="http://schemas.microsoft.com/office/drawing/2014/main" id="{5E5FCA15-E280-44A1-86AF-ED555464F753}"/>
+                <a16:creationId xmlns:a16="http://schemas.microsoft.com/office/drawing/2014/main" id="{4E682970-4B39-4164-AAF7-89CEADBF91B0}"/>
               </a:ext>
             </a:extLst>
           </p:cNvPr>
@@ -6075,7 +6080,7 @@
           <p:cNvPr id="18" name="">
             <a:extLst xmlns:a="http://schemas.openxmlformats.org/drawingml/2006/main">
               <a:ext uri="{FF2B5EF4-FFF2-40B4-BE49-F238E27FC236}">
-                <a16:creationId xmlns:a16="http://schemas.microsoft.com/office/drawing/2014/main" id="{A56D6A2C-0E90-4698-8E09-90DE09D47D5F}"/>
+                <a16:creationId xmlns:a16="http://schemas.microsoft.com/office/drawing/2014/main" id="{98E2ABFE-03AA-44D5-B641-AA305D30B447}"/>
               </a:ext>
             </a:extLst>
           </p:cNvPr>
@@ -6131,7 +6136,7 @@
     </p:spTree>
     <p:extLst>
       <p:ext uri="{BB962C8B-B14F-4D97-AF65-F5344CB8AC3E}">
-        <p14:creationId xmlns:p14="http://schemas.microsoft.com/office/powerpoint/2010/main" val="1230037755"/>
+        <p14:creationId xmlns:p14="http://schemas.microsoft.com/office/powerpoint/2010/main" val="764353916"/>
       </p:ext>
     </p:extLst>
   </p:cSld>
@@ -6162,7 +6167,7 @@
           <p:cNvPr id="24" name="">
             <a:extLst xmlns:a="http://schemas.openxmlformats.org/drawingml/2006/main">
               <a:ext uri="{FF2B5EF4-FFF2-40B4-BE49-F238E27FC236}">
-                <a16:creationId xmlns:a16="http://schemas.microsoft.com/office/drawing/2014/main" id="{E1CAD704-F232-4767-AAB5-80EA5B6EF7A7}"/>
+                <a16:creationId xmlns:a16="http://schemas.microsoft.com/office/drawing/2014/main" id="{EC31C6AE-549A-4029-9B84-1D5DA002F47B}"/>
               </a:ext>
             </a:extLst>
           </p:cNvPr>
@@ -6220,7 +6225,7 @@
           <p:cNvPr id="2" name="">
             <a:extLst xmlns:a="http://schemas.openxmlformats.org/drawingml/2006/main">
               <a:ext uri="{FF2B5EF4-FFF2-40B4-BE49-F238E27FC236}">
-                <a16:creationId xmlns:a16="http://schemas.microsoft.com/office/drawing/2014/main" id="{442E5BF9-5EC8-4693-8EE4-DA04652EAEB1}"/>
+                <a16:creationId xmlns:a16="http://schemas.microsoft.com/office/drawing/2014/main" id="{521DB325-615F-46E2-BDC1-0A1314FD9A71}"/>
               </a:ext>
             </a:extLst>
           </p:cNvPr>
@@ -6253,7 +6258,7 @@
           <p:cNvPr id="3" name="">
             <a:extLst xmlns:a="http://schemas.openxmlformats.org/drawingml/2006/main">
               <a:ext uri="{FF2B5EF4-FFF2-40B4-BE49-F238E27FC236}">
-                <a16:creationId xmlns:a16="http://schemas.microsoft.com/office/drawing/2014/main" id="{2E849A3D-974E-41B6-B977-D987049FADA6}"/>
+                <a16:creationId xmlns:a16="http://schemas.microsoft.com/office/drawing/2014/main" id="{6F0CFE8D-35CC-4B70-82C9-E681E6D1623A}"/>
               </a:ext>
             </a:extLst>
           </p:cNvPr>
@@ -6311,7 +6316,7 @@
           <p:cNvPr id="4" name="">
             <a:extLst xmlns:a="http://schemas.openxmlformats.org/drawingml/2006/main">
               <a:ext uri="{FF2B5EF4-FFF2-40B4-BE49-F238E27FC236}">
-                <a16:creationId xmlns:a16="http://schemas.microsoft.com/office/drawing/2014/main" id="{36CB84AB-6EFC-4FB8-A8CD-D87087189BFF}"/>
+                <a16:creationId xmlns:a16="http://schemas.microsoft.com/office/drawing/2014/main" id="{C2AD358C-CC46-43FB-956C-1DCAEBA77E00}"/>
               </a:ext>
             </a:extLst>
           </p:cNvPr>
@@ -6369,7 +6374,7 @@
           <p:cNvPr id="5" name="">
             <a:extLst xmlns:a="http://schemas.openxmlformats.org/drawingml/2006/main">
               <a:ext uri="{FF2B5EF4-FFF2-40B4-BE49-F238E27FC236}">
-                <a16:creationId xmlns:a16="http://schemas.microsoft.com/office/drawing/2014/main" id="{A78600AA-0652-40DE-8B91-13F454938117}"/>
+                <a16:creationId xmlns:a16="http://schemas.microsoft.com/office/drawing/2014/main" id="{1B1D6C8C-7A97-4C4F-A3B7-C81E61270924}"/>
               </a:ext>
             </a:extLst>
           </p:cNvPr>
@@ -6417,7 +6422,7 @@
                 <a:ea typeface="Microsoft YaHei"/>
                 <a:cs typeface="Microsoft YaHei"/>
               </a:rPr>
-              <a:t>150</a:t>
+              <a:t>155</a:t>
             </a:r>
           </a:p>
         </p:txBody>
@@ -6427,7 +6432,7 @@
           <p:cNvPr id="6" name="">
             <a:extLst xmlns:a="http://schemas.openxmlformats.org/drawingml/2006/main">
               <a:ext uri="{FF2B5EF4-FFF2-40B4-BE49-F238E27FC236}">
-                <a16:creationId xmlns:a16="http://schemas.microsoft.com/office/drawing/2014/main" id="{F0BAA303-10A2-4590-94CC-266797FC76ED}"/>
+                <a16:creationId xmlns:a16="http://schemas.microsoft.com/office/drawing/2014/main" id="{4FF7DFF5-2C1B-4DE1-BE19-CFBFC4A10707}"/>
               </a:ext>
             </a:extLst>
           </p:cNvPr>
@@ -6485,7 +6490,7 @@
           <p:cNvPr id="7" name="">
             <a:extLst xmlns:a="http://schemas.openxmlformats.org/drawingml/2006/main">
               <a:ext uri="{FF2B5EF4-FFF2-40B4-BE49-F238E27FC236}">
-                <a16:creationId xmlns:a16="http://schemas.microsoft.com/office/drawing/2014/main" id="{1B7AC1C7-EF4E-4DB3-BBE0-2935A9164DCC}"/>
+                <a16:creationId xmlns:a16="http://schemas.microsoft.com/office/drawing/2014/main" id="{CF28C4FB-7B9E-4093-A94C-9FBA79C68B3A}"/>
               </a:ext>
             </a:extLst>
           </p:cNvPr>
@@ -6543,7 +6548,7 @@
           <p:cNvPr id="8" name="">
             <a:extLst xmlns:a="http://schemas.openxmlformats.org/drawingml/2006/main">
               <a:ext uri="{FF2B5EF4-FFF2-40B4-BE49-F238E27FC236}">
-                <a16:creationId xmlns:a16="http://schemas.microsoft.com/office/drawing/2014/main" id="{F3731984-8FDC-41D3-B131-9E2ED321CCDF}"/>
+                <a16:creationId xmlns:a16="http://schemas.microsoft.com/office/drawing/2014/main" id="{FE89F722-FBB7-45C2-BBAD-3B93AC2B761E}"/>
               </a:ext>
             </a:extLst>
           </p:cNvPr>
@@ -6601,7 +6606,7 @@
           <p:cNvPr id="9" name="">
             <a:extLst xmlns:a="http://schemas.openxmlformats.org/drawingml/2006/main">
               <a:ext uri="{FF2B5EF4-FFF2-40B4-BE49-F238E27FC236}">
-                <a16:creationId xmlns:a16="http://schemas.microsoft.com/office/drawing/2014/main" id="{9D88BBED-43C0-4744-BDE9-1AFAAEDB7792}"/>
+                <a16:creationId xmlns:a16="http://schemas.microsoft.com/office/drawing/2014/main" id="{A12F02DC-44CF-42E3-9973-84922F103127}"/>
               </a:ext>
             </a:extLst>
           </p:cNvPr>
@@ -6613,7 +6618,7 @@
         <p:spPr>
           <a:xfrm xmlns:a="http://schemas.openxmlformats.org/drawingml/2006/main">
             <a:off x="533400" y="4305300"/>
-            <a:ext cx="1428750" cy="495300"/>
+            <a:ext cx="1714500" cy="495300"/>
           </a:xfrm>
           <a:prstGeom xmlns:a="http://schemas.openxmlformats.org/drawingml/2006/main" prst="rect">
             <a:avLst/>
@@ -6649,7 +6654,7 @@
                 <a:ea typeface="Microsoft YaHei"/>
                 <a:cs typeface="Microsoft YaHei"/>
               </a:rPr>
-              <a:t>6/6</a:t>
+              <a:t>16+14</a:t>
             </a:r>
           </a:p>
         </p:txBody>
@@ -6659,7 +6664,7 @@
           <p:cNvPr id="10" name="">
             <a:extLst xmlns:a="http://schemas.openxmlformats.org/drawingml/2006/main">
               <a:ext uri="{FF2B5EF4-FFF2-40B4-BE49-F238E27FC236}">
-                <a16:creationId xmlns:a16="http://schemas.microsoft.com/office/drawing/2014/main" id="{ABB1A132-DFF4-4829-9D7D-9ED1D1F4C129}"/>
+                <a16:creationId xmlns:a16="http://schemas.microsoft.com/office/drawing/2014/main" id="{3FA9FB03-7576-40DA-8680-D28DE9DD28F1}"/>
               </a:ext>
             </a:extLst>
           </p:cNvPr>
@@ -6707,7 +6712,7 @@
                 <a:ea typeface="Microsoft YaHei"/>
                 <a:cs typeface="Microsoft YaHei"/>
               </a:rPr>
-              <a:t>fault gates</a:t>
+              <a:t>bridge gates</a:t>
             </a:r>
           </a:p>
         </p:txBody>
@@ -6717,7 +6722,7 @@
           <p:cNvPr id="11" name="">
             <a:extLst xmlns:a="http://schemas.openxmlformats.org/drawingml/2006/main">
               <a:ext uri="{FF2B5EF4-FFF2-40B4-BE49-F238E27FC236}">
-                <a16:creationId xmlns:a16="http://schemas.microsoft.com/office/drawing/2014/main" id="{C1469990-D1D9-4FAC-AF50-3344CDB8AE5F}"/>
+                <a16:creationId xmlns:a16="http://schemas.microsoft.com/office/drawing/2014/main" id="{07FBFE9D-428C-494C-BB57-5E2F5CFD65E1}"/>
               </a:ext>
             </a:extLst>
           </p:cNvPr>
@@ -6744,7 +6749,7 @@
           <p:cNvPr id="12" name="">
             <a:extLst xmlns:a="http://schemas.openxmlformats.org/drawingml/2006/main">
               <a:ext uri="{FF2B5EF4-FFF2-40B4-BE49-F238E27FC236}">
-                <a16:creationId xmlns:a16="http://schemas.microsoft.com/office/drawing/2014/main" id="{D678BD90-E515-4C29-93AD-2F4A580649BE}"/>
+                <a16:creationId xmlns:a16="http://schemas.microsoft.com/office/drawing/2014/main" id="{F5C9F631-BC76-4870-830B-45E04CA554DC}"/>
               </a:ext>
             </a:extLst>
           </p:cNvPr>
@@ -6802,7 +6807,7 @@
           <p:cNvPr id="13" name="">
             <a:extLst xmlns:a="http://schemas.openxmlformats.org/drawingml/2006/main">
               <a:ext uri="{FF2B5EF4-FFF2-40B4-BE49-F238E27FC236}">
-                <a16:creationId xmlns:a16="http://schemas.microsoft.com/office/drawing/2014/main" id="{33AC80D3-F732-43BF-A5FE-C6ACE9C59B4E}"/>
+                <a16:creationId xmlns:a16="http://schemas.microsoft.com/office/drawing/2014/main" id="{D2DC40AB-B4BA-46BA-8830-592266CD9BAB}"/>
               </a:ext>
             </a:extLst>
           </p:cNvPr>
@@ -6952,7 +6957,7 @@
           <p:cNvPr id="14" name="">
             <a:extLst xmlns:a="http://schemas.openxmlformats.org/drawingml/2006/main">
               <a:ext uri="{FF2B5EF4-FFF2-40B4-BE49-F238E27FC236}">
-                <a16:creationId xmlns:a16="http://schemas.microsoft.com/office/drawing/2014/main" id="{6C067650-A533-4181-A64A-B1835473AC94}"/>
+                <a16:creationId xmlns:a16="http://schemas.microsoft.com/office/drawing/2014/main" id="{91F7E191-ABEF-4C7C-AE3A-587D4C8F3FEC}"/>
               </a:ext>
             </a:extLst>
           </p:cNvPr>
@@ -6985,7 +6990,7 @@
           <p:cNvPr id="15" name="">
             <a:extLst xmlns:a="http://schemas.openxmlformats.org/drawingml/2006/main">
               <a:ext uri="{FF2B5EF4-FFF2-40B4-BE49-F238E27FC236}">
-                <a16:creationId xmlns:a16="http://schemas.microsoft.com/office/drawing/2014/main" id="{4428B59A-CEE3-471B-A537-733DA9BE7BD4}"/>
+                <a16:creationId xmlns:a16="http://schemas.microsoft.com/office/drawing/2014/main" id="{EC8D8736-BF6B-4132-A710-CFC9FE8F53EF}"/>
               </a:ext>
             </a:extLst>
           </p:cNvPr>
@@ -7066,7 +7071,7 @@
           <p:cNvPr id="16" name="">
             <a:extLst xmlns:a="http://schemas.openxmlformats.org/drawingml/2006/main">
               <a:ext uri="{FF2B5EF4-FFF2-40B4-BE49-F238E27FC236}">
-                <a16:creationId xmlns:a16="http://schemas.microsoft.com/office/drawing/2014/main" id="{7E78F131-9363-4A9E-B16B-B50DE91785F6}"/>
+                <a16:creationId xmlns:a16="http://schemas.microsoft.com/office/drawing/2014/main" id="{A815B81B-6429-4E21-8A18-D13A589A3CA8}"/>
               </a:ext>
             </a:extLst>
           </p:cNvPr>
@@ -7093,7 +7098,7 @@
           <p:cNvPr id="17" name="">
             <a:extLst xmlns:a="http://schemas.openxmlformats.org/drawingml/2006/main">
               <a:ext uri="{FF2B5EF4-FFF2-40B4-BE49-F238E27FC236}">
-                <a16:creationId xmlns:a16="http://schemas.microsoft.com/office/drawing/2014/main" id="{4CBBDB84-377A-4D08-886E-A2CF52EBD8AB}"/>
+                <a16:creationId xmlns:a16="http://schemas.microsoft.com/office/drawing/2014/main" id="{91543D25-09FB-4278-96DA-45442382D2AB}"/>
               </a:ext>
             </a:extLst>
           </p:cNvPr>
@@ -7151,7 +7156,7 @@
           <p:cNvPr id="18" name="">
             <a:extLst xmlns:a="http://schemas.openxmlformats.org/drawingml/2006/main">
               <a:ext uri="{FF2B5EF4-FFF2-40B4-BE49-F238E27FC236}">
-                <a16:creationId xmlns:a16="http://schemas.microsoft.com/office/drawing/2014/main" id="{FFB7D56C-47A4-4CC1-A166-A2F24BB9FE81}"/>
+                <a16:creationId xmlns:a16="http://schemas.microsoft.com/office/drawing/2014/main" id="{C500FFB3-F667-4E43-B597-D41DF08D4C89}"/>
               </a:ext>
             </a:extLst>
           </p:cNvPr>
@@ -7209,7 +7214,7 @@
           <p:cNvPr id="19" name="">
             <a:extLst xmlns:a="http://schemas.openxmlformats.org/drawingml/2006/main">
               <a:ext uri="{FF2B5EF4-FFF2-40B4-BE49-F238E27FC236}">
-                <a16:creationId xmlns:a16="http://schemas.microsoft.com/office/drawing/2014/main" id="{A8085697-74DD-4F2A-A245-5B6016580E28}"/>
+                <a16:creationId xmlns:a16="http://schemas.microsoft.com/office/drawing/2014/main" id="{1B4B3634-D43D-4D5D-B68D-6D622DCCC3A8}"/>
               </a:ext>
             </a:extLst>
           </p:cNvPr>
@@ -7267,7 +7272,7 @@
           <p:cNvPr id="20" name="">
             <a:extLst xmlns:a="http://schemas.openxmlformats.org/drawingml/2006/main">
               <a:ext uri="{FF2B5EF4-FFF2-40B4-BE49-F238E27FC236}">
-                <a16:creationId xmlns:a16="http://schemas.microsoft.com/office/drawing/2014/main" id="{9B821062-E583-47AE-A67C-C11A3DCF8F10}"/>
+                <a16:creationId xmlns:a16="http://schemas.microsoft.com/office/drawing/2014/main" id="{9602BBA9-947D-4DD7-90B8-7343E24A103E}"/>
               </a:ext>
             </a:extLst>
           </p:cNvPr>
@@ -7315,7 +7320,7 @@
                 <a:ea typeface="Consolas"/>
                 <a:cs typeface="Consolas"/>
               </a:rPr>
-              <a:t>Run 33354020784</a:t>
+              <a:t>Run 33363220127</a:t>
             </a:r>
           </a:p>
         </p:txBody>
@@ -7325,7 +7330,7 @@
           <p:cNvPr id="21" name="">
             <a:extLst xmlns:a="http://schemas.openxmlformats.org/drawingml/2006/main">
               <a:ext uri="{FF2B5EF4-FFF2-40B4-BE49-F238E27FC236}">
-                <a16:creationId xmlns:a16="http://schemas.microsoft.com/office/drawing/2014/main" id="{32EF5B1B-9226-4BC9-9D0A-EF2B8E37F9AA}"/>
+                <a16:creationId xmlns:a16="http://schemas.microsoft.com/office/drawing/2014/main" id="{C4E7C812-79D6-4DEC-B6C9-79065CF9DA76}"/>
               </a:ext>
             </a:extLst>
           </p:cNvPr>
@@ -7406,7 +7411,7 @@
           <p:cNvPr id="22" name="">
             <a:extLst xmlns:a="http://schemas.openxmlformats.org/drawingml/2006/main">
               <a:ext uri="{FF2B5EF4-FFF2-40B4-BE49-F238E27FC236}">
-                <a16:creationId xmlns:a16="http://schemas.microsoft.com/office/drawing/2014/main" id="{395686AE-D18D-45E1-BA8A-AE0EA84A9010}"/>
+                <a16:creationId xmlns:a16="http://schemas.microsoft.com/office/drawing/2014/main" id="{7C95E1C9-1C92-444F-A8C3-B697255E64D0}"/>
               </a:ext>
             </a:extLst>
           </p:cNvPr>
@@ -7487,7 +7492,7 @@
           <p:cNvPr id="23" name="">
             <a:extLst xmlns:a="http://schemas.openxmlformats.org/drawingml/2006/main">
               <a:ext uri="{FF2B5EF4-FFF2-40B4-BE49-F238E27FC236}">
-                <a16:creationId xmlns:a16="http://schemas.microsoft.com/office/drawing/2014/main" id="{6EB7312E-4E31-4708-9674-B8634F3D11C6}"/>
+                <a16:creationId xmlns:a16="http://schemas.microsoft.com/office/drawing/2014/main" id="{EFA826E3-F408-4C68-BC68-FD00B9A34DC6}"/>
               </a:ext>
             </a:extLst>
           </p:cNvPr>
@@ -7543,7 +7548,7 @@
     </p:spTree>
     <p:extLst>
       <p:ext uri="{BB962C8B-B14F-4D97-AF65-F5344CB8AC3E}">
-        <p14:creationId xmlns:p14="http://schemas.microsoft.com/office/powerpoint/2010/main" val="621817738"/>
+        <p14:creationId xmlns:p14="http://schemas.microsoft.com/office/powerpoint/2010/main" val="1382888477"/>
       </p:ext>
     </p:extLst>
   </p:cSld>
